--- a/PLSQL/05장/5장_패키지와트리거.pptx
+++ b/PLSQL/05장/5장_패키지와트리거.pptx
@@ -4,64 +4,67 @@
   <p:sldMasterIdLst>
     <p:sldMasterId id="2147483648" r:id="rId1"/>
   </p:sldMasterIdLst>
+  <p:notesMasterIdLst>
+    <p:notesMasterId r:id="rId57"/>
+  </p:notesMasterIdLst>
   <p:sldIdLst>
-    <p:sldId id="256" r:id="rId7"/>
-    <p:sldId id="257" r:id="rId9"/>
-    <p:sldId id="258" r:id="rId10"/>
-    <p:sldId id="259" r:id="rId11"/>
-    <p:sldId id="260" r:id="rId12"/>
-    <p:sldId id="261" r:id="rId13"/>
-    <p:sldId id="262" r:id="rId14"/>
-    <p:sldId id="263" r:id="rId15"/>
-    <p:sldId id="264" r:id="rId16"/>
-    <p:sldId id="265" r:id="rId17"/>
-    <p:sldId id="266" r:id="rId18"/>
-    <p:sldId id="267" r:id="rId19"/>
-    <p:sldId id="268" r:id="rId20"/>
-    <p:sldId id="269" r:id="rId21"/>
-    <p:sldId id="270" r:id="rId22"/>
-    <p:sldId id="271" r:id="rId23"/>
-    <p:sldId id="272" r:id="rId24"/>
-    <p:sldId id="273" r:id="rId25"/>
-    <p:sldId id="274" r:id="rId26"/>
-    <p:sldId id="275" r:id="rId27"/>
-    <p:sldId id="276" r:id="rId28"/>
-    <p:sldId id="277" r:id="rId29"/>
-    <p:sldId id="278" r:id="rId30"/>
-    <p:sldId id="279" r:id="rId31"/>
-    <p:sldId id="280" r:id="rId32"/>
-    <p:sldId id="281" r:id="rId33"/>
-    <p:sldId id="282" r:id="rId34"/>
-    <p:sldId id="283" r:id="rId35"/>
-    <p:sldId id="284" r:id="rId36"/>
-    <p:sldId id="285" r:id="rId37"/>
-    <p:sldId id="286" r:id="rId38"/>
-    <p:sldId id="287" r:id="rId39"/>
-    <p:sldId id="288" r:id="rId40"/>
-    <p:sldId id="289" r:id="rId41"/>
-    <p:sldId id="290" r:id="rId42"/>
-    <p:sldId id="291" r:id="rId43"/>
-    <p:sldId id="292" r:id="rId44"/>
-    <p:sldId id="293" r:id="rId45"/>
-    <p:sldId id="294" r:id="rId46"/>
-    <p:sldId id="295" r:id="rId47"/>
-    <p:sldId id="296" r:id="rId48"/>
-    <p:sldId id="297" r:id="rId49"/>
-    <p:sldId id="298" r:id="rId50"/>
-    <p:sldId id="299" r:id="rId51"/>
-    <p:sldId id="300" r:id="rId52"/>
-    <p:sldId id="301" r:id="rId53"/>
-    <p:sldId id="302" r:id="rId54"/>
-    <p:sldId id="303" r:id="rId55"/>
-    <p:sldId id="304" r:id="rId56"/>
-    <p:sldId id="305" r:id="rId57"/>
-    <p:sldId id="306" r:id="rId58"/>
-    <p:sldId id="307" r:id="rId59"/>
-    <p:sldId id="308" r:id="rId60"/>
-    <p:sldId id="309" r:id="rId61"/>
-    <p:sldId id="310" r:id="rId62"/>
+    <p:sldId id="256" r:id="rId2"/>
+    <p:sldId id="257" r:id="rId3"/>
+    <p:sldId id="258" r:id="rId4"/>
+    <p:sldId id="259" r:id="rId5"/>
+    <p:sldId id="260" r:id="rId6"/>
+    <p:sldId id="261" r:id="rId7"/>
+    <p:sldId id="262" r:id="rId8"/>
+    <p:sldId id="263" r:id="rId9"/>
+    <p:sldId id="264" r:id="rId10"/>
+    <p:sldId id="265" r:id="rId11"/>
+    <p:sldId id="266" r:id="rId12"/>
+    <p:sldId id="267" r:id="rId13"/>
+    <p:sldId id="268" r:id="rId14"/>
+    <p:sldId id="269" r:id="rId15"/>
+    <p:sldId id="270" r:id="rId16"/>
+    <p:sldId id="271" r:id="rId17"/>
+    <p:sldId id="272" r:id="rId18"/>
+    <p:sldId id="273" r:id="rId19"/>
+    <p:sldId id="274" r:id="rId20"/>
+    <p:sldId id="275" r:id="rId21"/>
+    <p:sldId id="276" r:id="rId22"/>
+    <p:sldId id="277" r:id="rId23"/>
+    <p:sldId id="278" r:id="rId24"/>
+    <p:sldId id="279" r:id="rId25"/>
+    <p:sldId id="280" r:id="rId26"/>
+    <p:sldId id="281" r:id="rId27"/>
+    <p:sldId id="282" r:id="rId28"/>
+    <p:sldId id="283" r:id="rId29"/>
+    <p:sldId id="284" r:id="rId30"/>
+    <p:sldId id="285" r:id="rId31"/>
+    <p:sldId id="286" r:id="rId32"/>
+    <p:sldId id="287" r:id="rId33"/>
+    <p:sldId id="288" r:id="rId34"/>
+    <p:sldId id="289" r:id="rId35"/>
+    <p:sldId id="290" r:id="rId36"/>
+    <p:sldId id="291" r:id="rId37"/>
+    <p:sldId id="292" r:id="rId38"/>
+    <p:sldId id="293" r:id="rId39"/>
+    <p:sldId id="294" r:id="rId40"/>
+    <p:sldId id="295" r:id="rId41"/>
+    <p:sldId id="296" r:id="rId42"/>
+    <p:sldId id="297" r:id="rId43"/>
+    <p:sldId id="298" r:id="rId44"/>
+    <p:sldId id="299" r:id="rId45"/>
+    <p:sldId id="300" r:id="rId46"/>
+    <p:sldId id="301" r:id="rId47"/>
+    <p:sldId id="302" r:id="rId48"/>
+    <p:sldId id="303" r:id="rId49"/>
+    <p:sldId id="304" r:id="rId50"/>
+    <p:sldId id="305" r:id="rId51"/>
+    <p:sldId id="306" r:id="rId52"/>
+    <p:sldId id="307" r:id="rId53"/>
+    <p:sldId id="308" r:id="rId54"/>
+    <p:sldId id="309" r:id="rId55"/>
+    <p:sldId id="310" r:id="rId56"/>
   </p:sldIdLst>
-  <p:sldSz cx="12191695" cy="6858000" type="screen4x3"/>
+  <p:sldSz cx="12192000" cy="6858000"/>
   <p:notesSz cx="6858000" cy="9144000"/>
   <p:defaultTextStyle>
     <a:defPPr>
@@ -158,11 +161,27 @@
       </a:defRPr>
     </a:lvl9pPr>
   </p:defaultTextStyle>
+  <p:extLst>
+    <p:ext uri="{EFAFB233-063F-42B5-8137-9DF3F51BA10A}">
+      <p15:sldGuideLst xmlns:p15="http://schemas.microsoft.com/office/powerpoint/2012/main">
+        <p15:guide id="1" orient="horz" pos="2160">
+          <p15:clr>
+            <a:srgbClr val="A4A3A4"/>
+          </p15:clr>
+        </p15:guide>
+        <p15:guide id="2" pos="2880">
+          <p15:clr>
+            <a:srgbClr val="A4A3A4"/>
+          </p15:clr>
+        </p15:guide>
+      </p15:sldGuideLst>
+    </p:ext>
+  </p:extLst>
 </p:presentation>
 </file>
 
 <file path=ppt/notesMasters/notesMaster1.xml><?xml version="1.0" encoding="utf-8"?>
-<p:notesMaster xmlns:a="http://schemas.openxmlformats.org/drawingml/2006/main" xmlns:p="http://schemas.openxmlformats.org/presentationml/2006/main" xmlns:r="http://schemas.openxmlformats.org/officeDocument/2006/relationships">
+<p:notesMaster xmlns:a="http://schemas.openxmlformats.org/drawingml/2006/main" xmlns:r="http://schemas.openxmlformats.org/officeDocument/2006/relationships" xmlns:p="http://schemas.openxmlformats.org/presentationml/2006/main">
   <p:cSld>
     <p:bg>
       <p:bgRef idx="1001">
@@ -183,241 +202,16 @@
           <a:chExt cx="0" cy="0"/>
         </a:xfrm>
       </p:grpSpPr>
-      <p:sp>
-        <p:nvSpPr>
-          <p:cNvPr id="2" name="Header Placeholder 1"/>
-          <p:cNvSpPr>
-            <a:spLocks noGrp="1"/>
-          </p:cNvSpPr>
-          <p:nvPr>
-            <p:ph type="hdr" sz="quarter"/>
-          </p:nvPr>
-        </p:nvSpPr>
-        <p:spPr>
-          <a:xfrm>
-            <a:off x="0" y="0"/>
-            <a:ext cx="2971800" cy="457200"/>
-          </a:xfrm>
-          <a:prstGeom prst="rect">
-            <a:avLst/>
-          </a:prstGeom>
-        </p:spPr>
-        <p:txBody>
-          <a:bodyPr vert="horz" lIns="91440" tIns="45720" rIns="91440" bIns="45720" rtlCol="0"/>
-          <a:lstStyle>
-            <a:lvl1pPr algn="l">
-              <a:defRPr sz="1200"/>
-            </a:lvl1pPr>
-          </a:lstStyle>
-          <a:p>
-            <a:endParaRPr lang="en-US"/>
-          </a:p>
-        </p:txBody>
-      </p:sp>
-      <p:sp>
-        <p:nvSpPr>
-          <p:cNvPr id="3" name="Date Placeholder 2"/>
-          <p:cNvSpPr>
-            <a:spLocks noGrp="1"/>
-          </p:cNvSpPr>
-          <p:nvPr>
-            <p:ph type="dt" idx="1"/>
-          </p:nvPr>
-        </p:nvSpPr>
-        <p:spPr>
-          <a:xfrm>
-            <a:off x="3884613" y="0"/>
-            <a:ext cx="2971800" cy="457200"/>
-          </a:xfrm>
-          <a:prstGeom prst="rect">
-            <a:avLst/>
-          </a:prstGeom>
-        </p:spPr>
-        <p:txBody>
-          <a:bodyPr vert="horz" lIns="91440" tIns="45720" rIns="91440" bIns="45720" rtlCol="0"/>
-          <a:lstStyle>
-            <a:lvl1pPr algn="r">
-              <a:defRPr sz="1200"/>
-            </a:lvl1pPr>
-          </a:lstStyle>
-          <a:p>
-            <a:fld id="{0F89C1C7-3DCD-1040-A9CF-14679D8B5DDD}" type="datetimeFigureOut">
-              <a:rPr lang="en-US" smtClean="0"/>
-              <a:t>10/17/16</a:t>
-            </a:fld>
-            <a:endParaRPr lang="en-US"/>
-          </a:p>
-        </p:txBody>
-      </p:sp>
-      <p:sp>
-        <p:nvSpPr>
-          <p:cNvPr id="4" name="Slide Image Placeholder 3"/>
-          <p:cNvSpPr>
-            <a:spLocks noGrp="1" noRot="1" noChangeAspect="1"/>
-          </p:cNvSpPr>
-          <p:nvPr>
-            <p:ph type="sldImg" idx="2"/>
-          </p:nvPr>
-        </p:nvSpPr>
-        <p:spPr>
-          <a:xfrm>
-            <a:off x="1143000" y="685800"/>
-            <a:ext cx="4572000" cy="3429000"/>
-          </a:xfrm>
-          <a:prstGeom prst="rect">
-            <a:avLst/>
-          </a:prstGeom>
-          <a:noFill/>
-          <a:ln w="12700">
-            <a:solidFill>
-              <a:prstClr val="black"/>
-            </a:solidFill>
-          </a:ln>
-        </p:spPr>
-        <p:txBody>
-          <a:bodyPr vert="horz" lIns="91440" tIns="45720" rIns="91440" bIns="45720" rtlCol="0" anchor="ctr"/>
-          <a:lstStyle/>
-          <a:p>
-            <a:endParaRPr lang="en-US"/>
-          </a:p>
-        </p:txBody>
-      </p:sp>
-      <p:sp>
-        <p:nvSpPr>
-          <p:cNvPr id="5" name="Notes Placeholder 4"/>
-          <p:cNvSpPr>
-            <a:spLocks noGrp="1"/>
-          </p:cNvSpPr>
-          <p:nvPr>
-            <p:ph type="body" sz="quarter" idx="3"/>
-          </p:nvPr>
-        </p:nvSpPr>
-        <p:spPr>
-          <a:xfrm>
-            <a:off x="685800" y="4343400"/>
-            <a:ext cx="5486400" cy="4114800"/>
-          </a:xfrm>
-          <a:prstGeom prst="rect">
-            <a:avLst/>
-          </a:prstGeom>
-        </p:spPr>
-        <p:txBody>
-          <a:bodyPr vert="horz" lIns="91440" tIns="45720" rIns="91440" bIns="45720" rtlCol="0"/>
-          <a:lstStyle/>
-          <a:p>
-            <a:pPr lvl="0"/>
-            <a:r>
-              <a:rPr lang="en-US" smtClean="0"/>
-              <a:t>Click to edit Master text styles</a:t>
-            </a:r>
-          </a:p>
-          <a:p>
-            <a:pPr lvl="1"/>
-            <a:r>
-              <a:rPr lang="en-US" smtClean="0"/>
-              <a:t>Second level</a:t>
-            </a:r>
-          </a:p>
-          <a:p>
-            <a:pPr lvl="2"/>
-            <a:r>
-              <a:rPr lang="en-US" smtClean="0"/>
-              <a:t>Third level</a:t>
-            </a:r>
-          </a:p>
-          <a:p>
-            <a:pPr lvl="3"/>
-            <a:r>
-              <a:rPr lang="en-US" smtClean="0"/>
-              <a:t>Fourth level</a:t>
-            </a:r>
-          </a:p>
-          <a:p>
-            <a:pPr lvl="4"/>
-            <a:r>
-              <a:rPr lang="en-US" smtClean="0"/>
-              <a:t>Fifth level</a:t>
-            </a:r>
-            <a:endParaRPr lang="en-US"/>
-          </a:p>
-        </p:txBody>
-      </p:sp>
-      <p:sp>
-        <p:nvSpPr>
-          <p:cNvPr id="6" name="Footer Placeholder 5"/>
-          <p:cNvSpPr>
-            <a:spLocks noGrp="1"/>
-          </p:cNvSpPr>
-          <p:nvPr>
-            <p:ph type="ftr" sz="quarter" idx="4"/>
-          </p:nvPr>
-        </p:nvSpPr>
-        <p:spPr>
-          <a:xfrm>
-            <a:off x="0" y="8685213"/>
-            <a:ext cx="2971800" cy="457200"/>
-          </a:xfrm>
-          <a:prstGeom prst="rect">
-            <a:avLst/>
-          </a:prstGeom>
-        </p:spPr>
-        <p:txBody>
-          <a:bodyPr vert="horz" lIns="91440" tIns="45720" rIns="91440" bIns="45720" rtlCol="0" anchor="b"/>
-          <a:lstStyle>
-            <a:lvl1pPr algn="l">
-              <a:defRPr sz="1200"/>
-            </a:lvl1pPr>
-          </a:lstStyle>
-          <a:p>
-            <a:endParaRPr lang="en-US"/>
-          </a:p>
-        </p:txBody>
-      </p:sp>
-      <p:sp>
-        <p:nvSpPr>
-          <p:cNvPr id="7" name="Slide Number Placeholder 6"/>
-          <p:cNvSpPr>
-            <a:spLocks noGrp="1"/>
-          </p:cNvSpPr>
-          <p:nvPr>
-            <p:ph type="sldNum" sz="quarter" idx="5"/>
-          </p:nvPr>
-        </p:nvSpPr>
-        <p:spPr>
-          <a:xfrm>
-            <a:off x="3884613" y="8685213"/>
-            <a:ext cx="2971800" cy="457200"/>
-          </a:xfrm>
-          <a:prstGeom prst="rect">
-            <a:avLst/>
-          </a:prstGeom>
-        </p:spPr>
-        <p:txBody>
-          <a:bodyPr vert="horz" lIns="91440" tIns="45720" rIns="91440" bIns="45720" rtlCol="0" anchor="b"/>
-          <a:lstStyle>
-            <a:lvl1pPr algn="r">
-              <a:defRPr sz="1200"/>
-            </a:lvl1pPr>
-          </a:lstStyle>
-          <a:p>
-            <a:fld id="{BB5E49A5-4136-284D-997B-48E1D791AD67}" type="slidenum">
-              <a:rPr lang="en-US" smtClean="0"/>
-              <a:t>‹#›</a:t>
-            </a:fld>
-            <a:endParaRPr lang="en-US"/>
-          </a:p>
-        </p:txBody>
-      </p:sp>
     </p:spTree>
     <p:extLst>
       <p:ext uri="{BB962C8B-B14F-4D97-AF65-F5344CB8AC3E}">
-        <p14:creationId xmlns:p14="http://schemas.microsoft.com/office/powerpoint/2010/main" val="2623252185"/>
+        <p14:creationId xmlns:p14="http://schemas.microsoft.com/office/powerpoint/2010/main" val="3527044477"/>
       </p:ext>
     </p:extLst>
   </p:cSld>
   <p:clrMap bg1="lt1" tx1="dk1" bg2="lt2" tx2="dk2" accent1="accent1" accent2="accent2" accent3="accent3" accent4="accent4" accent5="accent5" accent6="accent6" hlink="hlink" folHlink="folHlink"/>
   <p:notesStyle>
-    <a:lvl1pPr marL="0" algn="l" defTabSz="457200" rtl="0" eaLnBrk="1" latinLnBrk="0" hangingPunct="1">
+    <a:lvl1pPr marL="0" algn="l" defTabSz="914400" rtl="0" eaLnBrk="1" latinLnBrk="1" hangingPunct="1">
       <a:defRPr sz="1200" kern="1200">
         <a:solidFill>
           <a:schemeClr val="tx1"/>
@@ -427,7 +221,7 @@
         <a:cs typeface="+mn-cs"/>
       </a:defRPr>
     </a:lvl1pPr>
-    <a:lvl2pPr marL="457200" algn="l" defTabSz="457200" rtl="0" eaLnBrk="1" latinLnBrk="0" hangingPunct="1">
+    <a:lvl2pPr marL="457200" algn="l" defTabSz="914400" rtl="0" eaLnBrk="1" latinLnBrk="1" hangingPunct="1">
       <a:defRPr sz="1200" kern="1200">
         <a:solidFill>
           <a:schemeClr val="tx1"/>
@@ -437,7 +231,7 @@
         <a:cs typeface="+mn-cs"/>
       </a:defRPr>
     </a:lvl2pPr>
-    <a:lvl3pPr marL="914400" algn="l" defTabSz="457200" rtl="0" eaLnBrk="1" latinLnBrk="0" hangingPunct="1">
+    <a:lvl3pPr marL="914400" algn="l" defTabSz="914400" rtl="0" eaLnBrk="1" latinLnBrk="1" hangingPunct="1">
       <a:defRPr sz="1200" kern="1200">
         <a:solidFill>
           <a:schemeClr val="tx1"/>
@@ -447,7 +241,7 @@
         <a:cs typeface="+mn-cs"/>
       </a:defRPr>
     </a:lvl3pPr>
-    <a:lvl4pPr marL="1371600" algn="l" defTabSz="457200" rtl="0" eaLnBrk="1" latinLnBrk="0" hangingPunct="1">
+    <a:lvl4pPr marL="1371600" algn="l" defTabSz="914400" rtl="0" eaLnBrk="1" latinLnBrk="1" hangingPunct="1">
       <a:defRPr sz="1200" kern="1200">
         <a:solidFill>
           <a:schemeClr val="tx1"/>
@@ -457,7 +251,7 @@
         <a:cs typeface="+mn-cs"/>
       </a:defRPr>
     </a:lvl4pPr>
-    <a:lvl5pPr marL="1828800" algn="l" defTabSz="457200" rtl="0" eaLnBrk="1" latinLnBrk="0" hangingPunct="1">
+    <a:lvl5pPr marL="1828800" algn="l" defTabSz="914400" rtl="0" eaLnBrk="1" latinLnBrk="1" hangingPunct="1">
       <a:defRPr sz="1200" kern="1200">
         <a:solidFill>
           <a:schemeClr val="tx1"/>
@@ -467,7 +261,7 @@
         <a:cs typeface="+mn-cs"/>
       </a:defRPr>
     </a:lvl5pPr>
-    <a:lvl6pPr marL="2286000" algn="l" defTabSz="457200" rtl="0" eaLnBrk="1" latinLnBrk="0" hangingPunct="1">
+    <a:lvl6pPr marL="2286000" algn="l" defTabSz="914400" rtl="0" eaLnBrk="1" latinLnBrk="1" hangingPunct="1">
       <a:defRPr sz="1200" kern="1200">
         <a:solidFill>
           <a:schemeClr val="tx1"/>
@@ -477,7 +271,7 @@
         <a:cs typeface="+mn-cs"/>
       </a:defRPr>
     </a:lvl6pPr>
-    <a:lvl7pPr marL="2743200" algn="l" defTabSz="457200" rtl="0" eaLnBrk="1" latinLnBrk="0" hangingPunct="1">
+    <a:lvl7pPr marL="2743200" algn="l" defTabSz="914400" rtl="0" eaLnBrk="1" latinLnBrk="1" hangingPunct="1">
       <a:defRPr sz="1200" kern="1200">
         <a:solidFill>
           <a:schemeClr val="tx1"/>
@@ -487,7 +281,7 @@
         <a:cs typeface="+mn-cs"/>
       </a:defRPr>
     </a:lvl7pPr>
-    <a:lvl8pPr marL="3200400" algn="l" defTabSz="457200" rtl="0" eaLnBrk="1" latinLnBrk="0" hangingPunct="1">
+    <a:lvl8pPr marL="3200400" algn="l" defTabSz="914400" rtl="0" eaLnBrk="1" latinLnBrk="1" hangingPunct="1">
       <a:defRPr sz="1200" kern="1200">
         <a:solidFill>
           <a:schemeClr val="tx1"/>
@@ -497,7 +291,7 @@
         <a:cs typeface="+mn-cs"/>
       </a:defRPr>
     </a:lvl8pPr>
-    <a:lvl9pPr marL="3657600" algn="l" defTabSz="457200" rtl="0" eaLnBrk="1" latinLnBrk="0" hangingPunct="1">
+    <a:lvl9pPr marL="3657600" algn="l" defTabSz="914400" rtl="0" eaLnBrk="1" latinLnBrk="1" hangingPunct="1">
       <a:defRPr sz="1200" kern="1200">
         <a:solidFill>
           <a:schemeClr val="tx1"/>
@@ -512,7 +306,7 @@
 </file>
 
 <file path=ppt/notesSlides/notesSlide1.xml><?xml version="1.0" encoding="utf-8"?>
-<p:notes xmlns:a="http://schemas.openxmlformats.org/drawingml/2006/main" xmlns:p="http://schemas.openxmlformats.org/presentationml/2006/main" xmlns:r="http://schemas.openxmlformats.org/officeDocument/2006/relationships">
+<p:notes xmlns:a="http://schemas.openxmlformats.org/drawingml/2006/main" xmlns:r="http://schemas.openxmlformats.org/officeDocument/2006/relationships" xmlns:p="http://schemas.openxmlformats.org/presentationml/2006/main">
   <p:cSld>
     <p:spTree>
       <p:nvGrpSpPr>
@@ -532,7 +326,7 @@
         <p:nvSpPr>
           <p:cNvPr id="2" name="Slide Image Placeholder 1"/>
           <p:cNvSpPr>
-            <a:spLocks noGrp="1"/>
+            <a:spLocks noGrp="1" noRot="1" noChangeAspect="1"/>
           </p:cNvSpPr>
           <p:nvPr>
             <p:ph type="sldImg" idx="2"/>
@@ -547,7 +341,7 @@
             <a:spLocks noGrp="1"/>
           </p:cNvSpPr>
           <p:nvPr>
-            <p:ph type="body" idx="3" sz="quarter"/>
+            <p:ph type="body" sz="quarter" idx="3"/>
           </p:nvPr>
         </p:nvSpPr>
         <p:spPr/>
@@ -568,7 +362,7 @@
             <a:spLocks noGrp="1"/>
           </p:cNvSpPr>
           <p:nvPr>
-            <p:ph type="sldNum" idx="5" sz="quarter"/>
+            <p:ph type="sldNum" sz="quarter" idx="5"/>
           </p:nvPr>
         </p:nvSpPr>
         <p:spPr/>
@@ -582,7 +376,7 @@
 </file>
 
 <file path=ppt/notesSlides/notesSlide10.xml><?xml version="1.0" encoding="utf-8"?>
-<p:notes xmlns:a="http://schemas.openxmlformats.org/drawingml/2006/main" xmlns:p="http://schemas.openxmlformats.org/presentationml/2006/main" xmlns:r="http://schemas.openxmlformats.org/officeDocument/2006/relationships">
+<p:notes xmlns:a="http://schemas.openxmlformats.org/drawingml/2006/main" xmlns:r="http://schemas.openxmlformats.org/officeDocument/2006/relationships" xmlns:p="http://schemas.openxmlformats.org/presentationml/2006/main">
   <p:cSld>
     <p:spTree>
       <p:nvGrpSpPr>
@@ -602,7 +396,7 @@
         <p:nvSpPr>
           <p:cNvPr id="2" name="Slide Image Placeholder 1"/>
           <p:cNvSpPr>
-            <a:spLocks noGrp="1"/>
+            <a:spLocks noGrp="1" noRot="1" noChangeAspect="1"/>
           </p:cNvSpPr>
           <p:nvPr>
             <p:ph type="sldImg" idx="2"/>
@@ -617,7 +411,7 @@
             <a:spLocks noGrp="1"/>
           </p:cNvSpPr>
           <p:nvPr>
-            <p:ph type="body" idx="3" sz="quarter"/>
+            <p:ph type="body" sz="quarter" idx="3"/>
           </p:nvPr>
         </p:nvSpPr>
         <p:spPr/>
@@ -638,7 +432,7 @@
             <a:spLocks noGrp="1"/>
           </p:cNvSpPr>
           <p:nvPr>
-            <p:ph type="sldNum" idx="5" sz="quarter"/>
+            <p:ph type="sldNum" sz="quarter" idx="5"/>
           </p:nvPr>
         </p:nvSpPr>
         <p:spPr/>
@@ -652,7 +446,7 @@
 </file>
 
 <file path=ppt/notesSlides/notesSlide11.xml><?xml version="1.0" encoding="utf-8"?>
-<p:notes xmlns:a="http://schemas.openxmlformats.org/drawingml/2006/main" xmlns:p="http://schemas.openxmlformats.org/presentationml/2006/main" xmlns:r="http://schemas.openxmlformats.org/officeDocument/2006/relationships">
+<p:notes xmlns:a="http://schemas.openxmlformats.org/drawingml/2006/main" xmlns:r="http://schemas.openxmlformats.org/officeDocument/2006/relationships" xmlns:p="http://schemas.openxmlformats.org/presentationml/2006/main">
   <p:cSld>
     <p:spTree>
       <p:nvGrpSpPr>
@@ -672,7 +466,7 @@
         <p:nvSpPr>
           <p:cNvPr id="2" name="Slide Image Placeholder 1"/>
           <p:cNvSpPr>
-            <a:spLocks noGrp="1"/>
+            <a:spLocks noGrp="1" noRot="1" noChangeAspect="1"/>
           </p:cNvSpPr>
           <p:nvPr>
             <p:ph type="sldImg" idx="2"/>
@@ -687,7 +481,7 @@
             <a:spLocks noGrp="1"/>
           </p:cNvSpPr>
           <p:nvPr>
-            <p:ph type="body" idx="3" sz="quarter"/>
+            <p:ph type="body" sz="quarter" idx="3"/>
           </p:nvPr>
         </p:nvSpPr>
         <p:spPr/>
@@ -708,7 +502,7 @@
             <a:spLocks noGrp="1"/>
           </p:cNvSpPr>
           <p:nvPr>
-            <p:ph type="sldNum" idx="5" sz="quarter"/>
+            <p:ph type="sldNum" sz="quarter" idx="5"/>
           </p:nvPr>
         </p:nvSpPr>
         <p:spPr/>
@@ -722,7 +516,7 @@
 </file>
 
 <file path=ppt/notesSlides/notesSlide12.xml><?xml version="1.0" encoding="utf-8"?>
-<p:notes xmlns:a="http://schemas.openxmlformats.org/drawingml/2006/main" xmlns:p="http://schemas.openxmlformats.org/presentationml/2006/main" xmlns:r="http://schemas.openxmlformats.org/officeDocument/2006/relationships">
+<p:notes xmlns:a="http://schemas.openxmlformats.org/drawingml/2006/main" xmlns:r="http://schemas.openxmlformats.org/officeDocument/2006/relationships" xmlns:p="http://schemas.openxmlformats.org/presentationml/2006/main">
   <p:cSld>
     <p:spTree>
       <p:nvGrpSpPr>
@@ -742,7 +536,7 @@
         <p:nvSpPr>
           <p:cNvPr id="2" name="Slide Image Placeholder 1"/>
           <p:cNvSpPr>
-            <a:spLocks noGrp="1"/>
+            <a:spLocks noGrp="1" noRot="1" noChangeAspect="1"/>
           </p:cNvSpPr>
           <p:nvPr>
             <p:ph type="sldImg" idx="2"/>
@@ -757,7 +551,7 @@
             <a:spLocks noGrp="1"/>
           </p:cNvSpPr>
           <p:nvPr>
-            <p:ph type="body" idx="3" sz="quarter"/>
+            <p:ph type="body" sz="quarter" idx="3"/>
           </p:nvPr>
         </p:nvSpPr>
         <p:spPr/>
@@ -778,7 +572,7 @@
             <a:spLocks noGrp="1"/>
           </p:cNvSpPr>
           <p:nvPr>
-            <p:ph type="sldNum" idx="5" sz="quarter"/>
+            <p:ph type="sldNum" sz="quarter" idx="5"/>
           </p:nvPr>
         </p:nvSpPr>
         <p:spPr/>
@@ -792,7 +586,7 @@
 </file>
 
 <file path=ppt/notesSlides/notesSlide13.xml><?xml version="1.0" encoding="utf-8"?>
-<p:notes xmlns:a="http://schemas.openxmlformats.org/drawingml/2006/main" xmlns:p="http://schemas.openxmlformats.org/presentationml/2006/main" xmlns:r="http://schemas.openxmlformats.org/officeDocument/2006/relationships">
+<p:notes xmlns:a="http://schemas.openxmlformats.org/drawingml/2006/main" xmlns:r="http://schemas.openxmlformats.org/officeDocument/2006/relationships" xmlns:p="http://schemas.openxmlformats.org/presentationml/2006/main">
   <p:cSld>
     <p:spTree>
       <p:nvGrpSpPr>
@@ -812,7 +606,7 @@
         <p:nvSpPr>
           <p:cNvPr id="2" name="Slide Image Placeholder 1"/>
           <p:cNvSpPr>
-            <a:spLocks noGrp="1"/>
+            <a:spLocks noGrp="1" noRot="1" noChangeAspect="1"/>
           </p:cNvSpPr>
           <p:nvPr>
             <p:ph type="sldImg" idx="2"/>
@@ -827,7 +621,7 @@
             <a:spLocks noGrp="1"/>
           </p:cNvSpPr>
           <p:nvPr>
-            <p:ph type="body" idx="3" sz="quarter"/>
+            <p:ph type="body" sz="quarter" idx="3"/>
           </p:nvPr>
         </p:nvSpPr>
         <p:spPr/>
@@ -848,7 +642,7 @@
             <a:spLocks noGrp="1"/>
           </p:cNvSpPr>
           <p:nvPr>
-            <p:ph type="sldNum" idx="5" sz="quarter"/>
+            <p:ph type="sldNum" sz="quarter" idx="5"/>
           </p:nvPr>
         </p:nvSpPr>
         <p:spPr/>
@@ -862,7 +656,7 @@
 </file>
 
 <file path=ppt/notesSlides/notesSlide14.xml><?xml version="1.0" encoding="utf-8"?>
-<p:notes xmlns:a="http://schemas.openxmlformats.org/drawingml/2006/main" xmlns:p="http://schemas.openxmlformats.org/presentationml/2006/main" xmlns:r="http://schemas.openxmlformats.org/officeDocument/2006/relationships">
+<p:notes xmlns:a="http://schemas.openxmlformats.org/drawingml/2006/main" xmlns:r="http://schemas.openxmlformats.org/officeDocument/2006/relationships" xmlns:p="http://schemas.openxmlformats.org/presentationml/2006/main">
   <p:cSld>
     <p:spTree>
       <p:nvGrpSpPr>
@@ -882,7 +676,7 @@
         <p:nvSpPr>
           <p:cNvPr id="2" name="Slide Image Placeholder 1"/>
           <p:cNvSpPr>
-            <a:spLocks noGrp="1"/>
+            <a:spLocks noGrp="1" noRot="1" noChangeAspect="1"/>
           </p:cNvSpPr>
           <p:nvPr>
             <p:ph type="sldImg" idx="2"/>
@@ -897,7 +691,7 @@
             <a:spLocks noGrp="1"/>
           </p:cNvSpPr>
           <p:nvPr>
-            <p:ph type="body" idx="3" sz="quarter"/>
+            <p:ph type="body" sz="quarter" idx="3"/>
           </p:nvPr>
         </p:nvSpPr>
         <p:spPr/>
@@ -918,7 +712,7 @@
             <a:spLocks noGrp="1"/>
           </p:cNvSpPr>
           <p:nvPr>
-            <p:ph type="sldNum" idx="5" sz="quarter"/>
+            <p:ph type="sldNum" sz="quarter" idx="5"/>
           </p:nvPr>
         </p:nvSpPr>
         <p:spPr/>
@@ -932,7 +726,7 @@
 </file>
 
 <file path=ppt/notesSlides/notesSlide15.xml><?xml version="1.0" encoding="utf-8"?>
-<p:notes xmlns:a="http://schemas.openxmlformats.org/drawingml/2006/main" xmlns:p="http://schemas.openxmlformats.org/presentationml/2006/main" xmlns:r="http://schemas.openxmlformats.org/officeDocument/2006/relationships">
+<p:notes xmlns:a="http://schemas.openxmlformats.org/drawingml/2006/main" xmlns:r="http://schemas.openxmlformats.org/officeDocument/2006/relationships" xmlns:p="http://schemas.openxmlformats.org/presentationml/2006/main">
   <p:cSld>
     <p:spTree>
       <p:nvGrpSpPr>
@@ -952,7 +746,7 @@
         <p:nvSpPr>
           <p:cNvPr id="2" name="Slide Image Placeholder 1"/>
           <p:cNvSpPr>
-            <a:spLocks noGrp="1"/>
+            <a:spLocks noGrp="1" noRot="1" noChangeAspect="1"/>
           </p:cNvSpPr>
           <p:nvPr>
             <p:ph type="sldImg" idx="2"/>
@@ -967,7 +761,7 @@
             <a:spLocks noGrp="1"/>
           </p:cNvSpPr>
           <p:nvPr>
-            <p:ph type="body" idx="3" sz="quarter"/>
+            <p:ph type="body" sz="quarter" idx="3"/>
           </p:nvPr>
         </p:nvSpPr>
         <p:spPr/>
@@ -988,7 +782,7 @@
             <a:spLocks noGrp="1"/>
           </p:cNvSpPr>
           <p:nvPr>
-            <p:ph type="sldNum" idx="5" sz="quarter"/>
+            <p:ph type="sldNum" sz="quarter" idx="5"/>
           </p:nvPr>
         </p:nvSpPr>
         <p:spPr/>
@@ -1002,7 +796,7 @@
 </file>
 
 <file path=ppt/notesSlides/notesSlide16.xml><?xml version="1.0" encoding="utf-8"?>
-<p:notes xmlns:a="http://schemas.openxmlformats.org/drawingml/2006/main" xmlns:p="http://schemas.openxmlformats.org/presentationml/2006/main" xmlns:r="http://schemas.openxmlformats.org/officeDocument/2006/relationships">
+<p:notes xmlns:a="http://schemas.openxmlformats.org/drawingml/2006/main" xmlns:r="http://schemas.openxmlformats.org/officeDocument/2006/relationships" xmlns:p="http://schemas.openxmlformats.org/presentationml/2006/main">
   <p:cSld>
     <p:spTree>
       <p:nvGrpSpPr>
@@ -1022,7 +816,7 @@
         <p:nvSpPr>
           <p:cNvPr id="2" name="Slide Image Placeholder 1"/>
           <p:cNvSpPr>
-            <a:spLocks noGrp="1"/>
+            <a:spLocks noGrp="1" noRot="1" noChangeAspect="1"/>
           </p:cNvSpPr>
           <p:nvPr>
             <p:ph type="sldImg" idx="2"/>
@@ -1037,7 +831,7 @@
             <a:spLocks noGrp="1"/>
           </p:cNvSpPr>
           <p:nvPr>
-            <p:ph type="body" idx="3" sz="quarter"/>
+            <p:ph type="body" sz="quarter" idx="3"/>
           </p:nvPr>
         </p:nvSpPr>
         <p:spPr/>
@@ -1058,7 +852,7 @@
             <a:spLocks noGrp="1"/>
           </p:cNvSpPr>
           <p:nvPr>
-            <p:ph type="sldNum" idx="5" sz="quarter"/>
+            <p:ph type="sldNum" sz="quarter" idx="5"/>
           </p:nvPr>
         </p:nvSpPr>
         <p:spPr/>
@@ -1072,7 +866,7 @@
 </file>
 
 <file path=ppt/notesSlides/notesSlide17.xml><?xml version="1.0" encoding="utf-8"?>
-<p:notes xmlns:a="http://schemas.openxmlformats.org/drawingml/2006/main" xmlns:p="http://schemas.openxmlformats.org/presentationml/2006/main" xmlns:r="http://schemas.openxmlformats.org/officeDocument/2006/relationships">
+<p:notes xmlns:a="http://schemas.openxmlformats.org/drawingml/2006/main" xmlns:r="http://schemas.openxmlformats.org/officeDocument/2006/relationships" xmlns:p="http://schemas.openxmlformats.org/presentationml/2006/main">
   <p:cSld>
     <p:spTree>
       <p:nvGrpSpPr>
@@ -1092,7 +886,7 @@
         <p:nvSpPr>
           <p:cNvPr id="2" name="Slide Image Placeholder 1"/>
           <p:cNvSpPr>
-            <a:spLocks noGrp="1"/>
+            <a:spLocks noGrp="1" noRot="1" noChangeAspect="1"/>
           </p:cNvSpPr>
           <p:nvPr>
             <p:ph type="sldImg" idx="2"/>
@@ -1107,7 +901,7 @@
             <a:spLocks noGrp="1"/>
           </p:cNvSpPr>
           <p:nvPr>
-            <p:ph type="body" idx="3" sz="quarter"/>
+            <p:ph type="body" sz="quarter" idx="3"/>
           </p:nvPr>
         </p:nvSpPr>
         <p:spPr/>
@@ -1128,7 +922,7 @@
             <a:spLocks noGrp="1"/>
           </p:cNvSpPr>
           <p:nvPr>
-            <p:ph type="sldNum" idx="5" sz="quarter"/>
+            <p:ph type="sldNum" sz="quarter" idx="5"/>
           </p:nvPr>
         </p:nvSpPr>
         <p:spPr/>
@@ -1142,7 +936,7 @@
 </file>
 
 <file path=ppt/notesSlides/notesSlide18.xml><?xml version="1.0" encoding="utf-8"?>
-<p:notes xmlns:a="http://schemas.openxmlformats.org/drawingml/2006/main" xmlns:p="http://schemas.openxmlformats.org/presentationml/2006/main" xmlns:r="http://schemas.openxmlformats.org/officeDocument/2006/relationships">
+<p:notes xmlns:a="http://schemas.openxmlformats.org/drawingml/2006/main" xmlns:r="http://schemas.openxmlformats.org/officeDocument/2006/relationships" xmlns:p="http://schemas.openxmlformats.org/presentationml/2006/main">
   <p:cSld>
     <p:spTree>
       <p:nvGrpSpPr>
@@ -1162,7 +956,7 @@
         <p:nvSpPr>
           <p:cNvPr id="2" name="Slide Image Placeholder 1"/>
           <p:cNvSpPr>
-            <a:spLocks noGrp="1"/>
+            <a:spLocks noGrp="1" noRot="1" noChangeAspect="1"/>
           </p:cNvSpPr>
           <p:nvPr>
             <p:ph type="sldImg" idx="2"/>
@@ -1177,7 +971,7 @@
             <a:spLocks noGrp="1"/>
           </p:cNvSpPr>
           <p:nvPr>
-            <p:ph type="body" idx="3" sz="quarter"/>
+            <p:ph type="body" sz="quarter" idx="3"/>
           </p:nvPr>
         </p:nvSpPr>
         <p:spPr/>
@@ -1198,7 +992,7 @@
             <a:spLocks noGrp="1"/>
           </p:cNvSpPr>
           <p:nvPr>
-            <p:ph type="sldNum" idx="5" sz="quarter"/>
+            <p:ph type="sldNum" sz="quarter" idx="5"/>
           </p:nvPr>
         </p:nvSpPr>
         <p:spPr/>
@@ -1212,7 +1006,7 @@
 </file>
 
 <file path=ppt/notesSlides/notesSlide19.xml><?xml version="1.0" encoding="utf-8"?>
-<p:notes xmlns:a="http://schemas.openxmlformats.org/drawingml/2006/main" xmlns:p="http://schemas.openxmlformats.org/presentationml/2006/main" xmlns:r="http://schemas.openxmlformats.org/officeDocument/2006/relationships">
+<p:notes xmlns:a="http://schemas.openxmlformats.org/drawingml/2006/main" xmlns:r="http://schemas.openxmlformats.org/officeDocument/2006/relationships" xmlns:p="http://schemas.openxmlformats.org/presentationml/2006/main">
   <p:cSld>
     <p:spTree>
       <p:nvGrpSpPr>
@@ -1232,7 +1026,7 @@
         <p:nvSpPr>
           <p:cNvPr id="2" name="Slide Image Placeholder 1"/>
           <p:cNvSpPr>
-            <a:spLocks noGrp="1"/>
+            <a:spLocks noGrp="1" noRot="1" noChangeAspect="1"/>
           </p:cNvSpPr>
           <p:nvPr>
             <p:ph type="sldImg" idx="2"/>
@@ -1247,7 +1041,7 @@
             <a:spLocks noGrp="1"/>
           </p:cNvSpPr>
           <p:nvPr>
-            <p:ph type="body" idx="3" sz="quarter"/>
+            <p:ph type="body" sz="quarter" idx="3"/>
           </p:nvPr>
         </p:nvSpPr>
         <p:spPr/>
@@ -1268,7 +1062,7 @@
             <a:spLocks noGrp="1"/>
           </p:cNvSpPr>
           <p:nvPr>
-            <p:ph type="sldNum" idx="5" sz="quarter"/>
+            <p:ph type="sldNum" sz="quarter" idx="5"/>
           </p:nvPr>
         </p:nvSpPr>
         <p:spPr/>
@@ -1282,7 +1076,7 @@
 </file>
 
 <file path=ppt/notesSlides/notesSlide2.xml><?xml version="1.0" encoding="utf-8"?>
-<p:notes xmlns:a="http://schemas.openxmlformats.org/drawingml/2006/main" xmlns:p="http://schemas.openxmlformats.org/presentationml/2006/main" xmlns:r="http://schemas.openxmlformats.org/officeDocument/2006/relationships">
+<p:notes xmlns:a="http://schemas.openxmlformats.org/drawingml/2006/main" xmlns:r="http://schemas.openxmlformats.org/officeDocument/2006/relationships" xmlns:p="http://schemas.openxmlformats.org/presentationml/2006/main">
   <p:cSld>
     <p:spTree>
       <p:nvGrpSpPr>
@@ -1302,7 +1096,7 @@
         <p:nvSpPr>
           <p:cNvPr id="2" name="Slide Image Placeholder 1"/>
           <p:cNvSpPr>
-            <a:spLocks noGrp="1"/>
+            <a:spLocks noGrp="1" noRot="1" noChangeAspect="1"/>
           </p:cNvSpPr>
           <p:nvPr>
             <p:ph type="sldImg" idx="2"/>
@@ -1317,7 +1111,7 @@
             <a:spLocks noGrp="1"/>
           </p:cNvSpPr>
           <p:nvPr>
-            <p:ph type="body" idx="3" sz="quarter"/>
+            <p:ph type="body" sz="quarter" idx="3"/>
           </p:nvPr>
         </p:nvSpPr>
         <p:spPr/>
@@ -1338,7 +1132,7 @@
             <a:spLocks noGrp="1"/>
           </p:cNvSpPr>
           <p:nvPr>
-            <p:ph type="sldNum" idx="5" sz="quarter"/>
+            <p:ph type="sldNum" sz="quarter" idx="5"/>
           </p:nvPr>
         </p:nvSpPr>
         <p:spPr/>
@@ -1352,7 +1146,7 @@
 </file>
 
 <file path=ppt/notesSlides/notesSlide20.xml><?xml version="1.0" encoding="utf-8"?>
-<p:notes xmlns:a="http://schemas.openxmlformats.org/drawingml/2006/main" xmlns:p="http://schemas.openxmlformats.org/presentationml/2006/main" xmlns:r="http://schemas.openxmlformats.org/officeDocument/2006/relationships">
+<p:notes xmlns:a="http://schemas.openxmlformats.org/drawingml/2006/main" xmlns:r="http://schemas.openxmlformats.org/officeDocument/2006/relationships" xmlns:p="http://schemas.openxmlformats.org/presentationml/2006/main">
   <p:cSld>
     <p:spTree>
       <p:nvGrpSpPr>
@@ -1372,7 +1166,7 @@
         <p:nvSpPr>
           <p:cNvPr id="2" name="Slide Image Placeholder 1"/>
           <p:cNvSpPr>
-            <a:spLocks noGrp="1"/>
+            <a:spLocks noGrp="1" noRot="1" noChangeAspect="1"/>
           </p:cNvSpPr>
           <p:nvPr>
             <p:ph type="sldImg" idx="2"/>
@@ -1387,7 +1181,7 @@
             <a:spLocks noGrp="1"/>
           </p:cNvSpPr>
           <p:nvPr>
-            <p:ph type="body" idx="3" sz="quarter"/>
+            <p:ph type="body" sz="quarter" idx="3"/>
           </p:nvPr>
         </p:nvSpPr>
         <p:spPr/>
@@ -1408,7 +1202,7 @@
             <a:spLocks noGrp="1"/>
           </p:cNvSpPr>
           <p:nvPr>
-            <p:ph type="sldNum" idx="5" sz="quarter"/>
+            <p:ph type="sldNum" sz="quarter" idx="5"/>
           </p:nvPr>
         </p:nvSpPr>
         <p:spPr/>
@@ -1422,7 +1216,7 @@
 </file>
 
 <file path=ppt/notesSlides/notesSlide21.xml><?xml version="1.0" encoding="utf-8"?>
-<p:notes xmlns:a="http://schemas.openxmlformats.org/drawingml/2006/main" xmlns:p="http://schemas.openxmlformats.org/presentationml/2006/main" xmlns:r="http://schemas.openxmlformats.org/officeDocument/2006/relationships">
+<p:notes xmlns:a="http://schemas.openxmlformats.org/drawingml/2006/main" xmlns:r="http://schemas.openxmlformats.org/officeDocument/2006/relationships" xmlns:p="http://schemas.openxmlformats.org/presentationml/2006/main">
   <p:cSld>
     <p:spTree>
       <p:nvGrpSpPr>
@@ -1442,7 +1236,7 @@
         <p:nvSpPr>
           <p:cNvPr id="2" name="Slide Image Placeholder 1"/>
           <p:cNvSpPr>
-            <a:spLocks noGrp="1"/>
+            <a:spLocks noGrp="1" noRot="1" noChangeAspect="1"/>
           </p:cNvSpPr>
           <p:nvPr>
             <p:ph type="sldImg" idx="2"/>
@@ -1457,7 +1251,7 @@
             <a:spLocks noGrp="1"/>
           </p:cNvSpPr>
           <p:nvPr>
-            <p:ph type="body" idx="3" sz="quarter"/>
+            <p:ph type="body" sz="quarter" idx="3"/>
           </p:nvPr>
         </p:nvSpPr>
         <p:spPr/>
@@ -1478,7 +1272,7 @@
             <a:spLocks noGrp="1"/>
           </p:cNvSpPr>
           <p:nvPr>
-            <p:ph type="sldNum" idx="5" sz="quarter"/>
+            <p:ph type="sldNum" sz="quarter" idx="5"/>
           </p:nvPr>
         </p:nvSpPr>
         <p:spPr/>
@@ -1492,7 +1286,7 @@
 </file>
 
 <file path=ppt/notesSlides/notesSlide22.xml><?xml version="1.0" encoding="utf-8"?>
-<p:notes xmlns:a="http://schemas.openxmlformats.org/drawingml/2006/main" xmlns:p="http://schemas.openxmlformats.org/presentationml/2006/main" xmlns:r="http://schemas.openxmlformats.org/officeDocument/2006/relationships">
+<p:notes xmlns:a="http://schemas.openxmlformats.org/drawingml/2006/main" xmlns:r="http://schemas.openxmlformats.org/officeDocument/2006/relationships" xmlns:p="http://schemas.openxmlformats.org/presentationml/2006/main">
   <p:cSld>
     <p:spTree>
       <p:nvGrpSpPr>
@@ -1512,7 +1306,7 @@
         <p:nvSpPr>
           <p:cNvPr id="2" name="Slide Image Placeholder 1"/>
           <p:cNvSpPr>
-            <a:spLocks noGrp="1"/>
+            <a:spLocks noGrp="1" noRot="1" noChangeAspect="1"/>
           </p:cNvSpPr>
           <p:nvPr>
             <p:ph type="sldImg" idx="2"/>
@@ -1527,7 +1321,7 @@
             <a:spLocks noGrp="1"/>
           </p:cNvSpPr>
           <p:nvPr>
-            <p:ph type="body" idx="3" sz="quarter"/>
+            <p:ph type="body" sz="quarter" idx="3"/>
           </p:nvPr>
         </p:nvSpPr>
         <p:spPr/>
@@ -1548,7 +1342,7 @@
             <a:spLocks noGrp="1"/>
           </p:cNvSpPr>
           <p:nvPr>
-            <p:ph type="sldNum" idx="5" sz="quarter"/>
+            <p:ph type="sldNum" sz="quarter" idx="5"/>
           </p:nvPr>
         </p:nvSpPr>
         <p:spPr/>
@@ -1562,7 +1356,7 @@
 </file>
 
 <file path=ppt/notesSlides/notesSlide23.xml><?xml version="1.0" encoding="utf-8"?>
-<p:notes xmlns:a="http://schemas.openxmlformats.org/drawingml/2006/main" xmlns:p="http://schemas.openxmlformats.org/presentationml/2006/main" xmlns:r="http://schemas.openxmlformats.org/officeDocument/2006/relationships">
+<p:notes xmlns:a="http://schemas.openxmlformats.org/drawingml/2006/main" xmlns:r="http://schemas.openxmlformats.org/officeDocument/2006/relationships" xmlns:p="http://schemas.openxmlformats.org/presentationml/2006/main">
   <p:cSld>
     <p:spTree>
       <p:nvGrpSpPr>
@@ -1582,7 +1376,7 @@
         <p:nvSpPr>
           <p:cNvPr id="2" name="Slide Image Placeholder 1"/>
           <p:cNvSpPr>
-            <a:spLocks noGrp="1"/>
+            <a:spLocks noGrp="1" noRot="1" noChangeAspect="1"/>
           </p:cNvSpPr>
           <p:nvPr>
             <p:ph type="sldImg" idx="2"/>
@@ -1597,7 +1391,7 @@
             <a:spLocks noGrp="1"/>
           </p:cNvSpPr>
           <p:nvPr>
-            <p:ph type="body" idx="3" sz="quarter"/>
+            <p:ph type="body" sz="quarter" idx="3"/>
           </p:nvPr>
         </p:nvSpPr>
         <p:spPr/>
@@ -1618,7 +1412,7 @@
             <a:spLocks noGrp="1"/>
           </p:cNvSpPr>
           <p:nvPr>
-            <p:ph type="sldNum" idx="5" sz="quarter"/>
+            <p:ph type="sldNum" sz="quarter" idx="5"/>
           </p:nvPr>
         </p:nvSpPr>
         <p:spPr/>
@@ -1632,7 +1426,7 @@
 </file>
 
 <file path=ppt/notesSlides/notesSlide24.xml><?xml version="1.0" encoding="utf-8"?>
-<p:notes xmlns:a="http://schemas.openxmlformats.org/drawingml/2006/main" xmlns:p="http://schemas.openxmlformats.org/presentationml/2006/main" xmlns:r="http://schemas.openxmlformats.org/officeDocument/2006/relationships">
+<p:notes xmlns:a="http://schemas.openxmlformats.org/drawingml/2006/main" xmlns:r="http://schemas.openxmlformats.org/officeDocument/2006/relationships" xmlns:p="http://schemas.openxmlformats.org/presentationml/2006/main">
   <p:cSld>
     <p:spTree>
       <p:nvGrpSpPr>
@@ -1652,7 +1446,7 @@
         <p:nvSpPr>
           <p:cNvPr id="2" name="Slide Image Placeholder 1"/>
           <p:cNvSpPr>
-            <a:spLocks noGrp="1"/>
+            <a:spLocks noGrp="1" noRot="1" noChangeAspect="1"/>
           </p:cNvSpPr>
           <p:nvPr>
             <p:ph type="sldImg" idx="2"/>
@@ -1667,7 +1461,7 @@
             <a:spLocks noGrp="1"/>
           </p:cNvSpPr>
           <p:nvPr>
-            <p:ph type="body" idx="3" sz="quarter"/>
+            <p:ph type="body" sz="quarter" idx="3"/>
           </p:nvPr>
         </p:nvSpPr>
         <p:spPr/>
@@ -1688,7 +1482,7 @@
             <a:spLocks noGrp="1"/>
           </p:cNvSpPr>
           <p:nvPr>
-            <p:ph type="sldNum" idx="5" sz="quarter"/>
+            <p:ph type="sldNum" sz="quarter" idx="5"/>
           </p:nvPr>
         </p:nvSpPr>
         <p:spPr/>
@@ -1702,7 +1496,7 @@
 </file>
 
 <file path=ppt/notesSlides/notesSlide25.xml><?xml version="1.0" encoding="utf-8"?>
-<p:notes xmlns:a="http://schemas.openxmlformats.org/drawingml/2006/main" xmlns:p="http://schemas.openxmlformats.org/presentationml/2006/main" xmlns:r="http://schemas.openxmlformats.org/officeDocument/2006/relationships">
+<p:notes xmlns:a="http://schemas.openxmlformats.org/drawingml/2006/main" xmlns:r="http://schemas.openxmlformats.org/officeDocument/2006/relationships" xmlns:p="http://schemas.openxmlformats.org/presentationml/2006/main">
   <p:cSld>
     <p:spTree>
       <p:nvGrpSpPr>
@@ -1722,7 +1516,7 @@
         <p:nvSpPr>
           <p:cNvPr id="2" name="Slide Image Placeholder 1"/>
           <p:cNvSpPr>
-            <a:spLocks noGrp="1"/>
+            <a:spLocks noGrp="1" noRot="1" noChangeAspect="1"/>
           </p:cNvSpPr>
           <p:nvPr>
             <p:ph type="sldImg" idx="2"/>
@@ -1737,7 +1531,7 @@
             <a:spLocks noGrp="1"/>
           </p:cNvSpPr>
           <p:nvPr>
-            <p:ph type="body" idx="3" sz="quarter"/>
+            <p:ph type="body" sz="quarter" idx="3"/>
           </p:nvPr>
         </p:nvSpPr>
         <p:spPr/>
@@ -1758,7 +1552,7 @@
             <a:spLocks noGrp="1"/>
           </p:cNvSpPr>
           <p:nvPr>
-            <p:ph type="sldNum" idx="5" sz="quarter"/>
+            <p:ph type="sldNum" sz="quarter" idx="5"/>
           </p:nvPr>
         </p:nvSpPr>
         <p:spPr/>
@@ -1772,7 +1566,7 @@
 </file>
 
 <file path=ppt/notesSlides/notesSlide26.xml><?xml version="1.0" encoding="utf-8"?>
-<p:notes xmlns:a="http://schemas.openxmlformats.org/drawingml/2006/main" xmlns:p="http://schemas.openxmlformats.org/presentationml/2006/main" xmlns:r="http://schemas.openxmlformats.org/officeDocument/2006/relationships">
+<p:notes xmlns:a="http://schemas.openxmlformats.org/drawingml/2006/main" xmlns:r="http://schemas.openxmlformats.org/officeDocument/2006/relationships" xmlns:p="http://schemas.openxmlformats.org/presentationml/2006/main">
   <p:cSld>
     <p:spTree>
       <p:nvGrpSpPr>
@@ -1792,7 +1586,7 @@
         <p:nvSpPr>
           <p:cNvPr id="2" name="Slide Image Placeholder 1"/>
           <p:cNvSpPr>
-            <a:spLocks noGrp="1"/>
+            <a:spLocks noGrp="1" noRot="1" noChangeAspect="1"/>
           </p:cNvSpPr>
           <p:nvPr>
             <p:ph type="sldImg" idx="2"/>
@@ -1807,7 +1601,7 @@
             <a:spLocks noGrp="1"/>
           </p:cNvSpPr>
           <p:nvPr>
-            <p:ph type="body" idx="3" sz="quarter"/>
+            <p:ph type="body" sz="quarter" idx="3"/>
           </p:nvPr>
         </p:nvSpPr>
         <p:spPr/>
@@ -1828,7 +1622,7 @@
             <a:spLocks noGrp="1"/>
           </p:cNvSpPr>
           <p:nvPr>
-            <p:ph type="sldNum" idx="5" sz="quarter"/>
+            <p:ph type="sldNum" sz="quarter" idx="5"/>
           </p:nvPr>
         </p:nvSpPr>
         <p:spPr/>
@@ -1842,7 +1636,7 @@
 </file>
 
 <file path=ppt/notesSlides/notesSlide27.xml><?xml version="1.0" encoding="utf-8"?>
-<p:notes xmlns:a="http://schemas.openxmlformats.org/drawingml/2006/main" xmlns:p="http://schemas.openxmlformats.org/presentationml/2006/main" xmlns:r="http://schemas.openxmlformats.org/officeDocument/2006/relationships">
+<p:notes xmlns:a="http://schemas.openxmlformats.org/drawingml/2006/main" xmlns:r="http://schemas.openxmlformats.org/officeDocument/2006/relationships" xmlns:p="http://schemas.openxmlformats.org/presentationml/2006/main">
   <p:cSld>
     <p:spTree>
       <p:nvGrpSpPr>
@@ -1862,7 +1656,7 @@
         <p:nvSpPr>
           <p:cNvPr id="2" name="Slide Image Placeholder 1"/>
           <p:cNvSpPr>
-            <a:spLocks noGrp="1"/>
+            <a:spLocks noGrp="1" noRot="1" noChangeAspect="1"/>
           </p:cNvSpPr>
           <p:nvPr>
             <p:ph type="sldImg" idx="2"/>
@@ -1877,7 +1671,7 @@
             <a:spLocks noGrp="1"/>
           </p:cNvSpPr>
           <p:nvPr>
-            <p:ph type="body" idx="3" sz="quarter"/>
+            <p:ph type="body" sz="quarter" idx="3"/>
           </p:nvPr>
         </p:nvSpPr>
         <p:spPr/>
@@ -1898,7 +1692,7 @@
             <a:spLocks noGrp="1"/>
           </p:cNvSpPr>
           <p:nvPr>
-            <p:ph type="sldNum" idx="5" sz="quarter"/>
+            <p:ph type="sldNum" sz="quarter" idx="5"/>
           </p:nvPr>
         </p:nvSpPr>
         <p:spPr/>
@@ -1912,7 +1706,7 @@
 </file>
 
 <file path=ppt/notesSlides/notesSlide28.xml><?xml version="1.0" encoding="utf-8"?>
-<p:notes xmlns:a="http://schemas.openxmlformats.org/drawingml/2006/main" xmlns:p="http://schemas.openxmlformats.org/presentationml/2006/main" xmlns:r="http://schemas.openxmlformats.org/officeDocument/2006/relationships">
+<p:notes xmlns:a="http://schemas.openxmlformats.org/drawingml/2006/main" xmlns:r="http://schemas.openxmlformats.org/officeDocument/2006/relationships" xmlns:p="http://schemas.openxmlformats.org/presentationml/2006/main">
   <p:cSld>
     <p:spTree>
       <p:nvGrpSpPr>
@@ -1932,7 +1726,7 @@
         <p:nvSpPr>
           <p:cNvPr id="2" name="Slide Image Placeholder 1"/>
           <p:cNvSpPr>
-            <a:spLocks noGrp="1"/>
+            <a:spLocks noGrp="1" noRot="1" noChangeAspect="1"/>
           </p:cNvSpPr>
           <p:nvPr>
             <p:ph type="sldImg" idx="2"/>
@@ -1947,7 +1741,7 @@
             <a:spLocks noGrp="1"/>
           </p:cNvSpPr>
           <p:nvPr>
-            <p:ph type="body" idx="3" sz="quarter"/>
+            <p:ph type="body" sz="quarter" idx="3"/>
           </p:nvPr>
         </p:nvSpPr>
         <p:spPr/>
@@ -1968,7 +1762,7 @@
             <a:spLocks noGrp="1"/>
           </p:cNvSpPr>
           <p:nvPr>
-            <p:ph type="sldNum" idx="5" sz="quarter"/>
+            <p:ph type="sldNum" sz="quarter" idx="5"/>
           </p:nvPr>
         </p:nvSpPr>
         <p:spPr/>
@@ -1982,7 +1776,7 @@
 </file>
 
 <file path=ppt/notesSlides/notesSlide29.xml><?xml version="1.0" encoding="utf-8"?>
-<p:notes xmlns:a="http://schemas.openxmlformats.org/drawingml/2006/main" xmlns:p="http://schemas.openxmlformats.org/presentationml/2006/main" xmlns:r="http://schemas.openxmlformats.org/officeDocument/2006/relationships">
+<p:notes xmlns:a="http://schemas.openxmlformats.org/drawingml/2006/main" xmlns:r="http://schemas.openxmlformats.org/officeDocument/2006/relationships" xmlns:p="http://schemas.openxmlformats.org/presentationml/2006/main">
   <p:cSld>
     <p:spTree>
       <p:nvGrpSpPr>
@@ -2002,7 +1796,7 @@
         <p:nvSpPr>
           <p:cNvPr id="2" name="Slide Image Placeholder 1"/>
           <p:cNvSpPr>
-            <a:spLocks noGrp="1"/>
+            <a:spLocks noGrp="1" noRot="1" noChangeAspect="1"/>
           </p:cNvSpPr>
           <p:nvPr>
             <p:ph type="sldImg" idx="2"/>
@@ -2017,7 +1811,7 @@
             <a:spLocks noGrp="1"/>
           </p:cNvSpPr>
           <p:nvPr>
-            <p:ph type="body" idx="3" sz="quarter"/>
+            <p:ph type="body" sz="quarter" idx="3"/>
           </p:nvPr>
         </p:nvSpPr>
         <p:spPr/>
@@ -2038,7 +1832,7 @@
             <a:spLocks noGrp="1"/>
           </p:cNvSpPr>
           <p:nvPr>
-            <p:ph type="sldNum" idx="5" sz="quarter"/>
+            <p:ph type="sldNum" sz="quarter" idx="5"/>
           </p:nvPr>
         </p:nvSpPr>
         <p:spPr/>
@@ -2052,7 +1846,7 @@
 </file>
 
 <file path=ppt/notesSlides/notesSlide3.xml><?xml version="1.0" encoding="utf-8"?>
-<p:notes xmlns:a="http://schemas.openxmlformats.org/drawingml/2006/main" xmlns:p="http://schemas.openxmlformats.org/presentationml/2006/main" xmlns:r="http://schemas.openxmlformats.org/officeDocument/2006/relationships">
+<p:notes xmlns:a="http://schemas.openxmlformats.org/drawingml/2006/main" xmlns:r="http://schemas.openxmlformats.org/officeDocument/2006/relationships" xmlns:p="http://schemas.openxmlformats.org/presentationml/2006/main">
   <p:cSld>
     <p:spTree>
       <p:nvGrpSpPr>
@@ -2072,7 +1866,7 @@
         <p:nvSpPr>
           <p:cNvPr id="2" name="Slide Image Placeholder 1"/>
           <p:cNvSpPr>
-            <a:spLocks noGrp="1"/>
+            <a:spLocks noGrp="1" noRot="1" noChangeAspect="1"/>
           </p:cNvSpPr>
           <p:nvPr>
             <p:ph type="sldImg" idx="2"/>
@@ -2087,7 +1881,7 @@
             <a:spLocks noGrp="1"/>
           </p:cNvSpPr>
           <p:nvPr>
-            <p:ph type="body" idx="3" sz="quarter"/>
+            <p:ph type="body" sz="quarter" idx="3"/>
           </p:nvPr>
         </p:nvSpPr>
         <p:spPr/>
@@ -2108,7 +1902,7 @@
             <a:spLocks noGrp="1"/>
           </p:cNvSpPr>
           <p:nvPr>
-            <p:ph type="sldNum" idx="5" sz="quarter"/>
+            <p:ph type="sldNum" sz="quarter" idx="5"/>
           </p:nvPr>
         </p:nvSpPr>
         <p:spPr/>
@@ -2122,7 +1916,7 @@
 </file>
 
 <file path=ppt/notesSlides/notesSlide30.xml><?xml version="1.0" encoding="utf-8"?>
-<p:notes xmlns:a="http://schemas.openxmlformats.org/drawingml/2006/main" xmlns:p="http://schemas.openxmlformats.org/presentationml/2006/main" xmlns:r="http://schemas.openxmlformats.org/officeDocument/2006/relationships">
+<p:notes xmlns:a="http://schemas.openxmlformats.org/drawingml/2006/main" xmlns:r="http://schemas.openxmlformats.org/officeDocument/2006/relationships" xmlns:p="http://schemas.openxmlformats.org/presentationml/2006/main">
   <p:cSld>
     <p:spTree>
       <p:nvGrpSpPr>
@@ -2142,7 +1936,7 @@
         <p:nvSpPr>
           <p:cNvPr id="2" name="Slide Image Placeholder 1"/>
           <p:cNvSpPr>
-            <a:spLocks noGrp="1"/>
+            <a:spLocks noGrp="1" noRot="1" noChangeAspect="1"/>
           </p:cNvSpPr>
           <p:nvPr>
             <p:ph type="sldImg" idx="2"/>
@@ -2157,7 +1951,7 @@
             <a:spLocks noGrp="1"/>
           </p:cNvSpPr>
           <p:nvPr>
-            <p:ph type="body" idx="3" sz="quarter"/>
+            <p:ph type="body" sz="quarter" idx="3"/>
           </p:nvPr>
         </p:nvSpPr>
         <p:spPr/>
@@ -2178,7 +1972,7 @@
             <a:spLocks noGrp="1"/>
           </p:cNvSpPr>
           <p:nvPr>
-            <p:ph type="sldNum" idx="5" sz="quarter"/>
+            <p:ph type="sldNum" sz="quarter" idx="5"/>
           </p:nvPr>
         </p:nvSpPr>
         <p:spPr/>
@@ -2192,7 +1986,7 @@
 </file>
 
 <file path=ppt/notesSlides/notesSlide31.xml><?xml version="1.0" encoding="utf-8"?>
-<p:notes xmlns:a="http://schemas.openxmlformats.org/drawingml/2006/main" xmlns:p="http://schemas.openxmlformats.org/presentationml/2006/main" xmlns:r="http://schemas.openxmlformats.org/officeDocument/2006/relationships">
+<p:notes xmlns:a="http://schemas.openxmlformats.org/drawingml/2006/main" xmlns:r="http://schemas.openxmlformats.org/officeDocument/2006/relationships" xmlns:p="http://schemas.openxmlformats.org/presentationml/2006/main">
   <p:cSld>
     <p:spTree>
       <p:nvGrpSpPr>
@@ -2212,7 +2006,7 @@
         <p:nvSpPr>
           <p:cNvPr id="2" name="Slide Image Placeholder 1"/>
           <p:cNvSpPr>
-            <a:spLocks noGrp="1"/>
+            <a:spLocks noGrp="1" noRot="1" noChangeAspect="1"/>
           </p:cNvSpPr>
           <p:nvPr>
             <p:ph type="sldImg" idx="2"/>
@@ -2227,7 +2021,7 @@
             <a:spLocks noGrp="1"/>
           </p:cNvSpPr>
           <p:nvPr>
-            <p:ph type="body" idx="3" sz="quarter"/>
+            <p:ph type="body" sz="quarter" idx="3"/>
           </p:nvPr>
         </p:nvSpPr>
         <p:spPr/>
@@ -2248,7 +2042,7 @@
             <a:spLocks noGrp="1"/>
           </p:cNvSpPr>
           <p:nvPr>
-            <p:ph type="sldNum" idx="5" sz="quarter"/>
+            <p:ph type="sldNum" sz="quarter" idx="5"/>
           </p:nvPr>
         </p:nvSpPr>
         <p:spPr/>
@@ -2262,7 +2056,7 @@
 </file>
 
 <file path=ppt/notesSlides/notesSlide32.xml><?xml version="1.0" encoding="utf-8"?>
-<p:notes xmlns:a="http://schemas.openxmlformats.org/drawingml/2006/main" xmlns:p="http://schemas.openxmlformats.org/presentationml/2006/main" xmlns:r="http://schemas.openxmlformats.org/officeDocument/2006/relationships">
+<p:notes xmlns:a="http://schemas.openxmlformats.org/drawingml/2006/main" xmlns:r="http://schemas.openxmlformats.org/officeDocument/2006/relationships" xmlns:p="http://schemas.openxmlformats.org/presentationml/2006/main">
   <p:cSld>
     <p:spTree>
       <p:nvGrpSpPr>
@@ -2282,7 +2076,7 @@
         <p:nvSpPr>
           <p:cNvPr id="2" name="Slide Image Placeholder 1"/>
           <p:cNvSpPr>
-            <a:spLocks noGrp="1"/>
+            <a:spLocks noGrp="1" noRot="1" noChangeAspect="1"/>
           </p:cNvSpPr>
           <p:nvPr>
             <p:ph type="sldImg" idx="2"/>
@@ -2297,7 +2091,7 @@
             <a:spLocks noGrp="1"/>
           </p:cNvSpPr>
           <p:nvPr>
-            <p:ph type="body" idx="3" sz="quarter"/>
+            <p:ph type="body" sz="quarter" idx="3"/>
           </p:nvPr>
         </p:nvSpPr>
         <p:spPr/>
@@ -2318,7 +2112,7 @@
             <a:spLocks noGrp="1"/>
           </p:cNvSpPr>
           <p:nvPr>
-            <p:ph type="sldNum" idx="5" sz="quarter"/>
+            <p:ph type="sldNum" sz="quarter" idx="5"/>
           </p:nvPr>
         </p:nvSpPr>
         <p:spPr/>
@@ -2332,7 +2126,7 @@
 </file>
 
 <file path=ppt/notesSlides/notesSlide33.xml><?xml version="1.0" encoding="utf-8"?>
-<p:notes xmlns:a="http://schemas.openxmlformats.org/drawingml/2006/main" xmlns:p="http://schemas.openxmlformats.org/presentationml/2006/main" xmlns:r="http://schemas.openxmlformats.org/officeDocument/2006/relationships">
+<p:notes xmlns:a="http://schemas.openxmlformats.org/drawingml/2006/main" xmlns:r="http://schemas.openxmlformats.org/officeDocument/2006/relationships" xmlns:p="http://schemas.openxmlformats.org/presentationml/2006/main">
   <p:cSld>
     <p:spTree>
       <p:nvGrpSpPr>
@@ -2352,7 +2146,7 @@
         <p:nvSpPr>
           <p:cNvPr id="2" name="Slide Image Placeholder 1"/>
           <p:cNvSpPr>
-            <a:spLocks noGrp="1"/>
+            <a:spLocks noGrp="1" noRot="1" noChangeAspect="1"/>
           </p:cNvSpPr>
           <p:nvPr>
             <p:ph type="sldImg" idx="2"/>
@@ -2367,7 +2161,7 @@
             <a:spLocks noGrp="1"/>
           </p:cNvSpPr>
           <p:nvPr>
-            <p:ph type="body" idx="3" sz="quarter"/>
+            <p:ph type="body" sz="quarter" idx="3"/>
           </p:nvPr>
         </p:nvSpPr>
         <p:spPr/>
@@ -2388,7 +2182,7 @@
             <a:spLocks noGrp="1"/>
           </p:cNvSpPr>
           <p:nvPr>
-            <p:ph type="sldNum" idx="5" sz="quarter"/>
+            <p:ph type="sldNum" sz="quarter" idx="5"/>
           </p:nvPr>
         </p:nvSpPr>
         <p:spPr/>
@@ -2402,7 +2196,7 @@
 </file>
 
 <file path=ppt/notesSlides/notesSlide34.xml><?xml version="1.0" encoding="utf-8"?>
-<p:notes xmlns:a="http://schemas.openxmlformats.org/drawingml/2006/main" xmlns:p="http://schemas.openxmlformats.org/presentationml/2006/main" xmlns:r="http://schemas.openxmlformats.org/officeDocument/2006/relationships">
+<p:notes xmlns:a="http://schemas.openxmlformats.org/drawingml/2006/main" xmlns:r="http://schemas.openxmlformats.org/officeDocument/2006/relationships" xmlns:p="http://schemas.openxmlformats.org/presentationml/2006/main">
   <p:cSld>
     <p:spTree>
       <p:nvGrpSpPr>
@@ -2422,7 +2216,7 @@
         <p:nvSpPr>
           <p:cNvPr id="2" name="Slide Image Placeholder 1"/>
           <p:cNvSpPr>
-            <a:spLocks noGrp="1"/>
+            <a:spLocks noGrp="1" noRot="1" noChangeAspect="1"/>
           </p:cNvSpPr>
           <p:nvPr>
             <p:ph type="sldImg" idx="2"/>
@@ -2437,7 +2231,7 @@
             <a:spLocks noGrp="1"/>
           </p:cNvSpPr>
           <p:nvPr>
-            <p:ph type="body" idx="3" sz="quarter"/>
+            <p:ph type="body" sz="quarter" idx="3"/>
           </p:nvPr>
         </p:nvSpPr>
         <p:spPr/>
@@ -2458,7 +2252,7 @@
             <a:spLocks noGrp="1"/>
           </p:cNvSpPr>
           <p:nvPr>
-            <p:ph type="sldNum" idx="5" sz="quarter"/>
+            <p:ph type="sldNum" sz="quarter" idx="5"/>
           </p:nvPr>
         </p:nvSpPr>
         <p:spPr/>
@@ -2472,7 +2266,7 @@
 </file>
 
 <file path=ppt/notesSlides/notesSlide35.xml><?xml version="1.0" encoding="utf-8"?>
-<p:notes xmlns:a="http://schemas.openxmlformats.org/drawingml/2006/main" xmlns:p="http://schemas.openxmlformats.org/presentationml/2006/main" xmlns:r="http://schemas.openxmlformats.org/officeDocument/2006/relationships">
+<p:notes xmlns:a="http://schemas.openxmlformats.org/drawingml/2006/main" xmlns:r="http://schemas.openxmlformats.org/officeDocument/2006/relationships" xmlns:p="http://schemas.openxmlformats.org/presentationml/2006/main">
   <p:cSld>
     <p:spTree>
       <p:nvGrpSpPr>
@@ -2492,7 +2286,7 @@
         <p:nvSpPr>
           <p:cNvPr id="2" name="Slide Image Placeholder 1"/>
           <p:cNvSpPr>
-            <a:spLocks noGrp="1"/>
+            <a:spLocks noGrp="1" noRot="1" noChangeAspect="1"/>
           </p:cNvSpPr>
           <p:nvPr>
             <p:ph type="sldImg" idx="2"/>
@@ -2507,7 +2301,7 @@
             <a:spLocks noGrp="1"/>
           </p:cNvSpPr>
           <p:nvPr>
-            <p:ph type="body" idx="3" sz="quarter"/>
+            <p:ph type="body" sz="quarter" idx="3"/>
           </p:nvPr>
         </p:nvSpPr>
         <p:spPr/>
@@ -2528,7 +2322,7 @@
             <a:spLocks noGrp="1"/>
           </p:cNvSpPr>
           <p:nvPr>
-            <p:ph type="sldNum" idx="5" sz="quarter"/>
+            <p:ph type="sldNum" sz="quarter" idx="5"/>
           </p:nvPr>
         </p:nvSpPr>
         <p:spPr/>
@@ -2542,7 +2336,7 @@
 </file>
 
 <file path=ppt/notesSlides/notesSlide36.xml><?xml version="1.0" encoding="utf-8"?>
-<p:notes xmlns:a="http://schemas.openxmlformats.org/drawingml/2006/main" xmlns:p="http://schemas.openxmlformats.org/presentationml/2006/main" xmlns:r="http://schemas.openxmlformats.org/officeDocument/2006/relationships">
+<p:notes xmlns:a="http://schemas.openxmlformats.org/drawingml/2006/main" xmlns:r="http://schemas.openxmlformats.org/officeDocument/2006/relationships" xmlns:p="http://schemas.openxmlformats.org/presentationml/2006/main">
   <p:cSld>
     <p:spTree>
       <p:nvGrpSpPr>
@@ -2562,7 +2356,7 @@
         <p:nvSpPr>
           <p:cNvPr id="2" name="Slide Image Placeholder 1"/>
           <p:cNvSpPr>
-            <a:spLocks noGrp="1"/>
+            <a:spLocks noGrp="1" noRot="1" noChangeAspect="1"/>
           </p:cNvSpPr>
           <p:nvPr>
             <p:ph type="sldImg" idx="2"/>
@@ -2577,7 +2371,7 @@
             <a:spLocks noGrp="1"/>
           </p:cNvSpPr>
           <p:nvPr>
-            <p:ph type="body" idx="3" sz="quarter"/>
+            <p:ph type="body" sz="quarter" idx="3"/>
           </p:nvPr>
         </p:nvSpPr>
         <p:spPr/>
@@ -2598,7 +2392,7 @@
             <a:spLocks noGrp="1"/>
           </p:cNvSpPr>
           <p:nvPr>
-            <p:ph type="sldNum" idx="5" sz="quarter"/>
+            <p:ph type="sldNum" sz="quarter" idx="5"/>
           </p:nvPr>
         </p:nvSpPr>
         <p:spPr/>
@@ -2612,7 +2406,7 @@
 </file>
 
 <file path=ppt/notesSlides/notesSlide37.xml><?xml version="1.0" encoding="utf-8"?>
-<p:notes xmlns:a="http://schemas.openxmlformats.org/drawingml/2006/main" xmlns:p="http://schemas.openxmlformats.org/presentationml/2006/main" xmlns:r="http://schemas.openxmlformats.org/officeDocument/2006/relationships">
+<p:notes xmlns:a="http://schemas.openxmlformats.org/drawingml/2006/main" xmlns:r="http://schemas.openxmlformats.org/officeDocument/2006/relationships" xmlns:p="http://schemas.openxmlformats.org/presentationml/2006/main">
   <p:cSld>
     <p:spTree>
       <p:nvGrpSpPr>
@@ -2632,7 +2426,7 @@
         <p:nvSpPr>
           <p:cNvPr id="2" name="Slide Image Placeholder 1"/>
           <p:cNvSpPr>
-            <a:spLocks noGrp="1"/>
+            <a:spLocks noGrp="1" noRot="1" noChangeAspect="1"/>
           </p:cNvSpPr>
           <p:nvPr>
             <p:ph type="sldImg" idx="2"/>
@@ -2647,7 +2441,7 @@
             <a:spLocks noGrp="1"/>
           </p:cNvSpPr>
           <p:nvPr>
-            <p:ph type="body" idx="3" sz="quarter"/>
+            <p:ph type="body" sz="quarter" idx="3"/>
           </p:nvPr>
         </p:nvSpPr>
         <p:spPr/>
@@ -2668,7 +2462,7 @@
             <a:spLocks noGrp="1"/>
           </p:cNvSpPr>
           <p:nvPr>
-            <p:ph type="sldNum" idx="5" sz="quarter"/>
+            <p:ph type="sldNum" sz="quarter" idx="5"/>
           </p:nvPr>
         </p:nvSpPr>
         <p:spPr/>
@@ -2682,7 +2476,7 @@
 </file>
 
 <file path=ppt/notesSlides/notesSlide38.xml><?xml version="1.0" encoding="utf-8"?>
-<p:notes xmlns:a="http://schemas.openxmlformats.org/drawingml/2006/main" xmlns:p="http://schemas.openxmlformats.org/presentationml/2006/main" xmlns:r="http://schemas.openxmlformats.org/officeDocument/2006/relationships">
+<p:notes xmlns:a="http://schemas.openxmlformats.org/drawingml/2006/main" xmlns:r="http://schemas.openxmlformats.org/officeDocument/2006/relationships" xmlns:p="http://schemas.openxmlformats.org/presentationml/2006/main">
   <p:cSld>
     <p:spTree>
       <p:nvGrpSpPr>
@@ -2702,7 +2496,7 @@
         <p:nvSpPr>
           <p:cNvPr id="2" name="Slide Image Placeholder 1"/>
           <p:cNvSpPr>
-            <a:spLocks noGrp="1"/>
+            <a:spLocks noGrp="1" noRot="1" noChangeAspect="1"/>
           </p:cNvSpPr>
           <p:nvPr>
             <p:ph type="sldImg" idx="2"/>
@@ -2717,7 +2511,7 @@
             <a:spLocks noGrp="1"/>
           </p:cNvSpPr>
           <p:nvPr>
-            <p:ph type="body" idx="3" sz="quarter"/>
+            <p:ph type="body" sz="quarter" idx="3"/>
           </p:nvPr>
         </p:nvSpPr>
         <p:spPr/>
@@ -2738,7 +2532,7 @@
             <a:spLocks noGrp="1"/>
           </p:cNvSpPr>
           <p:nvPr>
-            <p:ph type="sldNum" idx="5" sz="quarter"/>
+            <p:ph type="sldNum" sz="quarter" idx="5"/>
           </p:nvPr>
         </p:nvSpPr>
         <p:spPr/>
@@ -2752,7 +2546,7 @@
 </file>
 
 <file path=ppt/notesSlides/notesSlide39.xml><?xml version="1.0" encoding="utf-8"?>
-<p:notes xmlns:a="http://schemas.openxmlformats.org/drawingml/2006/main" xmlns:p="http://schemas.openxmlformats.org/presentationml/2006/main" xmlns:r="http://schemas.openxmlformats.org/officeDocument/2006/relationships">
+<p:notes xmlns:a="http://schemas.openxmlformats.org/drawingml/2006/main" xmlns:r="http://schemas.openxmlformats.org/officeDocument/2006/relationships" xmlns:p="http://schemas.openxmlformats.org/presentationml/2006/main">
   <p:cSld>
     <p:spTree>
       <p:nvGrpSpPr>
@@ -2772,7 +2566,7 @@
         <p:nvSpPr>
           <p:cNvPr id="2" name="Slide Image Placeholder 1"/>
           <p:cNvSpPr>
-            <a:spLocks noGrp="1"/>
+            <a:spLocks noGrp="1" noRot="1" noChangeAspect="1"/>
           </p:cNvSpPr>
           <p:nvPr>
             <p:ph type="sldImg" idx="2"/>
@@ -2787,7 +2581,7 @@
             <a:spLocks noGrp="1"/>
           </p:cNvSpPr>
           <p:nvPr>
-            <p:ph type="body" idx="3" sz="quarter"/>
+            <p:ph type="body" sz="quarter" idx="3"/>
           </p:nvPr>
         </p:nvSpPr>
         <p:spPr/>
@@ -2808,7 +2602,7 @@
             <a:spLocks noGrp="1"/>
           </p:cNvSpPr>
           <p:nvPr>
-            <p:ph type="sldNum" idx="5" sz="quarter"/>
+            <p:ph type="sldNum" sz="quarter" idx="5"/>
           </p:nvPr>
         </p:nvSpPr>
         <p:spPr/>
@@ -2822,7 +2616,7 @@
 </file>
 
 <file path=ppt/notesSlides/notesSlide4.xml><?xml version="1.0" encoding="utf-8"?>
-<p:notes xmlns:a="http://schemas.openxmlformats.org/drawingml/2006/main" xmlns:p="http://schemas.openxmlformats.org/presentationml/2006/main" xmlns:r="http://schemas.openxmlformats.org/officeDocument/2006/relationships">
+<p:notes xmlns:a="http://schemas.openxmlformats.org/drawingml/2006/main" xmlns:r="http://schemas.openxmlformats.org/officeDocument/2006/relationships" xmlns:p="http://schemas.openxmlformats.org/presentationml/2006/main">
   <p:cSld>
     <p:spTree>
       <p:nvGrpSpPr>
@@ -2842,7 +2636,7 @@
         <p:nvSpPr>
           <p:cNvPr id="2" name="Slide Image Placeholder 1"/>
           <p:cNvSpPr>
-            <a:spLocks noGrp="1"/>
+            <a:spLocks noGrp="1" noRot="1" noChangeAspect="1"/>
           </p:cNvSpPr>
           <p:nvPr>
             <p:ph type="sldImg" idx="2"/>
@@ -2857,7 +2651,7 @@
             <a:spLocks noGrp="1"/>
           </p:cNvSpPr>
           <p:nvPr>
-            <p:ph type="body" idx="3" sz="quarter"/>
+            <p:ph type="body" sz="quarter" idx="3"/>
           </p:nvPr>
         </p:nvSpPr>
         <p:spPr/>
@@ -2878,7 +2672,7 @@
             <a:spLocks noGrp="1"/>
           </p:cNvSpPr>
           <p:nvPr>
-            <p:ph type="sldNum" idx="5" sz="quarter"/>
+            <p:ph type="sldNum" sz="quarter" idx="5"/>
           </p:nvPr>
         </p:nvSpPr>
         <p:spPr/>
@@ -2892,7 +2686,7 @@
 </file>
 
 <file path=ppt/notesSlides/notesSlide40.xml><?xml version="1.0" encoding="utf-8"?>
-<p:notes xmlns:a="http://schemas.openxmlformats.org/drawingml/2006/main" xmlns:p="http://schemas.openxmlformats.org/presentationml/2006/main" xmlns:r="http://schemas.openxmlformats.org/officeDocument/2006/relationships">
+<p:notes xmlns:a="http://schemas.openxmlformats.org/drawingml/2006/main" xmlns:r="http://schemas.openxmlformats.org/officeDocument/2006/relationships" xmlns:p="http://schemas.openxmlformats.org/presentationml/2006/main">
   <p:cSld>
     <p:spTree>
       <p:nvGrpSpPr>
@@ -2912,7 +2706,7 @@
         <p:nvSpPr>
           <p:cNvPr id="2" name="Slide Image Placeholder 1"/>
           <p:cNvSpPr>
-            <a:spLocks noGrp="1"/>
+            <a:spLocks noGrp="1" noRot="1" noChangeAspect="1"/>
           </p:cNvSpPr>
           <p:nvPr>
             <p:ph type="sldImg" idx="2"/>
@@ -2927,7 +2721,7 @@
             <a:spLocks noGrp="1"/>
           </p:cNvSpPr>
           <p:nvPr>
-            <p:ph type="body" idx="3" sz="quarter"/>
+            <p:ph type="body" sz="quarter" idx="3"/>
           </p:nvPr>
         </p:nvSpPr>
         <p:spPr/>
@@ -2948,7 +2742,7 @@
             <a:spLocks noGrp="1"/>
           </p:cNvSpPr>
           <p:nvPr>
-            <p:ph type="sldNum" idx="5" sz="quarter"/>
+            <p:ph type="sldNum" sz="quarter" idx="5"/>
           </p:nvPr>
         </p:nvSpPr>
         <p:spPr/>
@@ -2962,7 +2756,7 @@
 </file>
 
 <file path=ppt/notesSlides/notesSlide41.xml><?xml version="1.0" encoding="utf-8"?>
-<p:notes xmlns:a="http://schemas.openxmlformats.org/drawingml/2006/main" xmlns:p="http://schemas.openxmlformats.org/presentationml/2006/main" xmlns:r="http://schemas.openxmlformats.org/officeDocument/2006/relationships">
+<p:notes xmlns:a="http://schemas.openxmlformats.org/drawingml/2006/main" xmlns:r="http://schemas.openxmlformats.org/officeDocument/2006/relationships" xmlns:p="http://schemas.openxmlformats.org/presentationml/2006/main">
   <p:cSld>
     <p:spTree>
       <p:nvGrpSpPr>
@@ -2982,7 +2776,7 @@
         <p:nvSpPr>
           <p:cNvPr id="2" name="Slide Image Placeholder 1"/>
           <p:cNvSpPr>
-            <a:spLocks noGrp="1"/>
+            <a:spLocks noGrp="1" noRot="1" noChangeAspect="1"/>
           </p:cNvSpPr>
           <p:nvPr>
             <p:ph type="sldImg" idx="2"/>
@@ -2997,7 +2791,7 @@
             <a:spLocks noGrp="1"/>
           </p:cNvSpPr>
           <p:nvPr>
-            <p:ph type="body" idx="3" sz="quarter"/>
+            <p:ph type="body" sz="quarter" idx="3"/>
           </p:nvPr>
         </p:nvSpPr>
         <p:spPr/>
@@ -3018,7 +2812,7 @@
             <a:spLocks noGrp="1"/>
           </p:cNvSpPr>
           <p:nvPr>
-            <p:ph type="sldNum" idx="5" sz="quarter"/>
+            <p:ph type="sldNum" sz="quarter" idx="5"/>
           </p:nvPr>
         </p:nvSpPr>
         <p:spPr/>
@@ -3032,7 +2826,7 @@
 </file>
 
 <file path=ppt/notesSlides/notesSlide42.xml><?xml version="1.0" encoding="utf-8"?>
-<p:notes xmlns:a="http://schemas.openxmlformats.org/drawingml/2006/main" xmlns:p="http://schemas.openxmlformats.org/presentationml/2006/main" xmlns:r="http://schemas.openxmlformats.org/officeDocument/2006/relationships">
+<p:notes xmlns:a="http://schemas.openxmlformats.org/drawingml/2006/main" xmlns:r="http://schemas.openxmlformats.org/officeDocument/2006/relationships" xmlns:p="http://schemas.openxmlformats.org/presentationml/2006/main">
   <p:cSld>
     <p:spTree>
       <p:nvGrpSpPr>
@@ -3052,7 +2846,7 @@
         <p:nvSpPr>
           <p:cNvPr id="2" name="Slide Image Placeholder 1"/>
           <p:cNvSpPr>
-            <a:spLocks noGrp="1"/>
+            <a:spLocks noGrp="1" noRot="1" noChangeAspect="1"/>
           </p:cNvSpPr>
           <p:nvPr>
             <p:ph type="sldImg" idx="2"/>
@@ -3067,7 +2861,7 @@
             <a:spLocks noGrp="1"/>
           </p:cNvSpPr>
           <p:nvPr>
-            <p:ph type="body" idx="3" sz="quarter"/>
+            <p:ph type="body" sz="quarter" idx="3"/>
           </p:nvPr>
         </p:nvSpPr>
         <p:spPr/>
@@ -3088,7 +2882,7 @@
             <a:spLocks noGrp="1"/>
           </p:cNvSpPr>
           <p:nvPr>
-            <p:ph type="sldNum" idx="5" sz="quarter"/>
+            <p:ph type="sldNum" sz="quarter" idx="5"/>
           </p:nvPr>
         </p:nvSpPr>
         <p:spPr/>
@@ -3102,7 +2896,7 @@
 </file>
 
 <file path=ppt/notesSlides/notesSlide43.xml><?xml version="1.0" encoding="utf-8"?>
-<p:notes xmlns:a="http://schemas.openxmlformats.org/drawingml/2006/main" xmlns:p="http://schemas.openxmlformats.org/presentationml/2006/main" xmlns:r="http://schemas.openxmlformats.org/officeDocument/2006/relationships">
+<p:notes xmlns:a="http://schemas.openxmlformats.org/drawingml/2006/main" xmlns:r="http://schemas.openxmlformats.org/officeDocument/2006/relationships" xmlns:p="http://schemas.openxmlformats.org/presentationml/2006/main">
   <p:cSld>
     <p:spTree>
       <p:nvGrpSpPr>
@@ -3122,7 +2916,7 @@
         <p:nvSpPr>
           <p:cNvPr id="2" name="Slide Image Placeholder 1"/>
           <p:cNvSpPr>
-            <a:spLocks noGrp="1"/>
+            <a:spLocks noGrp="1" noRot="1" noChangeAspect="1"/>
           </p:cNvSpPr>
           <p:nvPr>
             <p:ph type="sldImg" idx="2"/>
@@ -3137,7 +2931,7 @@
             <a:spLocks noGrp="1"/>
           </p:cNvSpPr>
           <p:nvPr>
-            <p:ph type="body" idx="3" sz="quarter"/>
+            <p:ph type="body" sz="quarter" idx="3"/>
           </p:nvPr>
         </p:nvSpPr>
         <p:spPr/>
@@ -3158,7 +2952,7 @@
             <a:spLocks noGrp="1"/>
           </p:cNvSpPr>
           <p:nvPr>
-            <p:ph type="sldNum" idx="5" sz="quarter"/>
+            <p:ph type="sldNum" sz="quarter" idx="5"/>
           </p:nvPr>
         </p:nvSpPr>
         <p:spPr/>
@@ -3172,7 +2966,7 @@
 </file>
 
 <file path=ppt/notesSlides/notesSlide44.xml><?xml version="1.0" encoding="utf-8"?>
-<p:notes xmlns:a="http://schemas.openxmlformats.org/drawingml/2006/main" xmlns:p="http://schemas.openxmlformats.org/presentationml/2006/main" xmlns:r="http://schemas.openxmlformats.org/officeDocument/2006/relationships">
+<p:notes xmlns:a="http://schemas.openxmlformats.org/drawingml/2006/main" xmlns:r="http://schemas.openxmlformats.org/officeDocument/2006/relationships" xmlns:p="http://schemas.openxmlformats.org/presentationml/2006/main">
   <p:cSld>
     <p:spTree>
       <p:nvGrpSpPr>
@@ -3192,7 +2986,7 @@
         <p:nvSpPr>
           <p:cNvPr id="2" name="Slide Image Placeholder 1"/>
           <p:cNvSpPr>
-            <a:spLocks noGrp="1"/>
+            <a:spLocks noGrp="1" noRot="1" noChangeAspect="1"/>
           </p:cNvSpPr>
           <p:nvPr>
             <p:ph type="sldImg" idx="2"/>
@@ -3207,7 +3001,7 @@
             <a:spLocks noGrp="1"/>
           </p:cNvSpPr>
           <p:nvPr>
-            <p:ph type="body" idx="3" sz="quarter"/>
+            <p:ph type="body" sz="quarter" idx="3"/>
           </p:nvPr>
         </p:nvSpPr>
         <p:spPr/>
@@ -3228,7 +3022,7 @@
             <a:spLocks noGrp="1"/>
           </p:cNvSpPr>
           <p:nvPr>
-            <p:ph type="sldNum" idx="5" sz="quarter"/>
+            <p:ph type="sldNum" sz="quarter" idx="5"/>
           </p:nvPr>
         </p:nvSpPr>
         <p:spPr/>
@@ -3242,7 +3036,7 @@
 </file>
 
 <file path=ppt/notesSlides/notesSlide45.xml><?xml version="1.0" encoding="utf-8"?>
-<p:notes xmlns:a="http://schemas.openxmlformats.org/drawingml/2006/main" xmlns:p="http://schemas.openxmlformats.org/presentationml/2006/main" xmlns:r="http://schemas.openxmlformats.org/officeDocument/2006/relationships">
+<p:notes xmlns:a="http://schemas.openxmlformats.org/drawingml/2006/main" xmlns:r="http://schemas.openxmlformats.org/officeDocument/2006/relationships" xmlns:p="http://schemas.openxmlformats.org/presentationml/2006/main">
   <p:cSld>
     <p:spTree>
       <p:nvGrpSpPr>
@@ -3262,7 +3056,7 @@
         <p:nvSpPr>
           <p:cNvPr id="2" name="Slide Image Placeholder 1"/>
           <p:cNvSpPr>
-            <a:spLocks noGrp="1"/>
+            <a:spLocks noGrp="1" noRot="1" noChangeAspect="1"/>
           </p:cNvSpPr>
           <p:nvPr>
             <p:ph type="sldImg" idx="2"/>
@@ -3277,7 +3071,7 @@
             <a:spLocks noGrp="1"/>
           </p:cNvSpPr>
           <p:nvPr>
-            <p:ph type="body" idx="3" sz="quarter"/>
+            <p:ph type="body" sz="quarter" idx="3"/>
           </p:nvPr>
         </p:nvSpPr>
         <p:spPr/>
@@ -3298,7 +3092,7 @@
             <a:spLocks noGrp="1"/>
           </p:cNvSpPr>
           <p:nvPr>
-            <p:ph type="sldNum" idx="5" sz="quarter"/>
+            <p:ph type="sldNum" sz="quarter" idx="5"/>
           </p:nvPr>
         </p:nvSpPr>
         <p:spPr/>
@@ -3312,7 +3106,7 @@
 </file>
 
 <file path=ppt/notesSlides/notesSlide46.xml><?xml version="1.0" encoding="utf-8"?>
-<p:notes xmlns:a="http://schemas.openxmlformats.org/drawingml/2006/main" xmlns:p="http://schemas.openxmlformats.org/presentationml/2006/main" xmlns:r="http://schemas.openxmlformats.org/officeDocument/2006/relationships">
+<p:notes xmlns:a="http://schemas.openxmlformats.org/drawingml/2006/main" xmlns:r="http://schemas.openxmlformats.org/officeDocument/2006/relationships" xmlns:p="http://schemas.openxmlformats.org/presentationml/2006/main">
   <p:cSld>
     <p:spTree>
       <p:nvGrpSpPr>
@@ -3332,7 +3126,7 @@
         <p:nvSpPr>
           <p:cNvPr id="2" name="Slide Image Placeholder 1"/>
           <p:cNvSpPr>
-            <a:spLocks noGrp="1"/>
+            <a:spLocks noGrp="1" noRot="1" noChangeAspect="1"/>
           </p:cNvSpPr>
           <p:nvPr>
             <p:ph type="sldImg" idx="2"/>
@@ -3347,7 +3141,7 @@
             <a:spLocks noGrp="1"/>
           </p:cNvSpPr>
           <p:nvPr>
-            <p:ph type="body" idx="3" sz="quarter"/>
+            <p:ph type="body" sz="quarter" idx="3"/>
           </p:nvPr>
         </p:nvSpPr>
         <p:spPr/>
@@ -3368,7 +3162,7 @@
             <a:spLocks noGrp="1"/>
           </p:cNvSpPr>
           <p:nvPr>
-            <p:ph type="sldNum" idx="5" sz="quarter"/>
+            <p:ph type="sldNum" sz="quarter" idx="5"/>
           </p:nvPr>
         </p:nvSpPr>
         <p:spPr/>
@@ -3382,7 +3176,7 @@
 </file>
 
 <file path=ppt/notesSlides/notesSlide47.xml><?xml version="1.0" encoding="utf-8"?>
-<p:notes xmlns:a="http://schemas.openxmlformats.org/drawingml/2006/main" xmlns:p="http://schemas.openxmlformats.org/presentationml/2006/main" xmlns:r="http://schemas.openxmlformats.org/officeDocument/2006/relationships">
+<p:notes xmlns:a="http://schemas.openxmlformats.org/drawingml/2006/main" xmlns:r="http://schemas.openxmlformats.org/officeDocument/2006/relationships" xmlns:p="http://schemas.openxmlformats.org/presentationml/2006/main">
   <p:cSld>
     <p:spTree>
       <p:nvGrpSpPr>
@@ -3402,7 +3196,7 @@
         <p:nvSpPr>
           <p:cNvPr id="2" name="Slide Image Placeholder 1"/>
           <p:cNvSpPr>
-            <a:spLocks noGrp="1"/>
+            <a:spLocks noGrp="1" noRot="1" noChangeAspect="1"/>
           </p:cNvSpPr>
           <p:nvPr>
             <p:ph type="sldImg" idx="2"/>
@@ -3417,7 +3211,7 @@
             <a:spLocks noGrp="1"/>
           </p:cNvSpPr>
           <p:nvPr>
-            <p:ph type="body" idx="3" sz="quarter"/>
+            <p:ph type="body" sz="quarter" idx="3"/>
           </p:nvPr>
         </p:nvSpPr>
         <p:spPr/>
@@ -3438,7 +3232,7 @@
             <a:spLocks noGrp="1"/>
           </p:cNvSpPr>
           <p:nvPr>
-            <p:ph type="sldNum" idx="5" sz="quarter"/>
+            <p:ph type="sldNum" sz="quarter" idx="5"/>
           </p:nvPr>
         </p:nvSpPr>
         <p:spPr/>
@@ -3452,7 +3246,7 @@
 </file>
 
 <file path=ppt/notesSlides/notesSlide48.xml><?xml version="1.0" encoding="utf-8"?>
-<p:notes xmlns:a="http://schemas.openxmlformats.org/drawingml/2006/main" xmlns:p="http://schemas.openxmlformats.org/presentationml/2006/main" xmlns:r="http://schemas.openxmlformats.org/officeDocument/2006/relationships">
+<p:notes xmlns:a="http://schemas.openxmlformats.org/drawingml/2006/main" xmlns:r="http://schemas.openxmlformats.org/officeDocument/2006/relationships" xmlns:p="http://schemas.openxmlformats.org/presentationml/2006/main">
   <p:cSld>
     <p:spTree>
       <p:nvGrpSpPr>
@@ -3472,7 +3266,7 @@
         <p:nvSpPr>
           <p:cNvPr id="2" name="Slide Image Placeholder 1"/>
           <p:cNvSpPr>
-            <a:spLocks noGrp="1"/>
+            <a:spLocks noGrp="1" noRot="1" noChangeAspect="1"/>
           </p:cNvSpPr>
           <p:nvPr>
             <p:ph type="sldImg" idx="2"/>
@@ -3487,7 +3281,7 @@
             <a:spLocks noGrp="1"/>
           </p:cNvSpPr>
           <p:nvPr>
-            <p:ph type="body" idx="3" sz="quarter"/>
+            <p:ph type="body" sz="quarter" idx="3"/>
           </p:nvPr>
         </p:nvSpPr>
         <p:spPr/>
@@ -3508,7 +3302,7 @@
             <a:spLocks noGrp="1"/>
           </p:cNvSpPr>
           <p:nvPr>
-            <p:ph type="sldNum" idx="5" sz="quarter"/>
+            <p:ph type="sldNum" sz="quarter" idx="5"/>
           </p:nvPr>
         </p:nvSpPr>
         <p:spPr/>
@@ -3522,7 +3316,7 @@
 </file>
 
 <file path=ppt/notesSlides/notesSlide49.xml><?xml version="1.0" encoding="utf-8"?>
-<p:notes xmlns:a="http://schemas.openxmlformats.org/drawingml/2006/main" xmlns:p="http://schemas.openxmlformats.org/presentationml/2006/main" xmlns:r="http://schemas.openxmlformats.org/officeDocument/2006/relationships">
+<p:notes xmlns:a="http://schemas.openxmlformats.org/drawingml/2006/main" xmlns:r="http://schemas.openxmlformats.org/officeDocument/2006/relationships" xmlns:p="http://schemas.openxmlformats.org/presentationml/2006/main">
   <p:cSld>
     <p:spTree>
       <p:nvGrpSpPr>
@@ -3542,7 +3336,7 @@
         <p:nvSpPr>
           <p:cNvPr id="2" name="Slide Image Placeholder 1"/>
           <p:cNvSpPr>
-            <a:spLocks noGrp="1"/>
+            <a:spLocks noGrp="1" noRot="1" noChangeAspect="1"/>
           </p:cNvSpPr>
           <p:nvPr>
             <p:ph type="sldImg" idx="2"/>
@@ -3557,7 +3351,7 @@
             <a:spLocks noGrp="1"/>
           </p:cNvSpPr>
           <p:nvPr>
-            <p:ph type="body" idx="3" sz="quarter"/>
+            <p:ph type="body" sz="quarter" idx="3"/>
           </p:nvPr>
         </p:nvSpPr>
         <p:spPr/>
@@ -3578,7 +3372,7 @@
             <a:spLocks noGrp="1"/>
           </p:cNvSpPr>
           <p:nvPr>
-            <p:ph type="sldNum" idx="5" sz="quarter"/>
+            <p:ph type="sldNum" sz="quarter" idx="5"/>
           </p:nvPr>
         </p:nvSpPr>
         <p:spPr/>
@@ -3592,7 +3386,7 @@
 </file>
 
 <file path=ppt/notesSlides/notesSlide5.xml><?xml version="1.0" encoding="utf-8"?>
-<p:notes xmlns:a="http://schemas.openxmlformats.org/drawingml/2006/main" xmlns:p="http://schemas.openxmlformats.org/presentationml/2006/main" xmlns:r="http://schemas.openxmlformats.org/officeDocument/2006/relationships">
+<p:notes xmlns:a="http://schemas.openxmlformats.org/drawingml/2006/main" xmlns:r="http://schemas.openxmlformats.org/officeDocument/2006/relationships" xmlns:p="http://schemas.openxmlformats.org/presentationml/2006/main">
   <p:cSld>
     <p:spTree>
       <p:nvGrpSpPr>
@@ -3612,7 +3406,7 @@
         <p:nvSpPr>
           <p:cNvPr id="2" name="Slide Image Placeholder 1"/>
           <p:cNvSpPr>
-            <a:spLocks noGrp="1"/>
+            <a:spLocks noGrp="1" noRot="1" noChangeAspect="1"/>
           </p:cNvSpPr>
           <p:nvPr>
             <p:ph type="sldImg" idx="2"/>
@@ -3627,7 +3421,7 @@
             <a:spLocks noGrp="1"/>
           </p:cNvSpPr>
           <p:nvPr>
-            <p:ph type="body" idx="3" sz="quarter"/>
+            <p:ph type="body" sz="quarter" idx="3"/>
           </p:nvPr>
         </p:nvSpPr>
         <p:spPr/>
@@ -3648,7 +3442,7 @@
             <a:spLocks noGrp="1"/>
           </p:cNvSpPr>
           <p:nvPr>
-            <p:ph type="sldNum" idx="5" sz="quarter"/>
+            <p:ph type="sldNum" sz="quarter" idx="5"/>
           </p:nvPr>
         </p:nvSpPr>
         <p:spPr/>
@@ -3662,7 +3456,7 @@
 </file>
 
 <file path=ppt/notesSlides/notesSlide50.xml><?xml version="1.0" encoding="utf-8"?>
-<p:notes xmlns:a="http://schemas.openxmlformats.org/drawingml/2006/main" xmlns:p="http://schemas.openxmlformats.org/presentationml/2006/main" xmlns:r="http://schemas.openxmlformats.org/officeDocument/2006/relationships">
+<p:notes xmlns:a="http://schemas.openxmlformats.org/drawingml/2006/main" xmlns:r="http://schemas.openxmlformats.org/officeDocument/2006/relationships" xmlns:p="http://schemas.openxmlformats.org/presentationml/2006/main">
   <p:cSld>
     <p:spTree>
       <p:nvGrpSpPr>
@@ -3682,7 +3476,7 @@
         <p:nvSpPr>
           <p:cNvPr id="2" name="Slide Image Placeholder 1"/>
           <p:cNvSpPr>
-            <a:spLocks noGrp="1"/>
+            <a:spLocks noGrp="1" noRot="1" noChangeAspect="1"/>
           </p:cNvSpPr>
           <p:nvPr>
             <p:ph type="sldImg" idx="2"/>
@@ -3697,7 +3491,7 @@
             <a:spLocks noGrp="1"/>
           </p:cNvSpPr>
           <p:nvPr>
-            <p:ph type="body" idx="3" sz="quarter"/>
+            <p:ph type="body" sz="quarter" idx="3"/>
           </p:nvPr>
         </p:nvSpPr>
         <p:spPr/>
@@ -3718,7 +3512,7 @@
             <a:spLocks noGrp="1"/>
           </p:cNvSpPr>
           <p:nvPr>
-            <p:ph type="sldNum" idx="5" sz="quarter"/>
+            <p:ph type="sldNum" sz="quarter" idx="5"/>
           </p:nvPr>
         </p:nvSpPr>
         <p:spPr/>
@@ -3732,7 +3526,7 @@
 </file>
 
 <file path=ppt/notesSlides/notesSlide51.xml><?xml version="1.0" encoding="utf-8"?>
-<p:notes xmlns:a="http://schemas.openxmlformats.org/drawingml/2006/main" xmlns:p="http://schemas.openxmlformats.org/presentationml/2006/main" xmlns:r="http://schemas.openxmlformats.org/officeDocument/2006/relationships">
+<p:notes xmlns:a="http://schemas.openxmlformats.org/drawingml/2006/main" xmlns:r="http://schemas.openxmlformats.org/officeDocument/2006/relationships" xmlns:p="http://schemas.openxmlformats.org/presentationml/2006/main">
   <p:cSld>
     <p:spTree>
       <p:nvGrpSpPr>
@@ -3752,7 +3546,7 @@
         <p:nvSpPr>
           <p:cNvPr id="2" name="Slide Image Placeholder 1"/>
           <p:cNvSpPr>
-            <a:spLocks noGrp="1"/>
+            <a:spLocks noGrp="1" noRot="1" noChangeAspect="1"/>
           </p:cNvSpPr>
           <p:nvPr>
             <p:ph type="sldImg" idx="2"/>
@@ -3767,7 +3561,7 @@
             <a:spLocks noGrp="1"/>
           </p:cNvSpPr>
           <p:nvPr>
-            <p:ph type="body" idx="3" sz="quarter"/>
+            <p:ph type="body" sz="quarter" idx="3"/>
           </p:nvPr>
         </p:nvSpPr>
         <p:spPr/>
@@ -3788,7 +3582,7 @@
             <a:spLocks noGrp="1"/>
           </p:cNvSpPr>
           <p:nvPr>
-            <p:ph type="sldNum" idx="5" sz="quarter"/>
+            <p:ph type="sldNum" sz="quarter" idx="5"/>
           </p:nvPr>
         </p:nvSpPr>
         <p:spPr/>
@@ -3802,7 +3596,7 @@
 </file>
 
 <file path=ppt/notesSlides/notesSlide52.xml><?xml version="1.0" encoding="utf-8"?>
-<p:notes xmlns:a="http://schemas.openxmlformats.org/drawingml/2006/main" xmlns:p="http://schemas.openxmlformats.org/presentationml/2006/main" xmlns:r="http://schemas.openxmlformats.org/officeDocument/2006/relationships">
+<p:notes xmlns:a="http://schemas.openxmlformats.org/drawingml/2006/main" xmlns:r="http://schemas.openxmlformats.org/officeDocument/2006/relationships" xmlns:p="http://schemas.openxmlformats.org/presentationml/2006/main">
   <p:cSld>
     <p:spTree>
       <p:nvGrpSpPr>
@@ -3822,7 +3616,7 @@
         <p:nvSpPr>
           <p:cNvPr id="2" name="Slide Image Placeholder 1"/>
           <p:cNvSpPr>
-            <a:spLocks noGrp="1"/>
+            <a:spLocks noGrp="1" noRot="1" noChangeAspect="1"/>
           </p:cNvSpPr>
           <p:nvPr>
             <p:ph type="sldImg" idx="2"/>
@@ -3837,7 +3631,7 @@
             <a:spLocks noGrp="1"/>
           </p:cNvSpPr>
           <p:nvPr>
-            <p:ph type="body" idx="3" sz="quarter"/>
+            <p:ph type="body" sz="quarter" idx="3"/>
           </p:nvPr>
         </p:nvSpPr>
         <p:spPr/>
@@ -3858,7 +3652,7 @@
             <a:spLocks noGrp="1"/>
           </p:cNvSpPr>
           <p:nvPr>
-            <p:ph type="sldNum" idx="5" sz="quarter"/>
+            <p:ph type="sldNum" sz="quarter" idx="5"/>
           </p:nvPr>
         </p:nvSpPr>
         <p:spPr/>
@@ -3872,7 +3666,7 @@
 </file>
 
 <file path=ppt/notesSlides/notesSlide53.xml><?xml version="1.0" encoding="utf-8"?>
-<p:notes xmlns:a="http://schemas.openxmlformats.org/drawingml/2006/main" xmlns:p="http://schemas.openxmlformats.org/presentationml/2006/main" xmlns:r="http://schemas.openxmlformats.org/officeDocument/2006/relationships">
+<p:notes xmlns:a="http://schemas.openxmlformats.org/drawingml/2006/main" xmlns:r="http://schemas.openxmlformats.org/officeDocument/2006/relationships" xmlns:p="http://schemas.openxmlformats.org/presentationml/2006/main">
   <p:cSld>
     <p:spTree>
       <p:nvGrpSpPr>
@@ -3892,7 +3686,7 @@
         <p:nvSpPr>
           <p:cNvPr id="2" name="Slide Image Placeholder 1"/>
           <p:cNvSpPr>
-            <a:spLocks noGrp="1"/>
+            <a:spLocks noGrp="1" noRot="1" noChangeAspect="1"/>
           </p:cNvSpPr>
           <p:nvPr>
             <p:ph type="sldImg" idx="2"/>
@@ -3907,7 +3701,7 @@
             <a:spLocks noGrp="1"/>
           </p:cNvSpPr>
           <p:nvPr>
-            <p:ph type="body" idx="3" sz="quarter"/>
+            <p:ph type="body" sz="quarter" idx="3"/>
           </p:nvPr>
         </p:nvSpPr>
         <p:spPr/>
@@ -3928,7 +3722,7 @@
             <a:spLocks noGrp="1"/>
           </p:cNvSpPr>
           <p:nvPr>
-            <p:ph type="sldNum" idx="5" sz="quarter"/>
+            <p:ph type="sldNum" sz="quarter" idx="5"/>
           </p:nvPr>
         </p:nvSpPr>
         <p:spPr/>
@@ -3942,7 +3736,7 @@
 </file>
 
 <file path=ppt/notesSlides/notesSlide54.xml><?xml version="1.0" encoding="utf-8"?>
-<p:notes xmlns:a="http://schemas.openxmlformats.org/drawingml/2006/main" xmlns:p="http://schemas.openxmlformats.org/presentationml/2006/main" xmlns:r="http://schemas.openxmlformats.org/officeDocument/2006/relationships">
+<p:notes xmlns:a="http://schemas.openxmlformats.org/drawingml/2006/main" xmlns:r="http://schemas.openxmlformats.org/officeDocument/2006/relationships" xmlns:p="http://schemas.openxmlformats.org/presentationml/2006/main">
   <p:cSld>
     <p:spTree>
       <p:nvGrpSpPr>
@@ -3962,7 +3756,7 @@
         <p:nvSpPr>
           <p:cNvPr id="2" name="Slide Image Placeholder 1"/>
           <p:cNvSpPr>
-            <a:spLocks noGrp="1"/>
+            <a:spLocks noGrp="1" noRot="1" noChangeAspect="1"/>
           </p:cNvSpPr>
           <p:nvPr>
             <p:ph type="sldImg" idx="2"/>
@@ -3977,7 +3771,7 @@
             <a:spLocks noGrp="1"/>
           </p:cNvSpPr>
           <p:nvPr>
-            <p:ph type="body" idx="3" sz="quarter"/>
+            <p:ph type="body" sz="quarter" idx="3"/>
           </p:nvPr>
         </p:nvSpPr>
         <p:spPr/>
@@ -3998,7 +3792,7 @@
             <a:spLocks noGrp="1"/>
           </p:cNvSpPr>
           <p:nvPr>
-            <p:ph type="sldNum" idx="5" sz="quarter"/>
+            <p:ph type="sldNum" sz="quarter" idx="5"/>
           </p:nvPr>
         </p:nvSpPr>
         <p:spPr/>
@@ -4012,7 +3806,7 @@
 </file>
 
 <file path=ppt/notesSlides/notesSlide55.xml><?xml version="1.0" encoding="utf-8"?>
-<p:notes xmlns:a="http://schemas.openxmlformats.org/drawingml/2006/main" xmlns:p="http://schemas.openxmlformats.org/presentationml/2006/main" xmlns:r="http://schemas.openxmlformats.org/officeDocument/2006/relationships">
+<p:notes xmlns:a="http://schemas.openxmlformats.org/drawingml/2006/main" xmlns:r="http://schemas.openxmlformats.org/officeDocument/2006/relationships" xmlns:p="http://schemas.openxmlformats.org/presentationml/2006/main">
   <p:cSld>
     <p:spTree>
       <p:nvGrpSpPr>
@@ -4032,7 +3826,7 @@
         <p:nvSpPr>
           <p:cNvPr id="2" name="Slide Image Placeholder 1"/>
           <p:cNvSpPr>
-            <a:spLocks noGrp="1"/>
+            <a:spLocks noGrp="1" noRot="1" noChangeAspect="1"/>
           </p:cNvSpPr>
           <p:nvPr>
             <p:ph type="sldImg" idx="2"/>
@@ -4047,7 +3841,7 @@
             <a:spLocks noGrp="1"/>
           </p:cNvSpPr>
           <p:nvPr>
-            <p:ph type="body" idx="3" sz="quarter"/>
+            <p:ph type="body" sz="quarter" idx="3"/>
           </p:nvPr>
         </p:nvSpPr>
         <p:spPr/>
@@ -4068,7 +3862,7 @@
             <a:spLocks noGrp="1"/>
           </p:cNvSpPr>
           <p:nvPr>
-            <p:ph type="sldNum" idx="5" sz="quarter"/>
+            <p:ph type="sldNum" sz="quarter" idx="5"/>
           </p:nvPr>
         </p:nvSpPr>
         <p:spPr/>
@@ -4082,7 +3876,7 @@
 </file>
 
 <file path=ppt/notesSlides/notesSlide6.xml><?xml version="1.0" encoding="utf-8"?>
-<p:notes xmlns:a="http://schemas.openxmlformats.org/drawingml/2006/main" xmlns:p="http://schemas.openxmlformats.org/presentationml/2006/main" xmlns:r="http://schemas.openxmlformats.org/officeDocument/2006/relationships">
+<p:notes xmlns:a="http://schemas.openxmlformats.org/drawingml/2006/main" xmlns:r="http://schemas.openxmlformats.org/officeDocument/2006/relationships" xmlns:p="http://schemas.openxmlformats.org/presentationml/2006/main">
   <p:cSld>
     <p:spTree>
       <p:nvGrpSpPr>
@@ -4102,7 +3896,7 @@
         <p:nvSpPr>
           <p:cNvPr id="2" name="Slide Image Placeholder 1"/>
           <p:cNvSpPr>
-            <a:spLocks noGrp="1"/>
+            <a:spLocks noGrp="1" noRot="1" noChangeAspect="1"/>
           </p:cNvSpPr>
           <p:nvPr>
             <p:ph type="sldImg" idx="2"/>
@@ -4117,7 +3911,7 @@
             <a:spLocks noGrp="1"/>
           </p:cNvSpPr>
           <p:nvPr>
-            <p:ph type="body" idx="3" sz="quarter"/>
+            <p:ph type="body" sz="quarter" idx="3"/>
           </p:nvPr>
         </p:nvSpPr>
         <p:spPr/>
@@ -4138,7 +3932,7 @@
             <a:spLocks noGrp="1"/>
           </p:cNvSpPr>
           <p:nvPr>
-            <p:ph type="sldNum" idx="5" sz="quarter"/>
+            <p:ph type="sldNum" sz="quarter" idx="5"/>
           </p:nvPr>
         </p:nvSpPr>
         <p:spPr/>
@@ -4152,7 +3946,7 @@
 </file>
 
 <file path=ppt/notesSlides/notesSlide7.xml><?xml version="1.0" encoding="utf-8"?>
-<p:notes xmlns:a="http://schemas.openxmlformats.org/drawingml/2006/main" xmlns:p="http://schemas.openxmlformats.org/presentationml/2006/main" xmlns:r="http://schemas.openxmlformats.org/officeDocument/2006/relationships">
+<p:notes xmlns:a="http://schemas.openxmlformats.org/drawingml/2006/main" xmlns:r="http://schemas.openxmlformats.org/officeDocument/2006/relationships" xmlns:p="http://schemas.openxmlformats.org/presentationml/2006/main">
   <p:cSld>
     <p:spTree>
       <p:nvGrpSpPr>
@@ -4172,7 +3966,7 @@
         <p:nvSpPr>
           <p:cNvPr id="2" name="Slide Image Placeholder 1"/>
           <p:cNvSpPr>
-            <a:spLocks noGrp="1"/>
+            <a:spLocks noGrp="1" noRot="1" noChangeAspect="1"/>
           </p:cNvSpPr>
           <p:nvPr>
             <p:ph type="sldImg" idx="2"/>
@@ -4187,7 +3981,7 @@
             <a:spLocks noGrp="1"/>
           </p:cNvSpPr>
           <p:nvPr>
-            <p:ph type="body" idx="3" sz="quarter"/>
+            <p:ph type="body" sz="quarter" idx="3"/>
           </p:nvPr>
         </p:nvSpPr>
         <p:spPr/>
@@ -4208,7 +4002,7 @@
             <a:spLocks noGrp="1"/>
           </p:cNvSpPr>
           <p:nvPr>
-            <p:ph type="sldNum" idx="5" sz="quarter"/>
+            <p:ph type="sldNum" sz="quarter" idx="5"/>
           </p:nvPr>
         </p:nvSpPr>
         <p:spPr/>
@@ -4222,7 +4016,7 @@
 </file>
 
 <file path=ppt/notesSlides/notesSlide8.xml><?xml version="1.0" encoding="utf-8"?>
-<p:notes xmlns:a="http://schemas.openxmlformats.org/drawingml/2006/main" xmlns:p="http://schemas.openxmlformats.org/presentationml/2006/main" xmlns:r="http://schemas.openxmlformats.org/officeDocument/2006/relationships">
+<p:notes xmlns:a="http://schemas.openxmlformats.org/drawingml/2006/main" xmlns:r="http://schemas.openxmlformats.org/officeDocument/2006/relationships" xmlns:p="http://schemas.openxmlformats.org/presentationml/2006/main">
   <p:cSld>
     <p:spTree>
       <p:nvGrpSpPr>
@@ -4242,7 +4036,7 @@
         <p:nvSpPr>
           <p:cNvPr id="2" name="Slide Image Placeholder 1"/>
           <p:cNvSpPr>
-            <a:spLocks noGrp="1"/>
+            <a:spLocks noGrp="1" noRot="1" noChangeAspect="1"/>
           </p:cNvSpPr>
           <p:nvPr>
             <p:ph type="sldImg" idx="2"/>
@@ -4257,7 +4051,7 @@
             <a:spLocks noGrp="1"/>
           </p:cNvSpPr>
           <p:nvPr>
-            <p:ph type="body" idx="3" sz="quarter"/>
+            <p:ph type="body" sz="quarter" idx="3"/>
           </p:nvPr>
         </p:nvSpPr>
         <p:spPr/>
@@ -4278,7 +4072,7 @@
             <a:spLocks noGrp="1"/>
           </p:cNvSpPr>
           <p:nvPr>
-            <p:ph type="sldNum" idx="5" sz="quarter"/>
+            <p:ph type="sldNum" sz="quarter" idx="5"/>
           </p:nvPr>
         </p:nvSpPr>
         <p:spPr/>
@@ -4292,7 +4086,7 @@
 </file>
 
 <file path=ppt/notesSlides/notesSlide9.xml><?xml version="1.0" encoding="utf-8"?>
-<p:notes xmlns:a="http://schemas.openxmlformats.org/drawingml/2006/main" xmlns:p="http://schemas.openxmlformats.org/presentationml/2006/main" xmlns:r="http://schemas.openxmlformats.org/officeDocument/2006/relationships">
+<p:notes xmlns:a="http://schemas.openxmlformats.org/drawingml/2006/main" xmlns:r="http://schemas.openxmlformats.org/officeDocument/2006/relationships" xmlns:p="http://schemas.openxmlformats.org/presentationml/2006/main">
   <p:cSld>
     <p:spTree>
       <p:nvGrpSpPr>
@@ -4312,7 +4106,7 @@
         <p:nvSpPr>
           <p:cNvPr id="2" name="Slide Image Placeholder 1"/>
           <p:cNvSpPr>
-            <a:spLocks noGrp="1"/>
+            <a:spLocks noGrp="1" noRot="1" noChangeAspect="1"/>
           </p:cNvSpPr>
           <p:nvPr>
             <p:ph type="sldImg" idx="2"/>
@@ -4327,7 +4121,7 @@
             <a:spLocks noGrp="1"/>
           </p:cNvSpPr>
           <p:nvPr>
-            <p:ph type="body" idx="3" sz="quarter"/>
+            <p:ph type="body" sz="quarter" idx="3"/>
           </p:nvPr>
         </p:nvSpPr>
         <p:spPr/>
@@ -4348,7 +4142,7 @@
             <a:spLocks noGrp="1"/>
           </p:cNvSpPr>
           <p:nvPr>
-            <p:ph type="sldNum" idx="5" sz="quarter"/>
+            <p:ph type="sldNum" sz="quarter" idx="5"/>
           </p:nvPr>
         </p:nvSpPr>
         <p:spPr/>
@@ -4399,10 +4193,9 @@
           <a:lstStyle/>
           <a:p>
             <a:r>
-              <a:rPr lang="en-US" smtClean="0"/>
+              <a:rPr lang="en-US"/>
               <a:t>Click to edit Master title style</a:t>
             </a:r>
-            <a:endParaRPr lang="en-US"/>
           </a:p>
         </p:txBody>
       </p:sp>
@@ -4518,10 +4311,9 @@
           </a:lstStyle>
           <a:p>
             <a:r>
-              <a:rPr lang="en-US" smtClean="0"/>
+              <a:rPr lang="en-US"/>
               <a:t>Click to edit Master subtitle style</a:t>
             </a:r>
-            <a:endParaRPr lang="en-US"/>
           </a:p>
         </p:txBody>
       </p:sp>
@@ -4542,7 +4334,7 @@
           <a:p>
             <a:fld id="{5BCAD085-E8A6-8845-BD4E-CB4CCA059FC4}" type="datetimeFigureOut">
               <a:rPr lang="en-US" smtClean="0"/>
-              <a:t>1/27/13</a:t>
+              <a:t>8/19/2026</a:t>
             </a:fld>
             <a:endParaRPr lang="en-US"/>
           </a:p>
@@ -4636,10 +4428,9 @@
           <a:lstStyle/>
           <a:p>
             <a:r>
-              <a:rPr lang="en-US" smtClean="0"/>
+              <a:rPr lang="en-US"/>
               <a:t>Click to edit Master title style</a:t>
             </a:r>
-            <a:endParaRPr lang="en-US"/>
           </a:p>
         </p:txBody>
       </p:sp>
@@ -4660,38 +4451,37 @@
           <a:p>
             <a:pPr lvl="0"/>
             <a:r>
-              <a:rPr lang="en-US" smtClean="0"/>
+              <a:rPr lang="en-US"/>
               <a:t>Click to edit Master text styles</a:t>
             </a:r>
           </a:p>
           <a:p>
             <a:pPr lvl="1"/>
             <a:r>
-              <a:rPr lang="en-US" smtClean="0"/>
+              <a:rPr lang="en-US"/>
               <a:t>Second level</a:t>
             </a:r>
           </a:p>
           <a:p>
             <a:pPr lvl="2"/>
             <a:r>
-              <a:rPr lang="en-US" smtClean="0"/>
+              <a:rPr lang="en-US"/>
               <a:t>Third level</a:t>
             </a:r>
           </a:p>
           <a:p>
             <a:pPr lvl="3"/>
             <a:r>
-              <a:rPr lang="en-US" smtClean="0"/>
+              <a:rPr lang="en-US"/>
               <a:t>Fourth level</a:t>
             </a:r>
           </a:p>
           <a:p>
             <a:pPr lvl="4"/>
             <a:r>
-              <a:rPr lang="en-US" smtClean="0"/>
+              <a:rPr lang="en-US"/>
               <a:t>Fifth level</a:t>
             </a:r>
-            <a:endParaRPr lang="en-US"/>
           </a:p>
         </p:txBody>
       </p:sp>
@@ -4712,7 +4502,7 @@
           <a:p>
             <a:fld id="{5BCAD085-E8A6-8845-BD4E-CB4CCA059FC4}" type="datetimeFigureOut">
               <a:rPr lang="en-US" smtClean="0"/>
-              <a:t>1/27/13</a:t>
+              <a:t>8/19/2026</a:t>
             </a:fld>
             <a:endParaRPr lang="en-US"/>
           </a:p>
@@ -4811,10 +4601,9 @@
           <a:lstStyle/>
           <a:p>
             <a:r>
-              <a:rPr lang="en-US" smtClean="0"/>
+              <a:rPr lang="en-US"/>
               <a:t>Click to edit Master title style</a:t>
             </a:r>
-            <a:endParaRPr lang="en-US"/>
           </a:p>
         </p:txBody>
       </p:sp>
@@ -4840,38 +4629,37 @@
           <a:p>
             <a:pPr lvl="0"/>
             <a:r>
-              <a:rPr lang="en-US" smtClean="0"/>
+              <a:rPr lang="en-US"/>
               <a:t>Click to edit Master text styles</a:t>
             </a:r>
           </a:p>
           <a:p>
             <a:pPr lvl="1"/>
             <a:r>
-              <a:rPr lang="en-US" smtClean="0"/>
+              <a:rPr lang="en-US"/>
               <a:t>Second level</a:t>
             </a:r>
           </a:p>
           <a:p>
             <a:pPr lvl="2"/>
             <a:r>
-              <a:rPr lang="en-US" smtClean="0"/>
+              <a:rPr lang="en-US"/>
               <a:t>Third level</a:t>
             </a:r>
           </a:p>
           <a:p>
             <a:pPr lvl="3"/>
             <a:r>
-              <a:rPr lang="en-US" smtClean="0"/>
+              <a:rPr lang="en-US"/>
               <a:t>Fourth level</a:t>
             </a:r>
           </a:p>
           <a:p>
             <a:pPr lvl="4"/>
             <a:r>
-              <a:rPr lang="en-US" smtClean="0"/>
+              <a:rPr lang="en-US"/>
               <a:t>Fifth level</a:t>
             </a:r>
-            <a:endParaRPr lang="en-US"/>
           </a:p>
         </p:txBody>
       </p:sp>
@@ -4892,7 +4680,7 @@
           <a:p>
             <a:fld id="{5BCAD085-E8A6-8845-BD4E-CB4CCA059FC4}" type="datetimeFigureOut">
               <a:rPr lang="en-US" smtClean="0"/>
-              <a:t>1/27/13</a:t>
+              <a:t>8/19/2026</a:t>
             </a:fld>
             <a:endParaRPr lang="en-US"/>
           </a:p>
@@ -4986,10 +4774,9 @@
           <a:lstStyle/>
           <a:p>
             <a:r>
-              <a:rPr lang="en-US" smtClean="0"/>
+              <a:rPr lang="en-US"/>
               <a:t>Click to edit Master title style</a:t>
             </a:r>
-            <a:endParaRPr lang="en-US"/>
           </a:p>
         </p:txBody>
       </p:sp>
@@ -5010,38 +4797,37 @@
           <a:p>
             <a:pPr lvl="0"/>
             <a:r>
-              <a:rPr lang="en-US" smtClean="0"/>
+              <a:rPr lang="en-US"/>
               <a:t>Click to edit Master text styles</a:t>
             </a:r>
           </a:p>
           <a:p>
             <a:pPr lvl="1"/>
             <a:r>
-              <a:rPr lang="en-US" smtClean="0"/>
+              <a:rPr lang="en-US"/>
               <a:t>Second level</a:t>
             </a:r>
           </a:p>
           <a:p>
             <a:pPr lvl="2"/>
             <a:r>
-              <a:rPr lang="en-US" smtClean="0"/>
+              <a:rPr lang="en-US"/>
               <a:t>Third level</a:t>
             </a:r>
           </a:p>
           <a:p>
             <a:pPr lvl="3"/>
             <a:r>
-              <a:rPr lang="en-US" smtClean="0"/>
+              <a:rPr lang="en-US"/>
               <a:t>Fourth level</a:t>
             </a:r>
           </a:p>
           <a:p>
             <a:pPr lvl="4"/>
             <a:r>
-              <a:rPr lang="en-US" smtClean="0"/>
+              <a:rPr lang="en-US"/>
               <a:t>Fifth level</a:t>
             </a:r>
-            <a:endParaRPr lang="en-US"/>
           </a:p>
         </p:txBody>
       </p:sp>
@@ -5062,7 +4848,7 @@
           <a:p>
             <a:fld id="{5BCAD085-E8A6-8845-BD4E-CB4CCA059FC4}" type="datetimeFigureOut">
               <a:rPr lang="en-US" smtClean="0"/>
-              <a:t>1/27/13</a:t>
+              <a:t>8/19/2026</a:t>
             </a:fld>
             <a:endParaRPr lang="en-US"/>
           </a:p>
@@ -5165,10 +4951,9 @@
           </a:lstStyle>
           <a:p>
             <a:r>
-              <a:rPr lang="en-US" smtClean="0"/>
+              <a:rPr lang="en-US"/>
               <a:t>Click to edit Master title style</a:t>
             </a:r>
-            <a:endParaRPr lang="en-US"/>
           </a:p>
         </p:txBody>
       </p:sp>
@@ -5285,7 +5070,7 @@
           <a:p>
             <a:pPr lvl="0"/>
             <a:r>
-              <a:rPr lang="en-US" smtClean="0"/>
+              <a:rPr lang="en-US"/>
               <a:t>Click to edit Master text styles</a:t>
             </a:r>
           </a:p>
@@ -5308,7 +5093,7 @@
           <a:p>
             <a:fld id="{5BCAD085-E8A6-8845-BD4E-CB4CCA059FC4}" type="datetimeFigureOut">
               <a:rPr lang="en-US" smtClean="0"/>
-              <a:t>1/27/13</a:t>
+              <a:t>8/19/2026</a:t>
             </a:fld>
             <a:endParaRPr lang="en-US"/>
           </a:p>
@@ -5402,10 +5187,9 @@
           <a:lstStyle/>
           <a:p>
             <a:r>
-              <a:rPr lang="en-US" smtClean="0"/>
+              <a:rPr lang="en-US"/>
               <a:t>Click to edit Master title style</a:t>
             </a:r>
-            <a:endParaRPr lang="en-US"/>
           </a:p>
         </p:txBody>
       </p:sp>
@@ -5459,38 +5243,37 @@
           <a:p>
             <a:pPr lvl="0"/>
             <a:r>
-              <a:rPr lang="en-US" smtClean="0"/>
+              <a:rPr lang="en-US"/>
               <a:t>Click to edit Master text styles</a:t>
             </a:r>
           </a:p>
           <a:p>
             <a:pPr lvl="1"/>
             <a:r>
-              <a:rPr lang="en-US" smtClean="0"/>
+              <a:rPr lang="en-US"/>
               <a:t>Second level</a:t>
             </a:r>
           </a:p>
           <a:p>
             <a:pPr lvl="2"/>
             <a:r>
-              <a:rPr lang="en-US" smtClean="0"/>
+              <a:rPr lang="en-US"/>
               <a:t>Third level</a:t>
             </a:r>
           </a:p>
           <a:p>
             <a:pPr lvl="3"/>
             <a:r>
-              <a:rPr lang="en-US" smtClean="0"/>
+              <a:rPr lang="en-US"/>
               <a:t>Fourth level</a:t>
             </a:r>
           </a:p>
           <a:p>
             <a:pPr lvl="4"/>
             <a:r>
-              <a:rPr lang="en-US" smtClean="0"/>
+              <a:rPr lang="en-US"/>
               <a:t>Fifth level</a:t>
             </a:r>
-            <a:endParaRPr lang="en-US"/>
           </a:p>
         </p:txBody>
       </p:sp>
@@ -5544,38 +5327,37 @@
           <a:p>
             <a:pPr lvl="0"/>
             <a:r>
-              <a:rPr lang="en-US" smtClean="0"/>
+              <a:rPr lang="en-US"/>
               <a:t>Click to edit Master text styles</a:t>
             </a:r>
           </a:p>
           <a:p>
             <a:pPr lvl="1"/>
             <a:r>
-              <a:rPr lang="en-US" smtClean="0"/>
+              <a:rPr lang="en-US"/>
               <a:t>Second level</a:t>
             </a:r>
           </a:p>
           <a:p>
             <a:pPr lvl="2"/>
             <a:r>
-              <a:rPr lang="en-US" smtClean="0"/>
+              <a:rPr lang="en-US"/>
               <a:t>Third level</a:t>
             </a:r>
           </a:p>
           <a:p>
             <a:pPr lvl="3"/>
             <a:r>
-              <a:rPr lang="en-US" smtClean="0"/>
+              <a:rPr lang="en-US"/>
               <a:t>Fourth level</a:t>
             </a:r>
           </a:p>
           <a:p>
             <a:pPr lvl="4"/>
             <a:r>
-              <a:rPr lang="en-US" smtClean="0"/>
+              <a:rPr lang="en-US"/>
               <a:t>Fifth level</a:t>
             </a:r>
-            <a:endParaRPr lang="en-US"/>
           </a:p>
         </p:txBody>
       </p:sp>
@@ -5596,7 +5378,7 @@
           <a:p>
             <a:fld id="{5BCAD085-E8A6-8845-BD4E-CB4CCA059FC4}" type="datetimeFigureOut">
               <a:rPr lang="en-US" smtClean="0"/>
-              <a:t>1/27/13</a:t>
+              <a:t>8/19/2026</a:t>
             </a:fld>
             <a:endParaRPr lang="en-US"/>
           </a:p>
@@ -5694,10 +5476,9 @@
           </a:lstStyle>
           <a:p>
             <a:r>
-              <a:rPr lang="en-US" smtClean="0"/>
+              <a:rPr lang="en-US"/>
               <a:t>Click to edit Master title style</a:t>
             </a:r>
-            <a:endParaRPr lang="en-US"/>
           </a:p>
         </p:txBody>
       </p:sp>
@@ -5760,7 +5541,7 @@
           <a:p>
             <a:pPr lvl="0"/>
             <a:r>
-              <a:rPr lang="en-US" smtClean="0"/>
+              <a:rPr lang="en-US"/>
               <a:t>Click to edit Master text styles</a:t>
             </a:r>
           </a:p>
@@ -5816,38 +5597,37 @@
           <a:p>
             <a:pPr lvl="0"/>
             <a:r>
-              <a:rPr lang="en-US" smtClean="0"/>
+              <a:rPr lang="en-US"/>
               <a:t>Click to edit Master text styles</a:t>
             </a:r>
           </a:p>
           <a:p>
             <a:pPr lvl="1"/>
             <a:r>
-              <a:rPr lang="en-US" smtClean="0"/>
+              <a:rPr lang="en-US"/>
               <a:t>Second level</a:t>
             </a:r>
           </a:p>
           <a:p>
             <a:pPr lvl="2"/>
             <a:r>
-              <a:rPr lang="en-US" smtClean="0"/>
+              <a:rPr lang="en-US"/>
               <a:t>Third level</a:t>
             </a:r>
           </a:p>
           <a:p>
             <a:pPr lvl="3"/>
             <a:r>
-              <a:rPr lang="en-US" smtClean="0"/>
+              <a:rPr lang="en-US"/>
               <a:t>Fourth level</a:t>
             </a:r>
           </a:p>
           <a:p>
             <a:pPr lvl="4"/>
             <a:r>
-              <a:rPr lang="en-US" smtClean="0"/>
+              <a:rPr lang="en-US"/>
               <a:t>Fifth level</a:t>
             </a:r>
-            <a:endParaRPr lang="en-US"/>
           </a:p>
         </p:txBody>
       </p:sp>
@@ -5910,7 +5690,7 @@
           <a:p>
             <a:pPr lvl="0"/>
             <a:r>
-              <a:rPr lang="en-US" smtClean="0"/>
+              <a:rPr lang="en-US"/>
               <a:t>Click to edit Master text styles</a:t>
             </a:r>
           </a:p>
@@ -5966,38 +5746,37 @@
           <a:p>
             <a:pPr lvl="0"/>
             <a:r>
-              <a:rPr lang="en-US" smtClean="0"/>
+              <a:rPr lang="en-US"/>
               <a:t>Click to edit Master text styles</a:t>
             </a:r>
           </a:p>
           <a:p>
             <a:pPr lvl="1"/>
             <a:r>
-              <a:rPr lang="en-US" smtClean="0"/>
+              <a:rPr lang="en-US"/>
               <a:t>Second level</a:t>
             </a:r>
           </a:p>
           <a:p>
             <a:pPr lvl="2"/>
             <a:r>
-              <a:rPr lang="en-US" smtClean="0"/>
+              <a:rPr lang="en-US"/>
               <a:t>Third level</a:t>
             </a:r>
           </a:p>
           <a:p>
             <a:pPr lvl="3"/>
             <a:r>
-              <a:rPr lang="en-US" smtClean="0"/>
+              <a:rPr lang="en-US"/>
               <a:t>Fourth level</a:t>
             </a:r>
           </a:p>
           <a:p>
             <a:pPr lvl="4"/>
             <a:r>
-              <a:rPr lang="en-US" smtClean="0"/>
+              <a:rPr lang="en-US"/>
               <a:t>Fifth level</a:t>
             </a:r>
-            <a:endParaRPr lang="en-US"/>
           </a:p>
         </p:txBody>
       </p:sp>
@@ -6018,7 +5797,7 @@
           <a:p>
             <a:fld id="{5BCAD085-E8A6-8845-BD4E-CB4CCA059FC4}" type="datetimeFigureOut">
               <a:rPr lang="en-US" smtClean="0"/>
-              <a:t>1/27/13</a:t>
+              <a:t>8/19/2026</a:t>
             </a:fld>
             <a:endParaRPr lang="en-US"/>
           </a:p>
@@ -6112,10 +5891,9 @@
           <a:lstStyle/>
           <a:p>
             <a:r>
-              <a:rPr lang="en-US" smtClean="0"/>
+              <a:rPr lang="en-US"/>
               <a:t>Click to edit Master title style</a:t>
             </a:r>
-            <a:endParaRPr lang="en-US"/>
           </a:p>
         </p:txBody>
       </p:sp>
@@ -6136,7 +5914,7 @@
           <a:p>
             <a:fld id="{5BCAD085-E8A6-8845-BD4E-CB4CCA059FC4}" type="datetimeFigureOut">
               <a:rPr lang="en-US" smtClean="0"/>
-              <a:t>1/27/13</a:t>
+              <a:t>8/19/2026</a:t>
             </a:fld>
             <a:endParaRPr lang="en-US"/>
           </a:p>
@@ -6231,7 +6009,7 @@
           <a:p>
             <a:fld id="{5BCAD085-E8A6-8845-BD4E-CB4CCA059FC4}" type="datetimeFigureOut">
               <a:rPr lang="en-US" smtClean="0"/>
-              <a:t>1/27/13</a:t>
+              <a:t>8/19/2026</a:t>
             </a:fld>
             <a:endParaRPr lang="en-US"/>
           </a:p>
@@ -6334,10 +6112,9 @@
           </a:lstStyle>
           <a:p>
             <a:r>
-              <a:rPr lang="en-US" smtClean="0"/>
+              <a:rPr lang="en-US"/>
               <a:t>Click to edit Master title style</a:t>
             </a:r>
-            <a:endParaRPr lang="en-US"/>
           </a:p>
         </p:txBody>
       </p:sp>
@@ -6391,38 +6168,37 @@
           <a:p>
             <a:pPr lvl="0"/>
             <a:r>
-              <a:rPr lang="en-US" smtClean="0"/>
+              <a:rPr lang="en-US"/>
               <a:t>Click to edit Master text styles</a:t>
             </a:r>
           </a:p>
           <a:p>
             <a:pPr lvl="1"/>
             <a:r>
-              <a:rPr lang="en-US" smtClean="0"/>
+              <a:rPr lang="en-US"/>
               <a:t>Second level</a:t>
             </a:r>
           </a:p>
           <a:p>
             <a:pPr lvl="2"/>
             <a:r>
-              <a:rPr lang="en-US" smtClean="0"/>
+              <a:rPr lang="en-US"/>
               <a:t>Third level</a:t>
             </a:r>
           </a:p>
           <a:p>
             <a:pPr lvl="3"/>
             <a:r>
-              <a:rPr lang="en-US" smtClean="0"/>
+              <a:rPr lang="en-US"/>
               <a:t>Fourth level</a:t>
             </a:r>
           </a:p>
           <a:p>
             <a:pPr lvl="4"/>
             <a:r>
-              <a:rPr lang="en-US" smtClean="0"/>
+              <a:rPr lang="en-US"/>
               <a:t>Fifth level</a:t>
             </a:r>
-            <a:endParaRPr lang="en-US"/>
           </a:p>
         </p:txBody>
       </p:sp>
@@ -6485,7 +6261,7 @@
           <a:p>
             <a:pPr lvl="0"/>
             <a:r>
-              <a:rPr lang="en-US" smtClean="0"/>
+              <a:rPr lang="en-US"/>
               <a:t>Click to edit Master text styles</a:t>
             </a:r>
           </a:p>
@@ -6508,7 +6284,7 @@
           <a:p>
             <a:fld id="{5BCAD085-E8A6-8845-BD4E-CB4CCA059FC4}" type="datetimeFigureOut">
               <a:rPr lang="en-US" smtClean="0"/>
-              <a:t>1/27/13</a:t>
+              <a:t>8/19/2026</a:t>
             </a:fld>
             <a:endParaRPr lang="en-US"/>
           </a:p>
@@ -6611,10 +6387,9 @@
           </a:lstStyle>
           <a:p>
             <a:r>
-              <a:rPr lang="en-US" smtClean="0"/>
+              <a:rPr lang="en-US"/>
               <a:t>Click to edit Master title style</a:t>
             </a:r>
-            <a:endParaRPr lang="en-US"/>
           </a:p>
         </p:txBody>
       </p:sp>
@@ -6738,7 +6513,7 @@
           <a:p>
             <a:pPr lvl="0"/>
             <a:r>
-              <a:rPr lang="en-US" smtClean="0"/>
+              <a:rPr lang="en-US"/>
               <a:t>Click to edit Master text styles</a:t>
             </a:r>
           </a:p>
@@ -6761,7 +6536,7 @@
           <a:p>
             <a:fld id="{5BCAD085-E8A6-8845-BD4E-CB4CCA059FC4}" type="datetimeFigureOut">
               <a:rPr lang="en-US" smtClean="0"/>
-              <a:t>1/27/13</a:t>
+              <a:t>8/19/2026</a:t>
             </a:fld>
             <a:endParaRPr lang="en-US"/>
           </a:p>
@@ -6870,10 +6645,9 @@
           <a:lstStyle/>
           <a:p>
             <a:r>
-              <a:rPr lang="en-US" smtClean="0"/>
+              <a:rPr lang="en-US"/>
               <a:t>Click to edit Master title style</a:t>
             </a:r>
-            <a:endParaRPr lang="en-US"/>
           </a:p>
         </p:txBody>
       </p:sp>
@@ -6904,38 +6678,37 @@
           <a:p>
             <a:pPr lvl="0"/>
             <a:r>
-              <a:rPr lang="en-US" smtClean="0"/>
+              <a:rPr lang="en-US"/>
               <a:t>Click to edit Master text styles</a:t>
             </a:r>
           </a:p>
           <a:p>
             <a:pPr lvl="1"/>
             <a:r>
-              <a:rPr lang="en-US" smtClean="0"/>
+              <a:rPr lang="en-US"/>
               <a:t>Second level</a:t>
             </a:r>
           </a:p>
           <a:p>
             <a:pPr lvl="2"/>
             <a:r>
-              <a:rPr lang="en-US" smtClean="0"/>
+              <a:rPr lang="en-US"/>
               <a:t>Third level</a:t>
             </a:r>
           </a:p>
           <a:p>
             <a:pPr lvl="3"/>
             <a:r>
-              <a:rPr lang="en-US" smtClean="0"/>
+              <a:rPr lang="en-US"/>
               <a:t>Fourth level</a:t>
             </a:r>
           </a:p>
           <a:p>
             <a:pPr lvl="4"/>
             <a:r>
-              <a:rPr lang="en-US" smtClean="0"/>
+              <a:rPr lang="en-US"/>
               <a:t>Fifth level</a:t>
             </a:r>
-            <a:endParaRPr lang="en-US"/>
           </a:p>
         </p:txBody>
       </p:sp>
@@ -6974,7 +6747,7 @@
           <a:p>
             <a:fld id="{5BCAD085-E8A6-8845-BD4E-CB4CCA059FC4}" type="datetimeFigureOut">
               <a:rPr lang="en-US" smtClean="0"/>
-              <a:t>1/27/13</a:t>
+              <a:t>8/19/2026</a:t>
             </a:fld>
             <a:endParaRPr lang="en-US"/>
           </a:p>
@@ -7333,7 +7106,7 @@
 </file>
 
 <file path=ppt/slides/slide1.xml><?xml version="1.0" encoding="utf-8"?>
-<p:sld xmlns:a="http://schemas.openxmlformats.org/drawingml/2006/main" xmlns:p="http://schemas.openxmlformats.org/presentationml/2006/main" xmlns:r="http://schemas.openxmlformats.org/officeDocument/2006/relationships">
+<p:sld xmlns:a="http://schemas.openxmlformats.org/drawingml/2006/main" xmlns:r="http://schemas.openxmlformats.org/officeDocument/2006/relationships" xmlns:p="http://schemas.openxmlformats.org/presentationml/2006/main">
   <p:cSld>
     <p:bg>
       <p:bgPr>
@@ -7349,7 +7122,14 @@
         <p:cNvGrpSpPr/>
         <p:nvPr/>
       </p:nvGrpSpPr>
-      <p:grpSpPr/>
+      <p:grpSpPr>
+        <a:xfrm>
+          <a:off x="0" y="0"/>
+          <a:ext cx="0" cy="0"/>
+          <a:chOff x="0" y="0"/>
+          <a:chExt cx="0" cy="0"/>
+        </a:xfrm>
+      </p:grpSpPr>
       <p:sp>
         <p:nvSpPr>
           <p:cNvPr id="2" name="Rectangle 1"/>
@@ -7391,6 +7171,7 @@
           <a:lstStyle/>
           <a:p>
             <a:pPr algn="ctr"/>
+            <a:endParaRPr/>
           </a:p>
         </p:txBody>
       </p:sp>
@@ -7403,7 +7184,7 @@
         <p:spPr>
           <a:xfrm>
             <a:off x="1188720" y="1463040"/>
-            <a:ext cx="10058400" cy="548640"/>
+            <a:ext cx="10058400" cy="369332"/>
           </a:xfrm>
           <a:prstGeom prst="rect">
             <a:avLst/>
@@ -7424,7 +7205,67 @@
                 <a:latin typeface="Malgun Gothic"/>
                 <a:ea typeface="Malgun Gothic"/>
               </a:rPr>
-              <a:t>Oracle PL/SQL 7일 실무·DBA 운영자동화 과정  ·  제5장</a:t>
+              <a:t>Oracle PL/SQL </a:t>
+            </a:r>
+            <a:r>
+              <a:rPr sz="1800" b="1" dirty="0" err="1">
+                <a:solidFill>
+                  <a:srgbClr val="C0392B"/>
+                </a:solidFill>
+                <a:latin typeface="Malgun Gothic"/>
+                <a:ea typeface="Malgun Gothic"/>
+              </a:rPr>
+              <a:t>실무·DBA</a:t>
+            </a:r>
+            <a:r>
+              <a:rPr sz="1800" b="1" dirty="0">
+                <a:solidFill>
+                  <a:srgbClr val="C0392B"/>
+                </a:solidFill>
+                <a:latin typeface="Malgun Gothic"/>
+                <a:ea typeface="Malgun Gothic"/>
+              </a:rPr>
+              <a:t> </a:t>
+            </a:r>
+            <a:r>
+              <a:rPr sz="1800" b="1" dirty="0" err="1">
+                <a:solidFill>
+                  <a:srgbClr val="C0392B"/>
+                </a:solidFill>
+                <a:latin typeface="Malgun Gothic"/>
+                <a:ea typeface="Malgun Gothic"/>
+              </a:rPr>
+              <a:t>운영자동화</a:t>
+            </a:r>
+            <a:r>
+              <a:rPr sz="1800" b="1" dirty="0">
+                <a:solidFill>
+                  <a:srgbClr val="C0392B"/>
+                </a:solidFill>
+                <a:latin typeface="Malgun Gothic"/>
+                <a:ea typeface="Malgun Gothic"/>
+              </a:rPr>
+              <a:t> </a:t>
+            </a:r>
+            <a:r>
+              <a:rPr sz="1800" b="1" dirty="0" err="1">
+                <a:solidFill>
+                  <a:srgbClr val="C0392B"/>
+                </a:solidFill>
+                <a:latin typeface="Malgun Gothic"/>
+                <a:ea typeface="Malgun Gothic"/>
+              </a:rPr>
+              <a:t>과정</a:t>
+            </a:r>
+            <a:r>
+              <a:rPr sz="1800" b="1" dirty="0">
+                <a:solidFill>
+                  <a:srgbClr val="C0392B"/>
+                </a:solidFill>
+                <a:latin typeface="Malgun Gothic"/>
+                <a:ea typeface="Malgun Gothic"/>
+              </a:rPr>
+              <a:t>  ·  제5장</a:t>
             </a:r>
           </a:p>
         </p:txBody>
@@ -7508,7 +7349,7 @@
 </file>
 
 <file path=ppt/slides/slide10.xml><?xml version="1.0" encoding="utf-8"?>
-<p:sld xmlns:a="http://schemas.openxmlformats.org/drawingml/2006/main" xmlns:p="http://schemas.openxmlformats.org/presentationml/2006/main" xmlns:r="http://schemas.openxmlformats.org/officeDocument/2006/relationships">
+<p:sld xmlns:a="http://schemas.openxmlformats.org/drawingml/2006/main" xmlns:r="http://schemas.openxmlformats.org/officeDocument/2006/relationships" xmlns:p="http://schemas.openxmlformats.org/presentationml/2006/main">
   <p:cSld>
     <p:spTree>
       <p:nvGrpSpPr>
@@ -7516,7 +7357,14 @@
         <p:cNvGrpSpPr/>
         <p:nvPr/>
       </p:nvGrpSpPr>
-      <p:grpSpPr/>
+      <p:grpSpPr>
+        <a:xfrm>
+          <a:off x="0" y="0"/>
+          <a:ext cx="0" cy="0"/>
+          <a:chOff x="0" y="0"/>
+          <a:chExt cx="0" cy="0"/>
+        </a:xfrm>
+      </p:grpSpPr>
       <p:sp>
         <p:nvSpPr>
           <p:cNvPr id="2" name="Rectangle 1"/>
@@ -7558,6 +7406,7 @@
           <a:lstStyle/>
           <a:p>
             <a:pPr algn="ctr"/>
+            <a:endParaRPr/>
           </a:p>
         </p:txBody>
       </p:sp>
@@ -7637,6 +7486,7 @@
           <a:lstStyle/>
           <a:p>
             <a:pPr algn="ctr"/>
+            <a:endParaRPr/>
           </a:p>
         </p:txBody>
       </p:sp>
@@ -7718,16 +7568,13 @@
                 <a:spcPts val="0"/>
               </a:spcAft>
             </a:pPr>
-            <a:r>
-              <a:rPr sz="1250" b="0">
-                <a:solidFill>
-                  <a:srgbClr val="E6E6E6"/>
-                </a:solidFill>
-                <a:latin typeface="Consolas"/>
-                <a:ea typeface="Consolas"/>
-              </a:rPr>
-              <a:t/>
-            </a:r>
+            <a:endParaRPr sz="1250" b="0">
+              <a:solidFill>
+                <a:srgbClr val="E6E6E6"/>
+              </a:solidFill>
+              <a:latin typeface="Consolas"/>
+              <a:ea typeface="Consolas"/>
+            </a:endParaRPr>
           </a:p>
           <a:p>
             <a:pPr>
@@ -7961,7 +7808,7 @@
 </file>
 
 <file path=ppt/slides/slide11.xml><?xml version="1.0" encoding="utf-8"?>
-<p:sld xmlns:a="http://schemas.openxmlformats.org/drawingml/2006/main" xmlns:p="http://schemas.openxmlformats.org/presentationml/2006/main" xmlns:r="http://schemas.openxmlformats.org/officeDocument/2006/relationships">
+<p:sld xmlns:a="http://schemas.openxmlformats.org/drawingml/2006/main" xmlns:r="http://schemas.openxmlformats.org/officeDocument/2006/relationships" xmlns:p="http://schemas.openxmlformats.org/presentationml/2006/main">
   <p:cSld>
     <p:spTree>
       <p:nvGrpSpPr>
@@ -7969,7 +7816,14 @@
         <p:cNvGrpSpPr/>
         <p:nvPr/>
       </p:nvGrpSpPr>
-      <p:grpSpPr/>
+      <p:grpSpPr>
+        <a:xfrm>
+          <a:off x="0" y="0"/>
+          <a:ext cx="0" cy="0"/>
+          <a:chOff x="0" y="0"/>
+          <a:chExt cx="0" cy="0"/>
+        </a:xfrm>
+      </p:grpSpPr>
       <p:sp>
         <p:nvSpPr>
           <p:cNvPr id="2" name="Rectangle 1"/>
@@ -8011,6 +7865,7 @@
           <a:lstStyle/>
           <a:p>
             <a:pPr algn="ctr"/>
+            <a:endParaRPr/>
           </a:p>
         </p:txBody>
       </p:sp>
@@ -8200,7 +8055,7 @@
 </file>
 
 <file path=ppt/slides/slide12.xml><?xml version="1.0" encoding="utf-8"?>
-<p:sld xmlns:a="http://schemas.openxmlformats.org/drawingml/2006/main" xmlns:p="http://schemas.openxmlformats.org/presentationml/2006/main" xmlns:r="http://schemas.openxmlformats.org/officeDocument/2006/relationships">
+<p:sld xmlns:a="http://schemas.openxmlformats.org/drawingml/2006/main" xmlns:r="http://schemas.openxmlformats.org/officeDocument/2006/relationships" xmlns:p="http://schemas.openxmlformats.org/presentationml/2006/main">
   <p:cSld>
     <p:spTree>
       <p:nvGrpSpPr>
@@ -8208,7 +8063,14 @@
         <p:cNvGrpSpPr/>
         <p:nvPr/>
       </p:nvGrpSpPr>
-      <p:grpSpPr/>
+      <p:grpSpPr>
+        <a:xfrm>
+          <a:off x="0" y="0"/>
+          <a:ext cx="0" cy="0"/>
+          <a:chOff x="0" y="0"/>
+          <a:chExt cx="0" cy="0"/>
+        </a:xfrm>
+      </p:grpSpPr>
       <p:sp>
         <p:nvSpPr>
           <p:cNvPr id="2" name="Rectangle 1"/>
@@ -8250,6 +8112,7 @@
           <a:lstStyle/>
           <a:p>
             <a:pPr algn="ctr"/>
+            <a:endParaRPr/>
           </a:p>
         </p:txBody>
       </p:sp>
@@ -8329,6 +8192,7 @@
           <a:lstStyle/>
           <a:p>
             <a:pPr algn="ctr"/>
+            <a:endParaRPr/>
           </a:p>
         </p:txBody>
       </p:sp>
@@ -8393,6 +8257,37 @@
                 <a:spcPts val="0"/>
               </a:spcAft>
             </a:pPr>
+            <a:endParaRPr sz="1250" b="0">
+              <a:solidFill>
+                <a:srgbClr val="E6E6E6"/>
+              </a:solidFill>
+              <a:latin typeface="Consolas"/>
+              <a:ea typeface="Consolas"/>
+            </a:endParaRPr>
+          </a:p>
+          <a:p>
+            <a:pPr>
+              <a:spcAft>
+                <a:spcPts val="0"/>
+              </a:spcAft>
+            </a:pPr>
+            <a:r>
+              <a:rPr sz="1250" b="0">
+                <a:solidFill>
+                  <a:srgbClr val="7EC699"/>
+                </a:solidFill>
+                <a:latin typeface="Consolas"/>
+                <a:ea typeface="Consolas"/>
+              </a:rPr>
+              <a:t>   -- Private 함수 : 명세에 없으므로 패키지 내부에서만 호출 가능</a:t>
+            </a:r>
+          </a:p>
+          <a:p>
+            <a:pPr>
+              <a:spcAft>
+                <a:spcPts val="0"/>
+              </a:spcAft>
+            </a:pPr>
             <a:r>
               <a:rPr sz="1250" b="0">
                 <a:solidFill>
@@ -8401,24 +8296,7 @@
                 <a:latin typeface="Consolas"/>
                 <a:ea typeface="Consolas"/>
               </a:rPr>
-              <a:t/>
-            </a:r>
-          </a:p>
-          <a:p>
-            <a:pPr>
-              <a:spcAft>
-                <a:spcPts val="0"/>
-              </a:spcAft>
-            </a:pPr>
-            <a:r>
-              <a:rPr sz="1250" b="0">
-                <a:solidFill>
-                  <a:srgbClr val="7EC699"/>
-                </a:solidFill>
-                <a:latin typeface="Consolas"/>
-                <a:ea typeface="Consolas"/>
-              </a:rPr>
-              <a:t>   -- Private 함수 : 명세에 없으므로 패키지 내부에서만 호출 가능</a:t>
+              <a:t>   FUNCTION valid_job(p_job_id IN jobs.job_id%TYPE) RETURN BOOLEAN IS</a:t>
             </a:r>
           </a:p>
           <a:p>
@@ -8435,7 +8313,7 @@
                 <a:latin typeface="Consolas"/>
                 <a:ea typeface="Consolas"/>
               </a:rPr>
-              <a:t>   FUNCTION valid_job(p_job_id IN jobs.job_id%TYPE) RETURN BOOLEAN IS</a:t>
+              <a:t>      v_cnt NUMBER;</a:t>
             </a:r>
           </a:p>
           <a:p>
@@ -8452,7 +8330,7 @@
                 <a:latin typeface="Consolas"/>
                 <a:ea typeface="Consolas"/>
               </a:rPr>
-              <a:t>      v_cnt NUMBER;</a:t>
+              <a:t>   BEGIN</a:t>
             </a:r>
           </a:p>
           <a:p>
@@ -8469,7 +8347,7 @@
                 <a:latin typeface="Consolas"/>
                 <a:ea typeface="Consolas"/>
               </a:rPr>
-              <a:t>   BEGIN</a:t>
+              <a:t>      SELECT COUNT(*) INTO v_cnt FROM jobs WHERE job_id = p_job_id;</a:t>
             </a:r>
           </a:p>
           <a:p>
@@ -8486,7 +8364,7 @@
                 <a:latin typeface="Consolas"/>
                 <a:ea typeface="Consolas"/>
               </a:rPr>
-              <a:t>      SELECT COUNT(*) INTO v_cnt FROM jobs WHERE job_id = p_job_id;</a:t>
+              <a:t>      RETURN (v_cnt &gt; 0);</a:t>
             </a:r>
           </a:p>
           <a:p>
@@ -8503,23 +8381,6 @@
                 <a:latin typeface="Consolas"/>
                 <a:ea typeface="Consolas"/>
               </a:rPr>
-              <a:t>      RETURN (v_cnt &gt; 0);</a:t>
-            </a:r>
-          </a:p>
-          <a:p>
-            <a:pPr>
-              <a:spcAft>
-                <a:spcPts val="0"/>
-              </a:spcAft>
-            </a:pPr>
-            <a:r>
-              <a:rPr sz="1250" b="0">
-                <a:solidFill>
-                  <a:srgbClr val="E6E6E6"/>
-                </a:solidFill>
-                <a:latin typeface="Consolas"/>
-                <a:ea typeface="Consolas"/>
-              </a:rPr>
               <a:t>   END valid_job;</a:t>
             </a:r>
           </a:p>
@@ -8529,16 +8390,13 @@
                 <a:spcPts val="0"/>
               </a:spcAft>
             </a:pPr>
-            <a:r>
-              <a:rPr sz="1250" b="0">
-                <a:solidFill>
-                  <a:srgbClr val="E6E6E6"/>
-                </a:solidFill>
-                <a:latin typeface="Consolas"/>
-                <a:ea typeface="Consolas"/>
-              </a:rPr>
-              <a:t/>
-            </a:r>
+            <a:endParaRPr sz="1250" b="0">
+              <a:solidFill>
+                <a:srgbClr val="E6E6E6"/>
+              </a:solidFill>
+              <a:latin typeface="Consolas"/>
+              <a:ea typeface="Consolas"/>
+            </a:endParaRPr>
           </a:p>
           <a:p>
             <a:pPr>
@@ -8755,7 +8613,7 @@
 </file>
 
 <file path=ppt/slides/slide13.xml><?xml version="1.0" encoding="utf-8"?>
-<p:sld xmlns:a="http://schemas.openxmlformats.org/drawingml/2006/main" xmlns:p="http://schemas.openxmlformats.org/presentationml/2006/main" xmlns:r="http://schemas.openxmlformats.org/officeDocument/2006/relationships">
+<p:sld xmlns:a="http://schemas.openxmlformats.org/drawingml/2006/main" xmlns:r="http://schemas.openxmlformats.org/officeDocument/2006/relationships" xmlns:p="http://schemas.openxmlformats.org/presentationml/2006/main">
   <p:cSld>
     <p:spTree>
       <p:nvGrpSpPr>
@@ -8763,7 +8621,14 @@
         <p:cNvGrpSpPr/>
         <p:nvPr/>
       </p:nvGrpSpPr>
-      <p:grpSpPr/>
+      <p:grpSpPr>
+        <a:xfrm>
+          <a:off x="0" y="0"/>
+          <a:ext cx="0" cy="0"/>
+          <a:chOff x="0" y="0"/>
+          <a:chExt cx="0" cy="0"/>
+        </a:xfrm>
+      </p:grpSpPr>
       <p:sp>
         <p:nvSpPr>
           <p:cNvPr id="2" name="Rectangle 1"/>
@@ -8805,6 +8670,7 @@
           <a:lstStyle/>
           <a:p>
             <a:pPr algn="ctr"/>
+            <a:endParaRPr/>
           </a:p>
         </p:txBody>
       </p:sp>
@@ -8994,7 +8860,7 @@
 </file>
 
 <file path=ppt/slides/slide14.xml><?xml version="1.0" encoding="utf-8"?>
-<p:sld xmlns:a="http://schemas.openxmlformats.org/drawingml/2006/main" xmlns:p="http://schemas.openxmlformats.org/presentationml/2006/main" xmlns:r="http://schemas.openxmlformats.org/officeDocument/2006/relationships">
+<p:sld xmlns:a="http://schemas.openxmlformats.org/drawingml/2006/main" xmlns:r="http://schemas.openxmlformats.org/officeDocument/2006/relationships" xmlns:p="http://schemas.openxmlformats.org/presentationml/2006/main">
   <p:cSld>
     <p:bg>
       <p:bgPr>
@@ -9010,7 +8876,14 @@
         <p:cNvGrpSpPr/>
         <p:nvPr/>
       </p:nvGrpSpPr>
-      <p:grpSpPr/>
+      <p:grpSpPr>
+        <a:xfrm>
+          <a:off x="0" y="0"/>
+          <a:ext cx="0" cy="0"/>
+          <a:chOff x="0" y="0"/>
+          <a:chExt cx="0" cy="0"/>
+        </a:xfrm>
+      </p:grpSpPr>
       <p:sp>
         <p:nvSpPr>
           <p:cNvPr id="2" name="TextBox 1"/>
@@ -9019,8 +8892,8 @@
         </p:nvSpPr>
         <p:spPr>
           <a:xfrm>
-            <a:off x="822960" y="1371600"/>
-            <a:ext cx="2743200" cy="1371600"/>
+            <a:off x="822959" y="1371600"/>
+            <a:ext cx="4903585" cy="1107996"/>
           </a:xfrm>
           <a:prstGeom prst="rect">
             <a:avLst/>
@@ -9034,7 +8907,7 @@
           <a:lstStyle/>
           <a:p>
             <a:r>
-              <a:rPr sz="6600" b="1">
+              <a:rPr sz="6600" b="1" dirty="0">
                 <a:solidFill>
                   <a:srgbClr val="C0392B"/>
                 </a:solidFill>
@@ -9122,6 +8995,7 @@
           <a:lstStyle/>
           <a:p>
             <a:pPr algn="ctr"/>
+            <a:endParaRPr/>
           </a:p>
         </p:txBody>
       </p:sp>
@@ -9225,7 +9099,7 @@
 </file>
 
 <file path=ppt/slides/slide15.xml><?xml version="1.0" encoding="utf-8"?>
-<p:sld xmlns:a="http://schemas.openxmlformats.org/drawingml/2006/main" xmlns:p="http://schemas.openxmlformats.org/presentationml/2006/main" xmlns:r="http://schemas.openxmlformats.org/officeDocument/2006/relationships">
+<p:sld xmlns:a="http://schemas.openxmlformats.org/drawingml/2006/main" xmlns:r="http://schemas.openxmlformats.org/officeDocument/2006/relationships" xmlns:p="http://schemas.openxmlformats.org/presentationml/2006/main">
   <p:cSld>
     <p:spTree>
       <p:nvGrpSpPr>
@@ -9233,7 +9107,14 @@
         <p:cNvGrpSpPr/>
         <p:nvPr/>
       </p:nvGrpSpPr>
-      <p:grpSpPr/>
+      <p:grpSpPr>
+        <a:xfrm>
+          <a:off x="0" y="0"/>
+          <a:ext cx="0" cy="0"/>
+          <a:chOff x="0" y="0"/>
+          <a:chExt cx="0" cy="0"/>
+        </a:xfrm>
+      </p:grpSpPr>
       <p:sp>
         <p:nvSpPr>
           <p:cNvPr id="2" name="Rectangle 1"/>
@@ -9275,6 +9156,7 @@
           <a:lstStyle/>
           <a:p>
             <a:pPr algn="ctr"/>
+            <a:endParaRPr/>
           </a:p>
         </p:txBody>
       </p:sp>
@@ -9481,7 +9363,7 @@
 </file>
 
 <file path=ppt/slides/slide16.xml><?xml version="1.0" encoding="utf-8"?>
-<p:sld xmlns:a="http://schemas.openxmlformats.org/drawingml/2006/main" xmlns:p="http://schemas.openxmlformats.org/presentationml/2006/main" xmlns:r="http://schemas.openxmlformats.org/officeDocument/2006/relationships">
+<p:sld xmlns:a="http://schemas.openxmlformats.org/drawingml/2006/main" xmlns:r="http://schemas.openxmlformats.org/officeDocument/2006/relationships" xmlns:p="http://schemas.openxmlformats.org/presentationml/2006/main">
   <p:cSld>
     <p:spTree>
       <p:nvGrpSpPr>
@@ -9489,7 +9371,14 @@
         <p:cNvGrpSpPr/>
         <p:nvPr/>
       </p:nvGrpSpPr>
-      <p:grpSpPr/>
+      <p:grpSpPr>
+        <a:xfrm>
+          <a:off x="0" y="0"/>
+          <a:ext cx="0" cy="0"/>
+          <a:chOff x="0" y="0"/>
+          <a:chExt cx="0" cy="0"/>
+        </a:xfrm>
+      </p:grpSpPr>
       <p:sp>
         <p:nvSpPr>
           <p:cNvPr id="2" name="Rectangle 1"/>
@@ -9531,6 +9420,7 @@
           <a:lstStyle/>
           <a:p>
             <a:pPr algn="ctr"/>
+            <a:endParaRPr/>
           </a:p>
         </p:txBody>
       </p:sp>
@@ -9610,6 +9500,7 @@
           <a:lstStyle/>
           <a:p>
             <a:pPr algn="ctr"/>
+            <a:endParaRPr/>
           </a:p>
         </p:txBody>
       </p:sp>
@@ -9759,16 +9650,13 @@
                 <a:spcPts val="0"/>
               </a:spcAft>
             </a:pPr>
-            <a:r>
-              <a:rPr sz="1250" b="0">
-                <a:solidFill>
-                  <a:srgbClr val="E6E6E6"/>
-                </a:solidFill>
-                <a:latin typeface="Consolas"/>
-                <a:ea typeface="Consolas"/>
-              </a:rPr>
-              <a:t/>
-            </a:r>
+            <a:endParaRPr sz="1250" b="0">
+              <a:solidFill>
+                <a:srgbClr val="F08A8A"/>
+              </a:solidFill>
+              <a:latin typeface="Consolas"/>
+              <a:ea typeface="Consolas"/>
+            </a:endParaRPr>
           </a:p>
           <a:p>
             <a:pPr>
@@ -9849,7 +9737,7 @@
 </file>
 
 <file path=ppt/slides/slide17.xml><?xml version="1.0" encoding="utf-8"?>
-<p:sld xmlns:a="http://schemas.openxmlformats.org/drawingml/2006/main" xmlns:p="http://schemas.openxmlformats.org/presentationml/2006/main" xmlns:r="http://schemas.openxmlformats.org/officeDocument/2006/relationships">
+<p:sld xmlns:a="http://schemas.openxmlformats.org/drawingml/2006/main" xmlns:r="http://schemas.openxmlformats.org/officeDocument/2006/relationships" xmlns:p="http://schemas.openxmlformats.org/presentationml/2006/main">
   <p:cSld>
     <p:spTree>
       <p:nvGrpSpPr>
@@ -9857,7 +9745,14 @@
         <p:cNvGrpSpPr/>
         <p:nvPr/>
       </p:nvGrpSpPr>
-      <p:grpSpPr/>
+      <p:grpSpPr>
+        <a:xfrm>
+          <a:off x="0" y="0"/>
+          <a:ext cx="0" cy="0"/>
+          <a:chOff x="0" y="0"/>
+          <a:chExt cx="0" cy="0"/>
+        </a:xfrm>
+      </p:grpSpPr>
       <p:sp>
         <p:nvSpPr>
           <p:cNvPr id="2" name="Rectangle 1"/>
@@ -9899,6 +9794,7 @@
           <a:lstStyle/>
           <a:p>
             <a:pPr algn="ctr"/>
+            <a:endParaRPr/>
           </a:p>
         </p:txBody>
       </p:sp>
@@ -10088,7 +9984,7 @@
 </file>
 
 <file path=ppt/slides/slide18.xml><?xml version="1.0" encoding="utf-8"?>
-<p:sld xmlns:a="http://schemas.openxmlformats.org/drawingml/2006/main" xmlns:p="http://schemas.openxmlformats.org/presentationml/2006/main" xmlns:r="http://schemas.openxmlformats.org/officeDocument/2006/relationships">
+<p:sld xmlns:a="http://schemas.openxmlformats.org/drawingml/2006/main" xmlns:r="http://schemas.openxmlformats.org/officeDocument/2006/relationships" xmlns:p="http://schemas.openxmlformats.org/presentationml/2006/main">
   <p:cSld>
     <p:spTree>
       <p:nvGrpSpPr>
@@ -10096,7 +9992,14 @@
         <p:cNvGrpSpPr/>
         <p:nvPr/>
       </p:nvGrpSpPr>
-      <p:grpSpPr/>
+      <p:grpSpPr>
+        <a:xfrm>
+          <a:off x="0" y="0"/>
+          <a:ext cx="0" cy="0"/>
+          <a:chOff x="0" y="0"/>
+          <a:chExt cx="0" cy="0"/>
+        </a:xfrm>
+      </p:grpSpPr>
       <p:sp>
         <p:nvSpPr>
           <p:cNvPr id="2" name="Rectangle 1"/>
@@ -10138,6 +10041,7 @@
           <a:lstStyle/>
           <a:p>
             <a:pPr algn="ctr"/>
+            <a:endParaRPr/>
           </a:p>
         </p:txBody>
       </p:sp>
@@ -10344,7 +10248,7 @@
 </file>
 
 <file path=ppt/slides/slide19.xml><?xml version="1.0" encoding="utf-8"?>
-<p:sld xmlns:a="http://schemas.openxmlformats.org/drawingml/2006/main" xmlns:p="http://schemas.openxmlformats.org/presentationml/2006/main" xmlns:r="http://schemas.openxmlformats.org/officeDocument/2006/relationships">
+<p:sld xmlns:a="http://schemas.openxmlformats.org/drawingml/2006/main" xmlns:r="http://schemas.openxmlformats.org/officeDocument/2006/relationships" xmlns:p="http://schemas.openxmlformats.org/presentationml/2006/main">
   <p:cSld>
     <p:spTree>
       <p:nvGrpSpPr>
@@ -10352,7 +10256,14 @@
         <p:cNvGrpSpPr/>
         <p:nvPr/>
       </p:nvGrpSpPr>
-      <p:grpSpPr/>
+      <p:grpSpPr>
+        <a:xfrm>
+          <a:off x="0" y="0"/>
+          <a:ext cx="0" cy="0"/>
+          <a:chOff x="0" y="0"/>
+          <a:chExt cx="0" cy="0"/>
+        </a:xfrm>
+      </p:grpSpPr>
       <p:sp>
         <p:nvSpPr>
           <p:cNvPr id="2" name="Rectangle 1"/>
@@ -10394,6 +10305,7 @@
           <a:lstStyle/>
           <a:p>
             <a:pPr algn="ctr"/>
+            <a:endParaRPr/>
           </a:p>
         </p:txBody>
       </p:sp>
@@ -10473,6 +10385,7 @@
           <a:lstStyle/>
           <a:p>
             <a:pPr algn="ctr"/>
+            <a:endParaRPr/>
           </a:p>
         </p:txBody>
       </p:sp>
@@ -10741,16 +10654,13 @@
                 <a:spcPts val="0"/>
               </a:spcAft>
             </a:pPr>
-            <a:r>
-              <a:rPr sz="1250" b="0">
-                <a:solidFill>
-                  <a:srgbClr val="E6E6E6"/>
-                </a:solidFill>
-                <a:latin typeface="Consolas"/>
-                <a:ea typeface="Consolas"/>
-              </a:rPr>
-              <a:t/>
-            </a:r>
+            <a:endParaRPr sz="1250" b="0">
+              <a:solidFill>
+                <a:srgbClr val="9CDCFE"/>
+              </a:solidFill>
+              <a:latin typeface="Consolas"/>
+              <a:ea typeface="Consolas"/>
+            </a:endParaRPr>
           </a:p>
           <a:p>
             <a:pPr>
@@ -10780,7 +10690,7 @@
 </file>
 
 <file path=ppt/slides/slide2.xml><?xml version="1.0" encoding="utf-8"?>
-<p:sld xmlns:a="http://schemas.openxmlformats.org/drawingml/2006/main" xmlns:p="http://schemas.openxmlformats.org/presentationml/2006/main" xmlns:r="http://schemas.openxmlformats.org/officeDocument/2006/relationships">
+<p:sld xmlns:a="http://schemas.openxmlformats.org/drawingml/2006/main" xmlns:r="http://schemas.openxmlformats.org/officeDocument/2006/relationships" xmlns:p="http://schemas.openxmlformats.org/presentationml/2006/main">
   <p:cSld>
     <p:spTree>
       <p:nvGrpSpPr>
@@ -10788,7 +10698,14 @@
         <p:cNvGrpSpPr/>
         <p:nvPr/>
       </p:nvGrpSpPr>
-      <p:grpSpPr/>
+      <p:grpSpPr>
+        <a:xfrm>
+          <a:off x="0" y="0"/>
+          <a:ext cx="0" cy="0"/>
+          <a:chOff x="0" y="0"/>
+          <a:chExt cx="0" cy="0"/>
+        </a:xfrm>
+      </p:grpSpPr>
       <p:sp>
         <p:nvSpPr>
           <p:cNvPr id="2" name="Rectangle 1"/>
@@ -10830,6 +10747,7 @@
           <a:lstStyle/>
           <a:p>
             <a:pPr algn="ctr"/>
+            <a:endParaRPr/>
           </a:p>
         </p:txBody>
       </p:sp>
@@ -11087,7 +11005,7 @@
 </file>
 
 <file path=ppt/slides/slide20.xml><?xml version="1.0" encoding="utf-8"?>
-<p:sld xmlns:a="http://schemas.openxmlformats.org/drawingml/2006/main" xmlns:p="http://schemas.openxmlformats.org/presentationml/2006/main" xmlns:r="http://schemas.openxmlformats.org/officeDocument/2006/relationships">
+<p:sld xmlns:a="http://schemas.openxmlformats.org/drawingml/2006/main" xmlns:r="http://schemas.openxmlformats.org/officeDocument/2006/relationships" xmlns:p="http://schemas.openxmlformats.org/presentationml/2006/main">
   <p:cSld>
     <p:spTree>
       <p:nvGrpSpPr>
@@ -11095,7 +11013,14 @@
         <p:cNvGrpSpPr/>
         <p:nvPr/>
       </p:nvGrpSpPr>
-      <p:grpSpPr/>
+      <p:grpSpPr>
+        <a:xfrm>
+          <a:off x="0" y="0"/>
+          <a:ext cx="0" cy="0"/>
+          <a:chOff x="0" y="0"/>
+          <a:chExt cx="0" cy="0"/>
+        </a:xfrm>
+      </p:grpSpPr>
       <p:sp>
         <p:nvSpPr>
           <p:cNvPr id="2" name="Rectangle 1"/>
@@ -11137,6 +11062,7 @@
           <a:lstStyle/>
           <a:p>
             <a:pPr algn="ctr"/>
+            <a:endParaRPr/>
           </a:p>
         </p:txBody>
       </p:sp>
@@ -11343,7 +11269,7 @@
 </file>
 
 <file path=ppt/slides/slide21.xml><?xml version="1.0" encoding="utf-8"?>
-<p:sld xmlns:a="http://schemas.openxmlformats.org/drawingml/2006/main" xmlns:p="http://schemas.openxmlformats.org/presentationml/2006/main" xmlns:r="http://schemas.openxmlformats.org/officeDocument/2006/relationships">
+<p:sld xmlns:a="http://schemas.openxmlformats.org/drawingml/2006/main" xmlns:r="http://schemas.openxmlformats.org/officeDocument/2006/relationships" xmlns:p="http://schemas.openxmlformats.org/presentationml/2006/main">
   <p:cSld>
     <p:spTree>
       <p:nvGrpSpPr>
@@ -11351,7 +11277,14 @@
         <p:cNvGrpSpPr/>
         <p:nvPr/>
       </p:nvGrpSpPr>
-      <p:grpSpPr/>
+      <p:grpSpPr>
+        <a:xfrm>
+          <a:off x="0" y="0"/>
+          <a:ext cx="0" cy="0"/>
+          <a:chOff x="0" y="0"/>
+          <a:chExt cx="0" cy="0"/>
+        </a:xfrm>
+      </p:grpSpPr>
       <p:sp>
         <p:nvSpPr>
           <p:cNvPr id="2" name="Rectangle 1"/>
@@ -11393,6 +11326,7 @@
           <a:lstStyle/>
           <a:p>
             <a:pPr algn="ctr"/>
+            <a:endParaRPr/>
           </a:p>
         </p:txBody>
       </p:sp>
@@ -11565,7 +11499,7 @@
 </file>
 
 <file path=ppt/slides/slide22.xml><?xml version="1.0" encoding="utf-8"?>
-<p:sld xmlns:a="http://schemas.openxmlformats.org/drawingml/2006/main" xmlns:p="http://schemas.openxmlformats.org/presentationml/2006/main" xmlns:r="http://schemas.openxmlformats.org/officeDocument/2006/relationships">
+<p:sld xmlns:a="http://schemas.openxmlformats.org/drawingml/2006/main" xmlns:r="http://schemas.openxmlformats.org/officeDocument/2006/relationships" xmlns:p="http://schemas.openxmlformats.org/presentationml/2006/main">
   <p:cSld>
     <p:spTree>
       <p:nvGrpSpPr>
@@ -11573,7 +11507,14 @@
         <p:cNvGrpSpPr/>
         <p:nvPr/>
       </p:nvGrpSpPr>
-      <p:grpSpPr/>
+      <p:grpSpPr>
+        <a:xfrm>
+          <a:off x="0" y="0"/>
+          <a:ext cx="0" cy="0"/>
+          <a:chOff x="0" y="0"/>
+          <a:chExt cx="0" cy="0"/>
+        </a:xfrm>
+      </p:grpSpPr>
       <p:sp>
         <p:nvSpPr>
           <p:cNvPr id="2" name="Rectangle 1"/>
@@ -11615,6 +11556,7 @@
           <a:lstStyle/>
           <a:p>
             <a:pPr algn="ctr"/>
+            <a:endParaRPr/>
           </a:p>
         </p:txBody>
       </p:sp>
@@ -11821,7 +11763,7 @@
 </file>
 
 <file path=ppt/slides/slide23.xml><?xml version="1.0" encoding="utf-8"?>
-<p:sld xmlns:a="http://schemas.openxmlformats.org/drawingml/2006/main" xmlns:p="http://schemas.openxmlformats.org/presentationml/2006/main" xmlns:r="http://schemas.openxmlformats.org/officeDocument/2006/relationships">
+<p:sld xmlns:a="http://schemas.openxmlformats.org/drawingml/2006/main" xmlns:r="http://schemas.openxmlformats.org/officeDocument/2006/relationships" xmlns:p="http://schemas.openxmlformats.org/presentationml/2006/main">
   <p:cSld>
     <p:spTree>
       <p:nvGrpSpPr>
@@ -11829,7 +11771,14 @@
         <p:cNvGrpSpPr/>
         <p:nvPr/>
       </p:nvGrpSpPr>
-      <p:grpSpPr/>
+      <p:grpSpPr>
+        <a:xfrm>
+          <a:off x="0" y="0"/>
+          <a:ext cx="0" cy="0"/>
+          <a:chOff x="0" y="0"/>
+          <a:chExt cx="0" cy="0"/>
+        </a:xfrm>
+      </p:grpSpPr>
       <p:sp>
         <p:nvSpPr>
           <p:cNvPr id="2" name="Rectangle 1"/>
@@ -11871,6 +11820,7 @@
           <a:lstStyle/>
           <a:p>
             <a:pPr algn="ctr"/>
+            <a:endParaRPr/>
           </a:p>
         </p:txBody>
       </p:sp>
@@ -11950,6 +11900,7 @@
           <a:lstStyle/>
           <a:p>
             <a:pPr algn="ctr"/>
+            <a:endParaRPr/>
           </a:p>
         </p:txBody>
       </p:sp>
@@ -12065,16 +12016,13 @@
                 <a:spcPts val="0"/>
               </a:spcAft>
             </a:pPr>
-            <a:r>
-              <a:rPr sz="1250" b="0">
-                <a:solidFill>
-                  <a:srgbClr val="E6E6E6"/>
-                </a:solidFill>
-                <a:latin typeface="Consolas"/>
-                <a:ea typeface="Consolas"/>
-              </a:rPr>
-              <a:t/>
-            </a:r>
+            <a:endParaRPr sz="1250" b="0">
+              <a:solidFill>
+                <a:srgbClr val="9CDCFE"/>
+              </a:solidFill>
+              <a:latin typeface="Consolas"/>
+              <a:ea typeface="Consolas"/>
+            </a:endParaRPr>
           </a:p>
           <a:p>
             <a:pPr>
@@ -12223,7 +12171,7 @@
 </file>
 
 <file path=ppt/slides/slide24.xml><?xml version="1.0" encoding="utf-8"?>
-<p:sld xmlns:a="http://schemas.openxmlformats.org/drawingml/2006/main" xmlns:p="http://schemas.openxmlformats.org/presentationml/2006/main" xmlns:r="http://schemas.openxmlformats.org/officeDocument/2006/relationships">
+<p:sld xmlns:a="http://schemas.openxmlformats.org/drawingml/2006/main" xmlns:r="http://schemas.openxmlformats.org/officeDocument/2006/relationships" xmlns:p="http://schemas.openxmlformats.org/presentationml/2006/main">
   <p:cSld>
     <p:spTree>
       <p:nvGrpSpPr>
@@ -12231,7 +12179,14 @@
         <p:cNvGrpSpPr/>
         <p:nvPr/>
       </p:nvGrpSpPr>
-      <p:grpSpPr/>
+      <p:grpSpPr>
+        <a:xfrm>
+          <a:off x="0" y="0"/>
+          <a:ext cx="0" cy="0"/>
+          <a:chOff x="0" y="0"/>
+          <a:chExt cx="0" cy="0"/>
+        </a:xfrm>
+      </p:grpSpPr>
       <p:sp>
         <p:nvSpPr>
           <p:cNvPr id="2" name="Rectangle 1"/>
@@ -12273,6 +12228,7 @@
           <a:lstStyle/>
           <a:p>
             <a:pPr algn="ctr"/>
+            <a:endParaRPr/>
           </a:p>
         </p:txBody>
       </p:sp>
@@ -12479,7 +12435,7 @@
 </file>
 
 <file path=ppt/slides/slide25.xml><?xml version="1.0" encoding="utf-8"?>
-<p:sld xmlns:a="http://schemas.openxmlformats.org/drawingml/2006/main" xmlns:p="http://schemas.openxmlformats.org/presentationml/2006/main" xmlns:r="http://schemas.openxmlformats.org/officeDocument/2006/relationships">
+<p:sld xmlns:a="http://schemas.openxmlformats.org/drawingml/2006/main" xmlns:r="http://schemas.openxmlformats.org/officeDocument/2006/relationships" xmlns:p="http://schemas.openxmlformats.org/presentationml/2006/main">
   <p:cSld>
     <p:spTree>
       <p:nvGrpSpPr>
@@ -12487,7 +12443,14 @@
         <p:cNvGrpSpPr/>
         <p:nvPr/>
       </p:nvGrpSpPr>
-      <p:grpSpPr/>
+      <p:grpSpPr>
+        <a:xfrm>
+          <a:off x="0" y="0"/>
+          <a:ext cx="0" cy="0"/>
+          <a:chOff x="0" y="0"/>
+          <a:chExt cx="0" cy="0"/>
+        </a:xfrm>
+      </p:grpSpPr>
       <p:sp>
         <p:nvSpPr>
           <p:cNvPr id="2" name="Rectangle 1"/>
@@ -12529,6 +12492,7 @@
           <a:lstStyle/>
           <a:p>
             <a:pPr algn="ctr"/>
+            <a:endParaRPr/>
           </a:p>
         </p:txBody>
       </p:sp>
@@ -12608,6 +12572,7 @@
           <a:lstStyle/>
           <a:p>
             <a:pPr algn="ctr"/>
+            <a:endParaRPr/>
           </a:p>
         </p:txBody>
       </p:sp>
@@ -12808,16 +12773,13 @@
                 <a:spcPts val="0"/>
               </a:spcAft>
             </a:pPr>
-            <a:r>
-              <a:rPr sz="1250" b="0">
-                <a:solidFill>
-                  <a:srgbClr val="E6E6E6"/>
-                </a:solidFill>
-                <a:latin typeface="Consolas"/>
-                <a:ea typeface="Consolas"/>
-              </a:rPr>
-              <a:t/>
-            </a:r>
+            <a:endParaRPr sz="1250" b="0">
+              <a:solidFill>
+                <a:srgbClr val="E6E6E6"/>
+              </a:solidFill>
+              <a:latin typeface="Consolas"/>
+              <a:ea typeface="Consolas"/>
+            </a:endParaRPr>
           </a:p>
           <a:p>
             <a:pPr>
@@ -12983,7 +12945,7 @@
 </file>
 
 <file path=ppt/slides/slide26.xml><?xml version="1.0" encoding="utf-8"?>
-<p:sld xmlns:a="http://schemas.openxmlformats.org/drawingml/2006/main" xmlns:p="http://schemas.openxmlformats.org/presentationml/2006/main" xmlns:r="http://schemas.openxmlformats.org/officeDocument/2006/relationships">
+<p:sld xmlns:a="http://schemas.openxmlformats.org/drawingml/2006/main" xmlns:r="http://schemas.openxmlformats.org/officeDocument/2006/relationships" xmlns:p="http://schemas.openxmlformats.org/presentationml/2006/main">
   <p:cSld>
     <p:spTree>
       <p:nvGrpSpPr>
@@ -12991,7 +12953,14 @@
         <p:cNvGrpSpPr/>
         <p:nvPr/>
       </p:nvGrpSpPr>
-      <p:grpSpPr/>
+      <p:grpSpPr>
+        <a:xfrm>
+          <a:off x="0" y="0"/>
+          <a:ext cx="0" cy="0"/>
+          <a:chOff x="0" y="0"/>
+          <a:chExt cx="0" cy="0"/>
+        </a:xfrm>
+      </p:grpSpPr>
       <p:sp>
         <p:nvSpPr>
           <p:cNvPr id="2" name="Rectangle 1"/>
@@ -13033,6 +13002,7 @@
           <a:lstStyle/>
           <a:p>
             <a:pPr algn="ctr"/>
+            <a:endParaRPr/>
           </a:p>
         </p:txBody>
       </p:sp>
@@ -13222,7 +13192,7 @@
 </file>
 
 <file path=ppt/slides/slide27.xml><?xml version="1.0" encoding="utf-8"?>
-<p:sld xmlns:a="http://schemas.openxmlformats.org/drawingml/2006/main" xmlns:p="http://schemas.openxmlformats.org/presentationml/2006/main" xmlns:r="http://schemas.openxmlformats.org/officeDocument/2006/relationships">
+<p:sld xmlns:a="http://schemas.openxmlformats.org/drawingml/2006/main" xmlns:r="http://schemas.openxmlformats.org/officeDocument/2006/relationships" xmlns:p="http://schemas.openxmlformats.org/presentationml/2006/main">
   <p:cSld>
     <p:spTree>
       <p:nvGrpSpPr>
@@ -13230,7 +13200,14 @@
         <p:cNvGrpSpPr/>
         <p:nvPr/>
       </p:nvGrpSpPr>
-      <p:grpSpPr/>
+      <p:grpSpPr>
+        <a:xfrm>
+          <a:off x="0" y="0"/>
+          <a:ext cx="0" cy="0"/>
+          <a:chOff x="0" y="0"/>
+          <a:chExt cx="0" cy="0"/>
+        </a:xfrm>
+      </p:grpSpPr>
       <p:sp>
         <p:nvSpPr>
           <p:cNvPr id="2" name="Rectangle 1"/>
@@ -13272,6 +13249,7 @@
           <a:lstStyle/>
           <a:p>
             <a:pPr algn="ctr"/>
+            <a:endParaRPr/>
           </a:p>
         </p:txBody>
       </p:sp>
@@ -13351,6 +13329,7 @@
           <a:lstStyle/>
           <a:p>
             <a:pPr algn="ctr"/>
+            <a:endParaRPr/>
           </a:p>
         </p:txBody>
       </p:sp>
@@ -13449,6 +13428,20 @@
                 <a:spcPts val="0"/>
               </a:spcAft>
             </a:pPr>
+            <a:endParaRPr sz="1250" b="0">
+              <a:solidFill>
+                <a:srgbClr val="E6E6E6"/>
+              </a:solidFill>
+              <a:latin typeface="Consolas"/>
+              <a:ea typeface="Consolas"/>
+            </a:endParaRPr>
+          </a:p>
+          <a:p>
+            <a:pPr>
+              <a:spcAft>
+                <a:spcPts val="0"/>
+              </a:spcAft>
+            </a:pPr>
             <a:r>
               <a:rPr sz="1250" b="0">
                 <a:solidFill>
@@ -13457,7 +13450,7 @@
                 <a:latin typeface="Consolas"/>
                 <a:ea typeface="Consolas"/>
               </a:rPr>
-              <a:t/>
+              <a:t>SQL&gt; ALTER PACKAGE emp_pkg COMPILE BODY;           -- 본문만</a:t>
             </a:r>
           </a:p>
           <a:p>
@@ -13474,7 +13467,7 @@
                 <a:latin typeface="Consolas"/>
                 <a:ea typeface="Consolas"/>
               </a:rPr>
-              <a:t>SQL&gt; ALTER PACKAGE emp_pkg COMPILE BODY;           -- 본문만</a:t>
+              <a:t>SQL&gt; ALTER PACKAGE emp_pkg COMPILE SPECIFICATION;  -- 명세만</a:t>
             </a:r>
           </a:p>
           <a:p>
@@ -13491,23 +13484,6 @@
                 <a:latin typeface="Consolas"/>
                 <a:ea typeface="Consolas"/>
               </a:rPr>
-              <a:t>SQL&gt; ALTER PACKAGE emp_pkg COMPILE SPECIFICATION;  -- 명세만</a:t>
-            </a:r>
-          </a:p>
-          <a:p>
-            <a:pPr>
-              <a:spcAft>
-                <a:spcPts val="0"/>
-              </a:spcAft>
-            </a:pPr>
-            <a:r>
-              <a:rPr sz="1250" b="0">
-                <a:solidFill>
-                  <a:srgbClr val="E6E6E6"/>
-                </a:solidFill>
-                <a:latin typeface="Consolas"/>
-                <a:ea typeface="Consolas"/>
-              </a:rPr>
               <a:t>SQL&gt; ALTER PACKAGE emp_pkg COMPILE;                -- 둘 다</a:t>
             </a:r>
           </a:p>
@@ -13517,16 +13493,13 @@
                 <a:spcPts val="0"/>
               </a:spcAft>
             </a:pPr>
-            <a:r>
-              <a:rPr sz="1250" b="0">
-                <a:solidFill>
-                  <a:srgbClr val="E6E6E6"/>
-                </a:solidFill>
-                <a:latin typeface="Consolas"/>
-                <a:ea typeface="Consolas"/>
-              </a:rPr>
-              <a:t/>
-            </a:r>
+            <a:endParaRPr sz="1250" b="0">
+              <a:solidFill>
+                <a:srgbClr val="E6E6E6"/>
+              </a:solidFill>
+              <a:latin typeface="Consolas"/>
+              <a:ea typeface="Consolas"/>
+            </a:endParaRPr>
           </a:p>
           <a:p>
             <a:pPr>
@@ -13624,7 +13597,7 @@
 </file>
 
 <file path=ppt/slides/slide28.xml><?xml version="1.0" encoding="utf-8"?>
-<p:sld xmlns:a="http://schemas.openxmlformats.org/drawingml/2006/main" xmlns:p="http://schemas.openxmlformats.org/presentationml/2006/main" xmlns:r="http://schemas.openxmlformats.org/officeDocument/2006/relationships">
+<p:sld xmlns:a="http://schemas.openxmlformats.org/drawingml/2006/main" xmlns:r="http://schemas.openxmlformats.org/officeDocument/2006/relationships" xmlns:p="http://schemas.openxmlformats.org/presentationml/2006/main">
   <p:cSld>
     <p:bg>
       <p:bgPr>
@@ -13640,7 +13613,14 @@
         <p:cNvGrpSpPr/>
         <p:nvPr/>
       </p:nvGrpSpPr>
-      <p:grpSpPr/>
+      <p:grpSpPr>
+        <a:xfrm>
+          <a:off x="0" y="0"/>
+          <a:ext cx="0" cy="0"/>
+          <a:chOff x="0" y="0"/>
+          <a:chExt cx="0" cy="0"/>
+        </a:xfrm>
+      </p:grpSpPr>
       <p:sp>
         <p:nvSpPr>
           <p:cNvPr id="2" name="TextBox 1"/>
@@ -13649,8 +13629,8 @@
         </p:nvSpPr>
         <p:spPr>
           <a:xfrm>
-            <a:off x="822960" y="1371600"/>
-            <a:ext cx="2743200" cy="1371600"/>
+            <a:off x="822959" y="1371600"/>
+            <a:ext cx="4497185" cy="1107996"/>
           </a:xfrm>
           <a:prstGeom prst="rect">
             <a:avLst/>
@@ -13664,7 +13644,7 @@
           <a:lstStyle/>
           <a:p>
             <a:r>
-              <a:rPr sz="6600" b="1">
+              <a:rPr sz="6600" b="1" dirty="0">
                 <a:solidFill>
                   <a:srgbClr val="C0392B"/>
                 </a:solidFill>
@@ -13752,6 +13732,7 @@
           <a:lstStyle/>
           <a:p>
             <a:pPr algn="ctr"/>
+            <a:endParaRPr/>
           </a:p>
         </p:txBody>
       </p:sp>
@@ -13855,7 +13836,7 @@
 </file>
 
 <file path=ppt/slides/slide29.xml><?xml version="1.0" encoding="utf-8"?>
-<p:sld xmlns:a="http://schemas.openxmlformats.org/drawingml/2006/main" xmlns:p="http://schemas.openxmlformats.org/presentationml/2006/main" xmlns:r="http://schemas.openxmlformats.org/officeDocument/2006/relationships">
+<p:sld xmlns:a="http://schemas.openxmlformats.org/drawingml/2006/main" xmlns:r="http://schemas.openxmlformats.org/officeDocument/2006/relationships" xmlns:p="http://schemas.openxmlformats.org/presentationml/2006/main">
   <p:cSld>
     <p:spTree>
       <p:nvGrpSpPr>
@@ -13863,7 +13844,14 @@
         <p:cNvGrpSpPr/>
         <p:nvPr/>
       </p:nvGrpSpPr>
-      <p:grpSpPr/>
+      <p:grpSpPr>
+        <a:xfrm>
+          <a:off x="0" y="0"/>
+          <a:ext cx="0" cy="0"/>
+          <a:chOff x="0" y="0"/>
+          <a:chExt cx="0" cy="0"/>
+        </a:xfrm>
+      </p:grpSpPr>
       <p:sp>
         <p:nvSpPr>
           <p:cNvPr id="2" name="Rectangle 1"/>
@@ -13905,6 +13893,7 @@
           <a:lstStyle/>
           <a:p>
             <a:pPr algn="ctr"/>
+            <a:endParaRPr/>
           </a:p>
         </p:txBody>
       </p:sp>
@@ -14111,7 +14100,7 @@
 </file>
 
 <file path=ppt/slides/slide3.xml><?xml version="1.0" encoding="utf-8"?>
-<p:sld xmlns:a="http://schemas.openxmlformats.org/drawingml/2006/main" xmlns:p="http://schemas.openxmlformats.org/presentationml/2006/main" xmlns:r="http://schemas.openxmlformats.org/officeDocument/2006/relationships">
+<p:sld xmlns:a="http://schemas.openxmlformats.org/drawingml/2006/main" xmlns:r="http://schemas.openxmlformats.org/officeDocument/2006/relationships" xmlns:p="http://schemas.openxmlformats.org/presentationml/2006/main">
   <p:cSld>
     <p:spTree>
       <p:nvGrpSpPr>
@@ -14119,7 +14108,14 @@
         <p:cNvGrpSpPr/>
         <p:nvPr/>
       </p:nvGrpSpPr>
-      <p:grpSpPr/>
+      <p:grpSpPr>
+        <a:xfrm>
+          <a:off x="0" y="0"/>
+          <a:ext cx="0" cy="0"/>
+          <a:chOff x="0" y="0"/>
+          <a:chExt cx="0" cy="0"/>
+        </a:xfrm>
+      </p:grpSpPr>
       <p:sp>
         <p:nvSpPr>
           <p:cNvPr id="2" name="Rectangle 1"/>
@@ -14161,6 +14157,7 @@
           <a:lstStyle/>
           <a:p>
             <a:pPr algn="ctr"/>
+            <a:endParaRPr/>
           </a:p>
         </p:txBody>
       </p:sp>
@@ -14367,7 +14364,7 @@
 </file>
 
 <file path=ppt/slides/slide30.xml><?xml version="1.0" encoding="utf-8"?>
-<p:sld xmlns:a="http://schemas.openxmlformats.org/drawingml/2006/main" xmlns:p="http://schemas.openxmlformats.org/presentationml/2006/main" xmlns:r="http://schemas.openxmlformats.org/officeDocument/2006/relationships">
+<p:sld xmlns:a="http://schemas.openxmlformats.org/drawingml/2006/main" xmlns:r="http://schemas.openxmlformats.org/officeDocument/2006/relationships" xmlns:p="http://schemas.openxmlformats.org/presentationml/2006/main">
   <p:cSld>
     <p:spTree>
       <p:nvGrpSpPr>
@@ -14375,7 +14372,14 @@
         <p:cNvGrpSpPr/>
         <p:nvPr/>
       </p:nvGrpSpPr>
-      <p:grpSpPr/>
+      <p:grpSpPr>
+        <a:xfrm>
+          <a:off x="0" y="0"/>
+          <a:ext cx="0" cy="0"/>
+          <a:chOff x="0" y="0"/>
+          <a:chExt cx="0" cy="0"/>
+        </a:xfrm>
+      </p:grpSpPr>
       <p:sp>
         <p:nvSpPr>
           <p:cNvPr id="2" name="Rectangle 1"/>
@@ -14417,6 +14421,7 @@
           <a:lstStyle/>
           <a:p>
             <a:pPr algn="ctr"/>
+            <a:endParaRPr/>
           </a:p>
         </p:txBody>
       </p:sp>
@@ -14606,7 +14611,7 @@
 </file>
 
 <file path=ppt/slides/slide31.xml><?xml version="1.0" encoding="utf-8"?>
-<p:sld xmlns:a="http://schemas.openxmlformats.org/drawingml/2006/main" xmlns:p="http://schemas.openxmlformats.org/presentationml/2006/main" xmlns:r="http://schemas.openxmlformats.org/officeDocument/2006/relationships">
+<p:sld xmlns:a="http://schemas.openxmlformats.org/drawingml/2006/main" xmlns:r="http://schemas.openxmlformats.org/officeDocument/2006/relationships" xmlns:p="http://schemas.openxmlformats.org/presentationml/2006/main">
   <p:cSld>
     <p:spTree>
       <p:nvGrpSpPr>
@@ -14614,7 +14619,14 @@
         <p:cNvGrpSpPr/>
         <p:nvPr/>
       </p:nvGrpSpPr>
-      <p:grpSpPr/>
+      <p:grpSpPr>
+        <a:xfrm>
+          <a:off x="0" y="0"/>
+          <a:ext cx="0" cy="0"/>
+          <a:chOff x="0" y="0"/>
+          <a:chExt cx="0" cy="0"/>
+        </a:xfrm>
+      </p:grpSpPr>
       <p:sp>
         <p:nvSpPr>
           <p:cNvPr id="2" name="Rectangle 1"/>
@@ -14656,6 +14668,7 @@
           <a:lstStyle/>
           <a:p>
             <a:pPr algn="ctr"/>
+            <a:endParaRPr/>
           </a:p>
         </p:txBody>
       </p:sp>
@@ -14862,7 +14875,7 @@
 </file>
 
 <file path=ppt/slides/slide32.xml><?xml version="1.0" encoding="utf-8"?>
-<p:sld xmlns:a="http://schemas.openxmlformats.org/drawingml/2006/main" xmlns:p="http://schemas.openxmlformats.org/presentationml/2006/main" xmlns:r="http://schemas.openxmlformats.org/officeDocument/2006/relationships">
+<p:sld xmlns:a="http://schemas.openxmlformats.org/drawingml/2006/main" xmlns:r="http://schemas.openxmlformats.org/officeDocument/2006/relationships" xmlns:p="http://schemas.openxmlformats.org/presentationml/2006/main">
   <p:cSld>
     <p:spTree>
       <p:nvGrpSpPr>
@@ -14870,7 +14883,14 @@
         <p:cNvGrpSpPr/>
         <p:nvPr/>
       </p:nvGrpSpPr>
-      <p:grpSpPr/>
+      <p:grpSpPr>
+        <a:xfrm>
+          <a:off x="0" y="0"/>
+          <a:ext cx="0" cy="0"/>
+          <a:chOff x="0" y="0"/>
+          <a:chExt cx="0" cy="0"/>
+        </a:xfrm>
+      </p:grpSpPr>
       <p:sp>
         <p:nvSpPr>
           <p:cNvPr id="2" name="Rectangle 1"/>
@@ -14912,6 +14932,7 @@
           <a:lstStyle/>
           <a:p>
             <a:pPr algn="ctr"/>
+            <a:endParaRPr/>
           </a:p>
         </p:txBody>
       </p:sp>
@@ -14991,6 +15012,7 @@
           <a:lstStyle/>
           <a:p>
             <a:pPr algn="ctr"/>
+            <a:endParaRPr/>
           </a:p>
         </p:txBody>
       </p:sp>
@@ -15281,7 +15303,7 @@
 </file>
 
 <file path=ppt/slides/slide33.xml><?xml version="1.0" encoding="utf-8"?>
-<p:sld xmlns:a="http://schemas.openxmlformats.org/drawingml/2006/main" xmlns:p="http://schemas.openxmlformats.org/presentationml/2006/main" xmlns:r="http://schemas.openxmlformats.org/officeDocument/2006/relationships">
+<p:sld xmlns:a="http://schemas.openxmlformats.org/drawingml/2006/main" xmlns:r="http://schemas.openxmlformats.org/officeDocument/2006/relationships" xmlns:p="http://schemas.openxmlformats.org/presentationml/2006/main">
   <p:cSld>
     <p:spTree>
       <p:nvGrpSpPr>
@@ -15289,7 +15311,14 @@
         <p:cNvGrpSpPr/>
         <p:nvPr/>
       </p:nvGrpSpPr>
-      <p:grpSpPr/>
+      <p:grpSpPr>
+        <a:xfrm>
+          <a:off x="0" y="0"/>
+          <a:ext cx="0" cy="0"/>
+          <a:chOff x="0" y="0"/>
+          <a:chExt cx="0" cy="0"/>
+        </a:xfrm>
+      </p:grpSpPr>
       <p:sp>
         <p:nvSpPr>
           <p:cNvPr id="2" name="Rectangle 1"/>
@@ -15331,6 +15360,7 @@
           <a:lstStyle/>
           <a:p>
             <a:pPr algn="ctr"/>
+            <a:endParaRPr/>
           </a:p>
         </p:txBody>
       </p:sp>
@@ -15520,7 +15550,7 @@
 </file>
 
 <file path=ppt/slides/slide34.xml><?xml version="1.0" encoding="utf-8"?>
-<p:sld xmlns:a="http://schemas.openxmlformats.org/drawingml/2006/main" xmlns:p="http://schemas.openxmlformats.org/presentationml/2006/main" xmlns:r="http://schemas.openxmlformats.org/officeDocument/2006/relationships">
+<p:sld xmlns:a="http://schemas.openxmlformats.org/drawingml/2006/main" xmlns:r="http://schemas.openxmlformats.org/officeDocument/2006/relationships" xmlns:p="http://schemas.openxmlformats.org/presentationml/2006/main">
   <p:cSld>
     <p:spTree>
       <p:nvGrpSpPr>
@@ -15528,7 +15558,14 @@
         <p:cNvGrpSpPr/>
         <p:nvPr/>
       </p:nvGrpSpPr>
-      <p:grpSpPr/>
+      <p:grpSpPr>
+        <a:xfrm>
+          <a:off x="0" y="0"/>
+          <a:ext cx="0" cy="0"/>
+          <a:chOff x="0" y="0"/>
+          <a:chExt cx="0" cy="0"/>
+        </a:xfrm>
+      </p:grpSpPr>
       <p:sp>
         <p:nvSpPr>
           <p:cNvPr id="2" name="Rectangle 1"/>
@@ -15570,6 +15607,7 @@
           <a:lstStyle/>
           <a:p>
             <a:pPr algn="ctr"/>
+            <a:endParaRPr/>
           </a:p>
         </p:txBody>
       </p:sp>
@@ -15649,6 +15687,7 @@
           <a:lstStyle/>
           <a:p>
             <a:pPr algn="ctr"/>
+            <a:endParaRPr/>
           </a:p>
         </p:txBody>
       </p:sp>
@@ -15905,7 +15944,7 @@
 </file>
 
 <file path=ppt/slides/slide35.xml><?xml version="1.0" encoding="utf-8"?>
-<p:sld xmlns:a="http://schemas.openxmlformats.org/drawingml/2006/main" xmlns:p="http://schemas.openxmlformats.org/presentationml/2006/main" xmlns:r="http://schemas.openxmlformats.org/officeDocument/2006/relationships">
+<p:sld xmlns:a="http://schemas.openxmlformats.org/drawingml/2006/main" xmlns:r="http://schemas.openxmlformats.org/officeDocument/2006/relationships" xmlns:p="http://schemas.openxmlformats.org/presentationml/2006/main">
   <p:cSld>
     <p:spTree>
       <p:nvGrpSpPr>
@@ -15913,7 +15952,14 @@
         <p:cNvGrpSpPr/>
         <p:nvPr/>
       </p:nvGrpSpPr>
-      <p:grpSpPr/>
+      <p:grpSpPr>
+        <a:xfrm>
+          <a:off x="0" y="0"/>
+          <a:ext cx="0" cy="0"/>
+          <a:chOff x="0" y="0"/>
+          <a:chExt cx="0" cy="0"/>
+        </a:xfrm>
+      </p:grpSpPr>
       <p:sp>
         <p:nvSpPr>
           <p:cNvPr id="2" name="Rectangle 1"/>
@@ -15955,6 +16001,7 @@
           <a:lstStyle/>
           <a:p>
             <a:pPr algn="ctr"/>
+            <a:endParaRPr/>
           </a:p>
         </p:txBody>
       </p:sp>
@@ -16034,6 +16081,7 @@
           <a:lstStyle/>
           <a:p>
             <a:pPr algn="ctr"/>
+            <a:endParaRPr/>
           </a:p>
         </p:txBody>
       </p:sp>
@@ -16217,16 +16265,13 @@
                 <a:spcPts val="0"/>
               </a:spcAft>
             </a:pPr>
-            <a:r>
-              <a:rPr sz="1250" b="0">
-                <a:solidFill>
-                  <a:srgbClr val="E6E6E6"/>
-                </a:solidFill>
-                <a:latin typeface="Consolas"/>
-                <a:ea typeface="Consolas"/>
-              </a:rPr>
-              <a:t/>
-            </a:r>
+            <a:endParaRPr sz="1250" b="0">
+              <a:solidFill>
+                <a:srgbClr val="E6E6E6"/>
+              </a:solidFill>
+              <a:latin typeface="Consolas"/>
+              <a:ea typeface="Consolas"/>
+            </a:endParaRPr>
           </a:p>
           <a:p>
             <a:pPr>
@@ -16290,7 +16335,7 @@
 </file>
 
 <file path=ppt/slides/slide36.xml><?xml version="1.0" encoding="utf-8"?>
-<p:sld xmlns:a="http://schemas.openxmlformats.org/drawingml/2006/main" xmlns:p="http://schemas.openxmlformats.org/presentationml/2006/main" xmlns:r="http://schemas.openxmlformats.org/officeDocument/2006/relationships">
+<p:sld xmlns:a="http://schemas.openxmlformats.org/drawingml/2006/main" xmlns:r="http://schemas.openxmlformats.org/officeDocument/2006/relationships" xmlns:p="http://schemas.openxmlformats.org/presentationml/2006/main">
   <p:cSld>
     <p:spTree>
       <p:nvGrpSpPr>
@@ -16298,7 +16343,14 @@
         <p:cNvGrpSpPr/>
         <p:nvPr/>
       </p:nvGrpSpPr>
-      <p:grpSpPr/>
+      <p:grpSpPr>
+        <a:xfrm>
+          <a:off x="0" y="0"/>
+          <a:ext cx="0" cy="0"/>
+          <a:chOff x="0" y="0"/>
+          <a:chExt cx="0" cy="0"/>
+        </a:xfrm>
+      </p:grpSpPr>
       <p:sp>
         <p:nvSpPr>
           <p:cNvPr id="2" name="Rectangle 1"/>
@@ -16340,6 +16392,7 @@
           <a:lstStyle/>
           <a:p>
             <a:pPr algn="ctr"/>
+            <a:endParaRPr/>
           </a:p>
         </p:txBody>
       </p:sp>
@@ -16546,7 +16599,7 @@
 </file>
 
 <file path=ppt/slides/slide37.xml><?xml version="1.0" encoding="utf-8"?>
-<p:sld xmlns:a="http://schemas.openxmlformats.org/drawingml/2006/main" xmlns:p="http://schemas.openxmlformats.org/presentationml/2006/main" xmlns:r="http://schemas.openxmlformats.org/officeDocument/2006/relationships">
+<p:sld xmlns:a="http://schemas.openxmlformats.org/drawingml/2006/main" xmlns:r="http://schemas.openxmlformats.org/officeDocument/2006/relationships" xmlns:p="http://schemas.openxmlformats.org/presentationml/2006/main">
   <p:cSld>
     <p:spTree>
       <p:nvGrpSpPr>
@@ -16554,7 +16607,14 @@
         <p:cNvGrpSpPr/>
         <p:nvPr/>
       </p:nvGrpSpPr>
-      <p:grpSpPr/>
+      <p:grpSpPr>
+        <a:xfrm>
+          <a:off x="0" y="0"/>
+          <a:ext cx="0" cy="0"/>
+          <a:chOff x="0" y="0"/>
+          <a:chExt cx="0" cy="0"/>
+        </a:xfrm>
+      </p:grpSpPr>
       <p:sp>
         <p:nvSpPr>
           <p:cNvPr id="2" name="Rectangle 1"/>
@@ -16596,6 +16656,7 @@
           <a:lstStyle/>
           <a:p>
             <a:pPr algn="ctr"/>
+            <a:endParaRPr/>
           </a:p>
         </p:txBody>
       </p:sp>
@@ -16675,6 +16736,7 @@
           <a:lstStyle/>
           <a:p>
             <a:pPr algn="ctr"/>
+            <a:endParaRPr/>
           </a:p>
         </p:txBody>
       </p:sp>
@@ -16965,7 +17027,7 @@
 </file>
 
 <file path=ppt/slides/slide38.xml><?xml version="1.0" encoding="utf-8"?>
-<p:sld xmlns:a="http://schemas.openxmlformats.org/drawingml/2006/main" xmlns:p="http://schemas.openxmlformats.org/presentationml/2006/main" xmlns:r="http://schemas.openxmlformats.org/officeDocument/2006/relationships">
+<p:sld xmlns:a="http://schemas.openxmlformats.org/drawingml/2006/main" xmlns:r="http://schemas.openxmlformats.org/officeDocument/2006/relationships" xmlns:p="http://schemas.openxmlformats.org/presentationml/2006/main">
   <p:cSld>
     <p:spTree>
       <p:nvGrpSpPr>
@@ -16973,7 +17035,14 @@
         <p:cNvGrpSpPr/>
         <p:nvPr/>
       </p:nvGrpSpPr>
-      <p:grpSpPr/>
+      <p:grpSpPr>
+        <a:xfrm>
+          <a:off x="0" y="0"/>
+          <a:ext cx="0" cy="0"/>
+          <a:chOff x="0" y="0"/>
+          <a:chExt cx="0" cy="0"/>
+        </a:xfrm>
+      </p:grpSpPr>
       <p:sp>
         <p:nvSpPr>
           <p:cNvPr id="2" name="Rectangle 1"/>
@@ -17015,6 +17084,7 @@
           <a:lstStyle/>
           <a:p>
             <a:pPr algn="ctr"/>
+            <a:endParaRPr/>
           </a:p>
         </p:txBody>
       </p:sp>
@@ -17094,6 +17164,7 @@
           <a:lstStyle/>
           <a:p>
             <a:pPr algn="ctr"/>
+            <a:endParaRPr/>
           </a:p>
         </p:txBody>
       </p:sp>
@@ -17384,7 +17455,7 @@
 </file>
 
 <file path=ppt/slides/slide39.xml><?xml version="1.0" encoding="utf-8"?>
-<p:sld xmlns:a="http://schemas.openxmlformats.org/drawingml/2006/main" xmlns:p="http://schemas.openxmlformats.org/presentationml/2006/main" xmlns:r="http://schemas.openxmlformats.org/officeDocument/2006/relationships">
+<p:sld xmlns:a="http://schemas.openxmlformats.org/drawingml/2006/main" xmlns:r="http://schemas.openxmlformats.org/officeDocument/2006/relationships" xmlns:p="http://schemas.openxmlformats.org/presentationml/2006/main">
   <p:cSld>
     <p:spTree>
       <p:nvGrpSpPr>
@@ -17392,7 +17463,14 @@
         <p:cNvGrpSpPr/>
         <p:nvPr/>
       </p:nvGrpSpPr>
-      <p:grpSpPr/>
+      <p:grpSpPr>
+        <a:xfrm>
+          <a:off x="0" y="0"/>
+          <a:ext cx="0" cy="0"/>
+          <a:chOff x="0" y="0"/>
+          <a:chExt cx="0" cy="0"/>
+        </a:xfrm>
+      </p:grpSpPr>
       <p:sp>
         <p:nvSpPr>
           <p:cNvPr id="2" name="Rectangle 1"/>
@@ -17434,6 +17512,7 @@
           <a:lstStyle/>
           <a:p>
             <a:pPr algn="ctr"/>
+            <a:endParaRPr/>
           </a:p>
         </p:txBody>
       </p:sp>
@@ -17513,6 +17592,7 @@
           <a:lstStyle/>
           <a:p>
             <a:pPr algn="ctr"/>
+            <a:endParaRPr/>
           </a:p>
         </p:txBody>
       </p:sp>
@@ -17713,16 +17793,13 @@
                 <a:spcPts val="0"/>
               </a:spcAft>
             </a:pPr>
-            <a:r>
-              <a:rPr sz="1250" b="0">
-                <a:solidFill>
-                  <a:srgbClr val="E6E6E6"/>
-                </a:solidFill>
-                <a:latin typeface="Consolas"/>
-                <a:ea typeface="Consolas"/>
-              </a:rPr>
-              <a:t/>
-            </a:r>
+            <a:endParaRPr sz="1250" b="0">
+              <a:solidFill>
+                <a:srgbClr val="E6E6E6"/>
+              </a:solidFill>
+              <a:latin typeface="Consolas"/>
+              <a:ea typeface="Consolas"/>
+            </a:endParaRPr>
           </a:p>
           <a:p>
             <a:pPr>
@@ -17769,7 +17846,7 @@
 </file>
 
 <file path=ppt/slides/slide4.xml><?xml version="1.0" encoding="utf-8"?>
-<p:sld xmlns:a="http://schemas.openxmlformats.org/drawingml/2006/main" xmlns:p="http://schemas.openxmlformats.org/presentationml/2006/main" xmlns:r="http://schemas.openxmlformats.org/officeDocument/2006/relationships">
+<p:sld xmlns:a="http://schemas.openxmlformats.org/drawingml/2006/main" xmlns:r="http://schemas.openxmlformats.org/officeDocument/2006/relationships" xmlns:p="http://schemas.openxmlformats.org/presentationml/2006/main">
   <p:cSld>
     <p:bg>
       <p:bgPr>
@@ -17785,7 +17862,14 @@
         <p:cNvGrpSpPr/>
         <p:nvPr/>
       </p:nvGrpSpPr>
-      <p:grpSpPr/>
+      <p:grpSpPr>
+        <a:xfrm>
+          <a:off x="0" y="0"/>
+          <a:ext cx="0" cy="0"/>
+          <a:chOff x="0" y="0"/>
+          <a:chExt cx="0" cy="0"/>
+        </a:xfrm>
+      </p:grpSpPr>
       <p:sp>
         <p:nvSpPr>
           <p:cNvPr id="2" name="TextBox 1"/>
@@ -17794,8 +17878,8 @@
         </p:nvSpPr>
         <p:spPr>
           <a:xfrm>
-            <a:off x="822960" y="1371600"/>
-            <a:ext cx="2743200" cy="1371600"/>
+            <a:off x="822959" y="1371600"/>
+            <a:ext cx="4026131" cy="1107996"/>
           </a:xfrm>
           <a:prstGeom prst="rect">
             <a:avLst/>
@@ -17809,7 +17893,7 @@
           <a:lstStyle/>
           <a:p>
             <a:r>
-              <a:rPr sz="6600" b="1">
+              <a:rPr sz="6600" b="1" dirty="0">
                 <a:solidFill>
                   <a:srgbClr val="C0392B"/>
                 </a:solidFill>
@@ -17897,6 +17981,7 @@
           <a:lstStyle/>
           <a:p>
             <a:pPr algn="ctr"/>
+            <a:endParaRPr/>
           </a:p>
         </p:txBody>
       </p:sp>
@@ -18000,7 +18085,7 @@
 </file>
 
 <file path=ppt/slides/slide40.xml><?xml version="1.0" encoding="utf-8"?>
-<p:sld xmlns:a="http://schemas.openxmlformats.org/drawingml/2006/main" xmlns:p="http://schemas.openxmlformats.org/presentationml/2006/main" xmlns:r="http://schemas.openxmlformats.org/officeDocument/2006/relationships">
+<p:sld xmlns:a="http://schemas.openxmlformats.org/drawingml/2006/main" xmlns:r="http://schemas.openxmlformats.org/officeDocument/2006/relationships" xmlns:p="http://schemas.openxmlformats.org/presentationml/2006/main">
   <p:cSld>
     <p:spTree>
       <p:nvGrpSpPr>
@@ -18008,7 +18093,14 @@
         <p:cNvGrpSpPr/>
         <p:nvPr/>
       </p:nvGrpSpPr>
-      <p:grpSpPr/>
+      <p:grpSpPr>
+        <a:xfrm>
+          <a:off x="0" y="0"/>
+          <a:ext cx="0" cy="0"/>
+          <a:chOff x="0" y="0"/>
+          <a:chExt cx="0" cy="0"/>
+        </a:xfrm>
+      </p:grpSpPr>
       <p:sp>
         <p:nvSpPr>
           <p:cNvPr id="2" name="Rectangle 1"/>
@@ -18050,6 +18142,7 @@
           <a:lstStyle/>
           <a:p>
             <a:pPr algn="ctr"/>
+            <a:endParaRPr/>
           </a:p>
         </p:txBody>
       </p:sp>
@@ -18256,7 +18349,7 @@
 </file>
 
 <file path=ppt/slides/slide41.xml><?xml version="1.0" encoding="utf-8"?>
-<p:sld xmlns:a="http://schemas.openxmlformats.org/drawingml/2006/main" xmlns:p="http://schemas.openxmlformats.org/presentationml/2006/main" xmlns:r="http://schemas.openxmlformats.org/officeDocument/2006/relationships">
+<p:sld xmlns:a="http://schemas.openxmlformats.org/drawingml/2006/main" xmlns:r="http://schemas.openxmlformats.org/officeDocument/2006/relationships" xmlns:p="http://schemas.openxmlformats.org/presentationml/2006/main">
   <p:cSld>
     <p:spTree>
       <p:nvGrpSpPr>
@@ -18264,7 +18357,14 @@
         <p:cNvGrpSpPr/>
         <p:nvPr/>
       </p:nvGrpSpPr>
-      <p:grpSpPr/>
+      <p:grpSpPr>
+        <a:xfrm>
+          <a:off x="0" y="0"/>
+          <a:ext cx="0" cy="0"/>
+          <a:chOff x="0" y="0"/>
+          <a:chExt cx="0" cy="0"/>
+        </a:xfrm>
+      </p:grpSpPr>
       <p:sp>
         <p:nvSpPr>
           <p:cNvPr id="2" name="Rectangle 1"/>
@@ -18306,6 +18406,7 @@
           <a:lstStyle/>
           <a:p>
             <a:pPr algn="ctr"/>
+            <a:endParaRPr/>
           </a:p>
         </p:txBody>
       </p:sp>
@@ -18385,6 +18486,7 @@
           <a:lstStyle/>
           <a:p>
             <a:pPr algn="ctr"/>
+            <a:endParaRPr/>
           </a:p>
         </p:txBody>
       </p:sp>
@@ -18743,7 +18845,7 @@
 </file>
 
 <file path=ppt/slides/slide42.xml><?xml version="1.0" encoding="utf-8"?>
-<p:sld xmlns:a="http://schemas.openxmlformats.org/drawingml/2006/main" xmlns:p="http://schemas.openxmlformats.org/presentationml/2006/main" xmlns:r="http://schemas.openxmlformats.org/officeDocument/2006/relationships">
+<p:sld xmlns:a="http://schemas.openxmlformats.org/drawingml/2006/main" xmlns:r="http://schemas.openxmlformats.org/officeDocument/2006/relationships" xmlns:p="http://schemas.openxmlformats.org/presentationml/2006/main">
   <p:cSld>
     <p:bg>
       <p:bgPr>
@@ -18759,7 +18861,14 @@
         <p:cNvGrpSpPr/>
         <p:nvPr/>
       </p:nvGrpSpPr>
-      <p:grpSpPr/>
+      <p:grpSpPr>
+        <a:xfrm>
+          <a:off x="0" y="0"/>
+          <a:ext cx="0" cy="0"/>
+          <a:chOff x="0" y="0"/>
+          <a:chExt cx="0" cy="0"/>
+        </a:xfrm>
+      </p:grpSpPr>
       <p:sp>
         <p:nvSpPr>
           <p:cNvPr id="2" name="TextBox 1"/>
@@ -18769,7 +18878,7 @@
         <p:spPr>
           <a:xfrm>
             <a:off x="822960" y="1371600"/>
-            <a:ext cx="2743200" cy="1371600"/>
+            <a:ext cx="5383876" cy="1107996"/>
           </a:xfrm>
           <a:prstGeom prst="rect">
             <a:avLst/>
@@ -18783,7 +18892,7 @@
           <a:lstStyle/>
           <a:p>
             <a:r>
-              <a:rPr sz="6600" b="1">
+              <a:rPr sz="6600" b="1" dirty="0">
                 <a:solidFill>
                   <a:srgbClr val="C0392B"/>
                 </a:solidFill>
@@ -18871,6 +18980,7 @@
           <a:lstStyle/>
           <a:p>
             <a:pPr algn="ctr"/>
+            <a:endParaRPr/>
           </a:p>
         </p:txBody>
       </p:sp>
@@ -18974,7 +19084,7 @@
 </file>
 
 <file path=ppt/slides/slide43.xml><?xml version="1.0" encoding="utf-8"?>
-<p:sld xmlns:a="http://schemas.openxmlformats.org/drawingml/2006/main" xmlns:p="http://schemas.openxmlformats.org/presentationml/2006/main" xmlns:r="http://schemas.openxmlformats.org/officeDocument/2006/relationships">
+<p:sld xmlns:a="http://schemas.openxmlformats.org/drawingml/2006/main" xmlns:r="http://schemas.openxmlformats.org/officeDocument/2006/relationships" xmlns:p="http://schemas.openxmlformats.org/presentationml/2006/main">
   <p:cSld>
     <p:spTree>
       <p:nvGrpSpPr>
@@ -18982,7 +19092,14 @@
         <p:cNvGrpSpPr/>
         <p:nvPr/>
       </p:nvGrpSpPr>
-      <p:grpSpPr/>
+      <p:grpSpPr>
+        <a:xfrm>
+          <a:off x="0" y="0"/>
+          <a:ext cx="0" cy="0"/>
+          <a:chOff x="0" y="0"/>
+          <a:chExt cx="0" cy="0"/>
+        </a:xfrm>
+      </p:grpSpPr>
       <p:sp>
         <p:nvSpPr>
           <p:cNvPr id="2" name="Rectangle 1"/>
@@ -19024,6 +19141,7 @@
           <a:lstStyle/>
           <a:p>
             <a:pPr algn="ctr"/>
+            <a:endParaRPr/>
           </a:p>
         </p:txBody>
       </p:sp>
@@ -19213,7 +19331,7 @@
 </file>
 
 <file path=ppt/slides/slide44.xml><?xml version="1.0" encoding="utf-8"?>
-<p:sld xmlns:a="http://schemas.openxmlformats.org/drawingml/2006/main" xmlns:p="http://schemas.openxmlformats.org/presentationml/2006/main" xmlns:r="http://schemas.openxmlformats.org/officeDocument/2006/relationships">
+<p:sld xmlns:a="http://schemas.openxmlformats.org/drawingml/2006/main" xmlns:r="http://schemas.openxmlformats.org/officeDocument/2006/relationships" xmlns:p="http://schemas.openxmlformats.org/presentationml/2006/main">
   <p:cSld>
     <p:spTree>
       <p:nvGrpSpPr>
@@ -19221,7 +19339,14 @@
         <p:cNvGrpSpPr/>
         <p:nvPr/>
       </p:nvGrpSpPr>
-      <p:grpSpPr/>
+      <p:grpSpPr>
+        <a:xfrm>
+          <a:off x="0" y="0"/>
+          <a:ext cx="0" cy="0"/>
+          <a:chOff x="0" y="0"/>
+          <a:chExt cx="0" cy="0"/>
+        </a:xfrm>
+      </p:grpSpPr>
       <p:sp>
         <p:nvSpPr>
           <p:cNvPr id="2" name="Rectangle 1"/>
@@ -19263,6 +19388,7 @@
           <a:lstStyle/>
           <a:p>
             <a:pPr algn="ctr"/>
+            <a:endParaRPr/>
           </a:p>
         </p:txBody>
       </p:sp>
@@ -19342,6 +19468,7 @@
           <a:lstStyle/>
           <a:p>
             <a:pPr algn="ctr"/>
+            <a:endParaRPr/>
           </a:p>
         </p:txBody>
       </p:sp>
@@ -19542,16 +19669,13 @@
                 <a:spcPts val="0"/>
               </a:spcAft>
             </a:pPr>
-            <a:r>
-              <a:rPr sz="1250" b="0">
-                <a:solidFill>
-                  <a:srgbClr val="E6E6E6"/>
-                </a:solidFill>
-                <a:latin typeface="Consolas"/>
-                <a:ea typeface="Consolas"/>
-              </a:rPr>
-              <a:t/>
-            </a:r>
+            <a:endParaRPr sz="1250" b="0">
+              <a:solidFill>
+                <a:srgbClr val="9CDCFE"/>
+              </a:solidFill>
+              <a:latin typeface="Consolas"/>
+              <a:ea typeface="Consolas"/>
+            </a:endParaRPr>
           </a:p>
           <a:p>
             <a:pPr>
@@ -19666,7 +19790,7 @@
 </file>
 
 <file path=ppt/slides/slide45.xml><?xml version="1.0" encoding="utf-8"?>
-<p:sld xmlns:a="http://schemas.openxmlformats.org/drawingml/2006/main" xmlns:p="http://schemas.openxmlformats.org/presentationml/2006/main" xmlns:r="http://schemas.openxmlformats.org/officeDocument/2006/relationships">
+<p:sld xmlns:a="http://schemas.openxmlformats.org/drawingml/2006/main" xmlns:r="http://schemas.openxmlformats.org/officeDocument/2006/relationships" xmlns:p="http://schemas.openxmlformats.org/presentationml/2006/main">
   <p:cSld>
     <p:spTree>
       <p:nvGrpSpPr>
@@ -19674,7 +19798,14 @@
         <p:cNvGrpSpPr/>
         <p:nvPr/>
       </p:nvGrpSpPr>
-      <p:grpSpPr/>
+      <p:grpSpPr>
+        <a:xfrm>
+          <a:off x="0" y="0"/>
+          <a:ext cx="0" cy="0"/>
+          <a:chOff x="0" y="0"/>
+          <a:chExt cx="0" cy="0"/>
+        </a:xfrm>
+      </p:grpSpPr>
       <p:sp>
         <p:nvSpPr>
           <p:cNvPr id="2" name="Rectangle 1"/>
@@ -19716,6 +19847,7 @@
           <a:lstStyle/>
           <a:p>
             <a:pPr algn="ctr"/>
+            <a:endParaRPr/>
           </a:p>
         </p:txBody>
       </p:sp>
@@ -19922,7 +20054,7 @@
 </file>
 
 <file path=ppt/slides/slide46.xml><?xml version="1.0" encoding="utf-8"?>
-<p:sld xmlns:a="http://schemas.openxmlformats.org/drawingml/2006/main" xmlns:p="http://schemas.openxmlformats.org/presentationml/2006/main" xmlns:r="http://schemas.openxmlformats.org/officeDocument/2006/relationships">
+<p:sld xmlns:a="http://schemas.openxmlformats.org/drawingml/2006/main" xmlns:r="http://schemas.openxmlformats.org/officeDocument/2006/relationships" xmlns:p="http://schemas.openxmlformats.org/presentationml/2006/main">
   <p:cSld>
     <p:spTree>
       <p:nvGrpSpPr>
@@ -19930,7 +20062,14 @@
         <p:cNvGrpSpPr/>
         <p:nvPr/>
       </p:nvGrpSpPr>
-      <p:grpSpPr/>
+      <p:grpSpPr>
+        <a:xfrm>
+          <a:off x="0" y="0"/>
+          <a:ext cx="0" cy="0"/>
+          <a:chOff x="0" y="0"/>
+          <a:chExt cx="0" cy="0"/>
+        </a:xfrm>
+      </p:grpSpPr>
       <p:sp>
         <p:nvSpPr>
           <p:cNvPr id="2" name="Rectangle 1"/>
@@ -19972,6 +20111,7 @@
           <a:lstStyle/>
           <a:p>
             <a:pPr algn="ctr"/>
+            <a:endParaRPr/>
           </a:p>
         </p:txBody>
       </p:sp>
@@ -20051,6 +20191,7 @@
           <a:lstStyle/>
           <a:p>
             <a:pPr algn="ctr"/>
+            <a:endParaRPr/>
           </a:p>
         </p:txBody>
       </p:sp>
@@ -20149,6 +20290,20 @@
                 <a:spcPts val="0"/>
               </a:spcAft>
             </a:pPr>
+            <a:endParaRPr sz="1250" b="0">
+              <a:solidFill>
+                <a:srgbClr val="E6E6E6"/>
+              </a:solidFill>
+              <a:latin typeface="Consolas"/>
+              <a:ea typeface="Consolas"/>
+            </a:endParaRPr>
+          </a:p>
+          <a:p>
+            <a:pPr>
+              <a:spcAft>
+                <a:spcPts val="0"/>
+              </a:spcAft>
+            </a:pPr>
             <a:r>
               <a:rPr sz="1250" b="0">
                 <a:solidFill>
@@ -20157,23 +20312,6 @@
                 <a:latin typeface="Consolas"/>
                 <a:ea typeface="Consolas"/>
               </a:rPr>
-              <a:t/>
-            </a:r>
-          </a:p>
-          <a:p>
-            <a:pPr>
-              <a:spcAft>
-                <a:spcPts val="0"/>
-              </a:spcAft>
-            </a:pPr>
-            <a:r>
-              <a:rPr sz="1250" b="0">
-                <a:solidFill>
-                  <a:srgbClr val="E6E6E6"/>
-                </a:solidFill>
-                <a:latin typeface="Consolas"/>
-                <a:ea typeface="Consolas"/>
-              </a:rPr>
               <a:t>SQL&gt; UPDATE emp_dept_v SET department_name='연구소' WHERE employee_id=103;</a:t>
             </a:r>
           </a:p>
@@ -20200,16 +20338,13 @@
                 <a:spcPts val="0"/>
               </a:spcAft>
             </a:pPr>
-            <a:r>
-              <a:rPr sz="1250" b="0">
-                <a:solidFill>
-                  <a:srgbClr val="E6E6E6"/>
-                </a:solidFill>
-                <a:latin typeface="Consolas"/>
-                <a:ea typeface="Consolas"/>
-              </a:rPr>
-              <a:t/>
-            </a:r>
+            <a:endParaRPr sz="1250" b="0">
+              <a:solidFill>
+                <a:srgbClr val="F08A8A"/>
+              </a:solidFill>
+              <a:latin typeface="Consolas"/>
+              <a:ea typeface="Consolas"/>
+            </a:endParaRPr>
           </a:p>
           <a:p>
             <a:pPr>
@@ -20443,7 +20578,7 @@
 </file>
 
 <file path=ppt/slides/slide47.xml><?xml version="1.0" encoding="utf-8"?>
-<p:sld xmlns:a="http://schemas.openxmlformats.org/drawingml/2006/main" xmlns:p="http://schemas.openxmlformats.org/presentationml/2006/main" xmlns:r="http://schemas.openxmlformats.org/officeDocument/2006/relationships">
+<p:sld xmlns:a="http://schemas.openxmlformats.org/drawingml/2006/main" xmlns:r="http://schemas.openxmlformats.org/officeDocument/2006/relationships" xmlns:p="http://schemas.openxmlformats.org/presentationml/2006/main">
   <p:cSld>
     <p:spTree>
       <p:nvGrpSpPr>
@@ -20451,7 +20586,14 @@
         <p:cNvGrpSpPr/>
         <p:nvPr/>
       </p:nvGrpSpPr>
-      <p:grpSpPr/>
+      <p:grpSpPr>
+        <a:xfrm>
+          <a:off x="0" y="0"/>
+          <a:ext cx="0" cy="0"/>
+          <a:chOff x="0" y="0"/>
+          <a:chExt cx="0" cy="0"/>
+        </a:xfrm>
+      </p:grpSpPr>
       <p:sp>
         <p:nvSpPr>
           <p:cNvPr id="2" name="Rectangle 1"/>
@@ -20493,6 +20635,7 @@
           <a:lstStyle/>
           <a:p>
             <a:pPr algn="ctr"/>
+            <a:endParaRPr/>
           </a:p>
         </p:txBody>
       </p:sp>
@@ -20699,7 +20842,7 @@
 </file>
 
 <file path=ppt/slides/slide48.xml><?xml version="1.0" encoding="utf-8"?>
-<p:sld xmlns:a="http://schemas.openxmlformats.org/drawingml/2006/main" xmlns:p="http://schemas.openxmlformats.org/presentationml/2006/main" xmlns:r="http://schemas.openxmlformats.org/officeDocument/2006/relationships">
+<p:sld xmlns:a="http://schemas.openxmlformats.org/drawingml/2006/main" xmlns:r="http://schemas.openxmlformats.org/officeDocument/2006/relationships" xmlns:p="http://schemas.openxmlformats.org/presentationml/2006/main">
   <p:cSld>
     <p:spTree>
       <p:nvGrpSpPr>
@@ -20707,7 +20850,14 @@
         <p:cNvGrpSpPr/>
         <p:nvPr/>
       </p:nvGrpSpPr>
-      <p:grpSpPr/>
+      <p:grpSpPr>
+        <a:xfrm>
+          <a:off x="0" y="0"/>
+          <a:ext cx="0" cy="0"/>
+          <a:chOff x="0" y="0"/>
+          <a:chExt cx="0" cy="0"/>
+        </a:xfrm>
+      </p:grpSpPr>
       <p:sp>
         <p:nvSpPr>
           <p:cNvPr id="2" name="Rectangle 1"/>
@@ -20749,6 +20899,7 @@
           <a:lstStyle/>
           <a:p>
             <a:pPr algn="ctr"/>
+            <a:endParaRPr/>
           </a:p>
         </p:txBody>
       </p:sp>
@@ -20828,6 +20979,7 @@
           <a:lstStyle/>
           <a:p>
             <a:pPr algn="ctr"/>
+            <a:endParaRPr/>
           </a:p>
         </p:txBody>
       </p:sp>
@@ -20909,6 +21061,20 @@
                 <a:spcPts val="0"/>
               </a:spcAft>
             </a:pPr>
+            <a:endParaRPr sz="1250" b="0">
+              <a:solidFill>
+                <a:srgbClr val="E6E6E6"/>
+              </a:solidFill>
+              <a:latin typeface="Consolas"/>
+              <a:ea typeface="Consolas"/>
+            </a:endParaRPr>
+          </a:p>
+          <a:p>
+            <a:pPr>
+              <a:spcAft>
+                <a:spcPts val="0"/>
+              </a:spcAft>
+            </a:pPr>
             <a:r>
               <a:rPr sz="1250" b="0">
                 <a:solidFill>
@@ -20917,7 +21083,7 @@
                 <a:latin typeface="Consolas"/>
                 <a:ea typeface="Consolas"/>
               </a:rPr>
-              <a:t/>
+              <a:t>   TYPE t_dept_list IS TABLE OF NUMBER INDEX BY PLS_INTEGER;</a:t>
             </a:r>
           </a:p>
           <a:p>
@@ -20934,8 +21100,22 @@
                 <a:latin typeface="Consolas"/>
                 <a:ea typeface="Consolas"/>
               </a:rPr>
-              <a:t>   TYPE t_dept_list IS TABLE OF NUMBER INDEX BY PLS_INTEGER;</a:t>
-            </a:r>
+              <a:t>   g_depts t_dept_list;   g_idx PLS_INTEGER := 0;   -- 네 지점이 공유</a:t>
+            </a:r>
+          </a:p>
+          <a:p>
+            <a:pPr>
+              <a:spcAft>
+                <a:spcPts val="0"/>
+              </a:spcAft>
+            </a:pPr>
+            <a:endParaRPr sz="1250" b="0">
+              <a:solidFill>
+                <a:srgbClr val="E6E6E6"/>
+              </a:solidFill>
+              <a:latin typeface="Consolas"/>
+              <a:ea typeface="Consolas"/>
+            </a:endParaRPr>
           </a:p>
           <a:p>
             <a:pPr>
@@ -20951,7 +21131,7 @@
                 <a:latin typeface="Consolas"/>
                 <a:ea typeface="Consolas"/>
               </a:rPr>
-              <a:t>   g_depts t_dept_list;   g_idx PLS_INTEGER := 0;   -- 네 지점이 공유</a:t>
+              <a:t>   BEFORE STATEMENT IS</a:t>
             </a:r>
           </a:p>
           <a:p>
@@ -20968,8 +21148,22 @@
                 <a:latin typeface="Consolas"/>
                 <a:ea typeface="Consolas"/>
               </a:rPr>
-              <a:t/>
-            </a:r>
+              <a:t>   BEGIN g_depts.DELETE; g_idx := 0; END BEFORE STATEMENT;</a:t>
+            </a:r>
+          </a:p>
+          <a:p>
+            <a:pPr>
+              <a:spcAft>
+                <a:spcPts val="0"/>
+              </a:spcAft>
+            </a:pPr>
+            <a:endParaRPr sz="1250" b="0">
+              <a:solidFill>
+                <a:srgbClr val="E6E6E6"/>
+              </a:solidFill>
+              <a:latin typeface="Consolas"/>
+              <a:ea typeface="Consolas"/>
+            </a:endParaRPr>
           </a:p>
           <a:p>
             <a:pPr>
@@ -20985,7 +21179,7 @@
                 <a:latin typeface="Consolas"/>
                 <a:ea typeface="Consolas"/>
               </a:rPr>
-              <a:t>   BEFORE STATEMENT IS</a:t>
+              <a:t>   AFTER EACH ROW IS</a:t>
             </a:r>
           </a:p>
           <a:p>
@@ -21002,7 +21196,7 @@
                 <a:latin typeface="Consolas"/>
                 <a:ea typeface="Consolas"/>
               </a:rPr>
-              <a:t>   BEGIN g_depts.DELETE; g_idx := 0; END BEFORE STATEMENT;</a:t>
+              <a:t>   BEGIN                            -- 행 시점에는 조회하지 않고 수집만</a:t>
             </a:r>
           </a:p>
           <a:p>
@@ -21019,7 +21213,7 @@
                 <a:latin typeface="Consolas"/>
                 <a:ea typeface="Consolas"/>
               </a:rPr>
-              <a:t/>
+              <a:t>      g_idx := g_idx + 1;  g_depts(g_idx) := :NEW.department_id;</a:t>
             </a:r>
           </a:p>
           <a:p>
@@ -21036,57 +21230,6 @@
                 <a:latin typeface="Consolas"/>
                 <a:ea typeface="Consolas"/>
               </a:rPr>
-              <a:t>   AFTER EACH ROW IS</a:t>
-            </a:r>
-          </a:p>
-          <a:p>
-            <a:pPr>
-              <a:spcAft>
-                <a:spcPts val="0"/>
-              </a:spcAft>
-            </a:pPr>
-            <a:r>
-              <a:rPr sz="1250" b="0">
-                <a:solidFill>
-                  <a:srgbClr val="E6E6E6"/>
-                </a:solidFill>
-                <a:latin typeface="Consolas"/>
-                <a:ea typeface="Consolas"/>
-              </a:rPr>
-              <a:t>   BEGIN                            -- 행 시점에는 조회하지 않고 수집만</a:t>
-            </a:r>
-          </a:p>
-          <a:p>
-            <a:pPr>
-              <a:spcAft>
-                <a:spcPts val="0"/>
-              </a:spcAft>
-            </a:pPr>
-            <a:r>
-              <a:rPr sz="1250" b="0">
-                <a:solidFill>
-                  <a:srgbClr val="E6E6E6"/>
-                </a:solidFill>
-                <a:latin typeface="Consolas"/>
-                <a:ea typeface="Consolas"/>
-              </a:rPr>
-              <a:t>      g_idx := g_idx + 1;  g_depts(g_idx) := :NEW.department_id;</a:t>
-            </a:r>
-          </a:p>
-          <a:p>
-            <a:pPr>
-              <a:spcAft>
-                <a:spcPts val="0"/>
-              </a:spcAft>
-            </a:pPr>
-            <a:r>
-              <a:rPr sz="1250" b="0">
-                <a:solidFill>
-                  <a:srgbClr val="E6E6E6"/>
-                </a:solidFill>
-                <a:latin typeface="Consolas"/>
-                <a:ea typeface="Consolas"/>
-              </a:rPr>
               <a:t>   END AFTER EACH ROW;</a:t>
             </a:r>
           </a:p>
@@ -21096,16 +21239,13 @@
                 <a:spcPts val="0"/>
               </a:spcAft>
             </a:pPr>
-            <a:r>
-              <a:rPr sz="1250" b="0">
-                <a:solidFill>
-                  <a:srgbClr val="E6E6E6"/>
-                </a:solidFill>
-                <a:latin typeface="Consolas"/>
-                <a:ea typeface="Consolas"/>
-              </a:rPr>
-              <a:t/>
-            </a:r>
+            <a:endParaRPr sz="1250" b="0">
+              <a:solidFill>
+                <a:srgbClr val="E6E6E6"/>
+              </a:solidFill>
+              <a:latin typeface="Consolas"/>
+              <a:ea typeface="Consolas"/>
+            </a:endParaRPr>
           </a:p>
           <a:p>
             <a:pPr>
@@ -21305,7 +21445,7 @@
 </file>
 
 <file path=ppt/slides/slide49.xml><?xml version="1.0" encoding="utf-8"?>
-<p:sld xmlns:a="http://schemas.openxmlformats.org/drawingml/2006/main" xmlns:p="http://schemas.openxmlformats.org/presentationml/2006/main" xmlns:r="http://schemas.openxmlformats.org/officeDocument/2006/relationships">
+<p:sld xmlns:a="http://schemas.openxmlformats.org/drawingml/2006/main" xmlns:r="http://schemas.openxmlformats.org/officeDocument/2006/relationships" xmlns:p="http://schemas.openxmlformats.org/presentationml/2006/main">
   <p:cSld>
     <p:spTree>
       <p:nvGrpSpPr>
@@ -21313,7 +21453,14 @@
         <p:cNvGrpSpPr/>
         <p:nvPr/>
       </p:nvGrpSpPr>
-      <p:grpSpPr/>
+      <p:grpSpPr>
+        <a:xfrm>
+          <a:off x="0" y="0"/>
+          <a:ext cx="0" cy="0"/>
+          <a:chOff x="0" y="0"/>
+          <a:chExt cx="0" cy="0"/>
+        </a:xfrm>
+      </p:grpSpPr>
       <p:sp>
         <p:nvSpPr>
           <p:cNvPr id="2" name="Rectangle 1"/>
@@ -21355,6 +21502,7 @@
           <a:lstStyle/>
           <a:p>
             <a:pPr algn="ctr"/>
+            <a:endParaRPr/>
           </a:p>
         </p:txBody>
       </p:sp>
@@ -21561,7 +21709,7 @@
 </file>
 
 <file path=ppt/slides/slide5.xml><?xml version="1.0" encoding="utf-8"?>
-<p:sld xmlns:a="http://schemas.openxmlformats.org/drawingml/2006/main" xmlns:p="http://schemas.openxmlformats.org/presentationml/2006/main" xmlns:r="http://schemas.openxmlformats.org/officeDocument/2006/relationships">
+<p:sld xmlns:a="http://schemas.openxmlformats.org/drawingml/2006/main" xmlns:r="http://schemas.openxmlformats.org/officeDocument/2006/relationships" xmlns:p="http://schemas.openxmlformats.org/presentationml/2006/main">
   <p:cSld>
     <p:spTree>
       <p:nvGrpSpPr>
@@ -21569,7 +21717,14 @@
         <p:cNvGrpSpPr/>
         <p:nvPr/>
       </p:nvGrpSpPr>
-      <p:grpSpPr/>
+      <p:grpSpPr>
+        <a:xfrm>
+          <a:off x="0" y="0"/>
+          <a:ext cx="0" cy="0"/>
+          <a:chOff x="0" y="0"/>
+          <a:chExt cx="0" cy="0"/>
+        </a:xfrm>
+      </p:grpSpPr>
       <p:sp>
         <p:nvSpPr>
           <p:cNvPr id="2" name="Rectangle 1"/>
@@ -21611,6 +21766,7 @@
           <a:lstStyle/>
           <a:p>
             <a:pPr algn="ctr"/>
+            <a:endParaRPr/>
           </a:p>
         </p:txBody>
       </p:sp>
@@ -21852,7 +22008,7 @@
 </file>
 
 <file path=ppt/slides/slide50.xml><?xml version="1.0" encoding="utf-8"?>
-<p:sld xmlns:a="http://schemas.openxmlformats.org/drawingml/2006/main" xmlns:p="http://schemas.openxmlformats.org/presentationml/2006/main" xmlns:r="http://schemas.openxmlformats.org/officeDocument/2006/relationships">
+<p:sld xmlns:a="http://schemas.openxmlformats.org/drawingml/2006/main" xmlns:r="http://schemas.openxmlformats.org/officeDocument/2006/relationships" xmlns:p="http://schemas.openxmlformats.org/presentationml/2006/main">
   <p:cSld>
     <p:spTree>
       <p:nvGrpSpPr>
@@ -21860,7 +22016,14 @@
         <p:cNvGrpSpPr/>
         <p:nvPr/>
       </p:nvGrpSpPr>
-      <p:grpSpPr/>
+      <p:grpSpPr>
+        <a:xfrm>
+          <a:off x="0" y="0"/>
+          <a:ext cx="0" cy="0"/>
+          <a:chOff x="0" y="0"/>
+          <a:chExt cx="0" cy="0"/>
+        </a:xfrm>
+      </p:grpSpPr>
       <p:sp>
         <p:nvSpPr>
           <p:cNvPr id="2" name="Rectangle 1"/>
@@ -21902,6 +22065,7 @@
           <a:lstStyle/>
           <a:p>
             <a:pPr algn="ctr"/>
+            <a:endParaRPr/>
           </a:p>
         </p:txBody>
       </p:sp>
@@ -21981,6 +22145,7 @@
           <a:lstStyle/>
           <a:p>
             <a:pPr algn="ctr"/>
+            <a:endParaRPr/>
           </a:p>
         </p:txBody>
       </p:sp>
@@ -22096,6 +22261,20 @@
                 <a:spcPts val="0"/>
               </a:spcAft>
             </a:pPr>
+            <a:endParaRPr sz="1250" b="0">
+              <a:solidFill>
+                <a:srgbClr val="E6E6E6"/>
+              </a:solidFill>
+              <a:latin typeface="Consolas"/>
+              <a:ea typeface="Consolas"/>
+            </a:endParaRPr>
+          </a:p>
+          <a:p>
+            <a:pPr>
+              <a:spcAft>
+                <a:spcPts val="0"/>
+              </a:spcAft>
+            </a:pPr>
             <a:r>
               <a:rPr sz="1250" b="0">
                 <a:solidFill>
@@ -22104,7 +22283,7 @@
                 <a:latin typeface="Consolas"/>
                 <a:ea typeface="Consolas"/>
               </a:rPr>
-              <a:t/>
+              <a:t>SQL&gt; SELECT trigger_name FROM user_triggers WHERE status='DISABLED';</a:t>
             </a:r>
           </a:p>
           <a:p>
@@ -22121,7 +22300,7 @@
                 <a:latin typeface="Consolas"/>
                 <a:ea typeface="Consolas"/>
               </a:rPr>
-              <a:t>SQL&gt; SELECT trigger_name FROM user_triggers WHERE status='DISABLED';</a:t>
+              <a:t>SQL&gt; SELECT object_name FROM user_objects</a:t>
             </a:r>
           </a:p>
           <a:p>
@@ -22138,23 +22317,6 @@
                 <a:latin typeface="Consolas"/>
                 <a:ea typeface="Consolas"/>
               </a:rPr>
-              <a:t>SQL&gt; SELECT object_name FROM user_objects</a:t>
-            </a:r>
-          </a:p>
-          <a:p>
-            <a:pPr>
-              <a:spcAft>
-                <a:spcPts val="0"/>
-              </a:spcAft>
-            </a:pPr>
-            <a:r>
-              <a:rPr sz="1250" b="0">
-                <a:solidFill>
-                  <a:srgbClr val="E6E6E6"/>
-                </a:solidFill>
-                <a:latin typeface="Consolas"/>
-                <a:ea typeface="Consolas"/>
-              </a:rPr>
               <a:t>  2   WHERE object_type='TRIGGER' AND status='INVALID';</a:t>
             </a:r>
           </a:p>
@@ -22164,16 +22326,13 @@
                 <a:spcPts val="0"/>
               </a:spcAft>
             </a:pPr>
-            <a:r>
-              <a:rPr sz="1250" b="0">
-                <a:solidFill>
-                  <a:srgbClr val="E6E6E6"/>
-                </a:solidFill>
-                <a:latin typeface="Consolas"/>
-                <a:ea typeface="Consolas"/>
-              </a:rPr>
-              <a:t/>
-            </a:r>
+            <a:endParaRPr sz="1250" b="0">
+              <a:solidFill>
+                <a:srgbClr val="E6E6E6"/>
+              </a:solidFill>
+              <a:latin typeface="Consolas"/>
+              <a:ea typeface="Consolas"/>
+            </a:endParaRPr>
           </a:p>
           <a:p>
             <a:pPr>
@@ -22237,7 +22396,7 @@
 </file>
 
 <file path=ppt/slides/slide51.xml><?xml version="1.0" encoding="utf-8"?>
-<p:sld xmlns:a="http://schemas.openxmlformats.org/drawingml/2006/main" xmlns:p="http://schemas.openxmlformats.org/presentationml/2006/main" xmlns:r="http://schemas.openxmlformats.org/officeDocument/2006/relationships">
+<p:sld xmlns:a="http://schemas.openxmlformats.org/drawingml/2006/main" xmlns:r="http://schemas.openxmlformats.org/officeDocument/2006/relationships" xmlns:p="http://schemas.openxmlformats.org/presentationml/2006/main">
   <p:cSld>
     <p:spTree>
       <p:nvGrpSpPr>
@@ -22245,7 +22404,14 @@
         <p:cNvGrpSpPr/>
         <p:nvPr/>
       </p:nvGrpSpPr>
-      <p:grpSpPr/>
+      <p:grpSpPr>
+        <a:xfrm>
+          <a:off x="0" y="0"/>
+          <a:ext cx="0" cy="0"/>
+          <a:chOff x="0" y="0"/>
+          <a:chExt cx="0" cy="0"/>
+        </a:xfrm>
+      </p:grpSpPr>
       <p:sp>
         <p:nvSpPr>
           <p:cNvPr id="2" name="Rectangle 1"/>
@@ -22287,6 +22453,7 @@
           <a:lstStyle/>
           <a:p>
             <a:pPr algn="ctr"/>
+            <a:endParaRPr/>
           </a:p>
         </p:txBody>
       </p:sp>
@@ -22493,7 +22660,7 @@
 </file>
 
 <file path=ppt/slides/slide52.xml><?xml version="1.0" encoding="utf-8"?>
-<p:sld xmlns:a="http://schemas.openxmlformats.org/drawingml/2006/main" xmlns:p="http://schemas.openxmlformats.org/presentationml/2006/main" xmlns:r="http://schemas.openxmlformats.org/officeDocument/2006/relationships">
+<p:sld xmlns:a="http://schemas.openxmlformats.org/drawingml/2006/main" xmlns:r="http://schemas.openxmlformats.org/officeDocument/2006/relationships" xmlns:p="http://schemas.openxmlformats.org/presentationml/2006/main">
   <p:cSld>
     <p:spTree>
       <p:nvGrpSpPr>
@@ -22501,7 +22668,14 @@
         <p:cNvGrpSpPr/>
         <p:nvPr/>
       </p:nvGrpSpPr>
-      <p:grpSpPr/>
+      <p:grpSpPr>
+        <a:xfrm>
+          <a:off x="0" y="0"/>
+          <a:ext cx="0" cy="0"/>
+          <a:chOff x="0" y="0"/>
+          <a:chExt cx="0" cy="0"/>
+        </a:xfrm>
+      </p:grpSpPr>
       <p:sp>
         <p:nvSpPr>
           <p:cNvPr id="2" name="Rectangle 1"/>
@@ -22543,6 +22717,7 @@
           <a:lstStyle/>
           <a:p>
             <a:pPr algn="ctr"/>
+            <a:endParaRPr/>
           </a:p>
         </p:txBody>
       </p:sp>
@@ -22715,7 +22890,7 @@
 </file>
 
 <file path=ppt/slides/slide53.xml><?xml version="1.0" encoding="utf-8"?>
-<p:sld xmlns:a="http://schemas.openxmlformats.org/drawingml/2006/main" xmlns:p="http://schemas.openxmlformats.org/presentationml/2006/main" xmlns:r="http://schemas.openxmlformats.org/officeDocument/2006/relationships">
+<p:sld xmlns:a="http://schemas.openxmlformats.org/drawingml/2006/main" xmlns:r="http://schemas.openxmlformats.org/officeDocument/2006/relationships" xmlns:p="http://schemas.openxmlformats.org/presentationml/2006/main">
   <p:cSld>
     <p:spTree>
       <p:nvGrpSpPr>
@@ -22723,7 +22898,14 @@
         <p:cNvGrpSpPr/>
         <p:nvPr/>
       </p:nvGrpSpPr>
-      <p:grpSpPr/>
+      <p:grpSpPr>
+        <a:xfrm>
+          <a:off x="0" y="0"/>
+          <a:ext cx="0" cy="0"/>
+          <a:chOff x="0" y="0"/>
+          <a:chExt cx="0" cy="0"/>
+        </a:xfrm>
+      </p:grpSpPr>
       <p:sp>
         <p:nvSpPr>
           <p:cNvPr id="2" name="Rectangle 1"/>
@@ -22765,6 +22947,7 @@
           <a:lstStyle/>
           <a:p>
             <a:pPr algn="ctr"/>
+            <a:endParaRPr/>
           </a:p>
         </p:txBody>
       </p:sp>
@@ -22937,7 +23120,7 @@
 </file>
 
 <file path=ppt/slides/slide54.xml><?xml version="1.0" encoding="utf-8"?>
-<p:sld xmlns:a="http://schemas.openxmlformats.org/drawingml/2006/main" xmlns:p="http://schemas.openxmlformats.org/presentationml/2006/main" xmlns:r="http://schemas.openxmlformats.org/officeDocument/2006/relationships">
+<p:sld xmlns:a="http://schemas.openxmlformats.org/drawingml/2006/main" xmlns:r="http://schemas.openxmlformats.org/officeDocument/2006/relationships" xmlns:p="http://schemas.openxmlformats.org/presentationml/2006/main">
   <p:cSld>
     <p:spTree>
       <p:nvGrpSpPr>
@@ -22945,7 +23128,14 @@
         <p:cNvGrpSpPr/>
         <p:nvPr/>
       </p:nvGrpSpPr>
-      <p:grpSpPr/>
+      <p:grpSpPr>
+        <a:xfrm>
+          <a:off x="0" y="0"/>
+          <a:ext cx="0" cy="0"/>
+          <a:chOff x="0" y="0"/>
+          <a:chExt cx="0" cy="0"/>
+        </a:xfrm>
+      </p:grpSpPr>
       <p:sp>
         <p:nvSpPr>
           <p:cNvPr id="2" name="Rectangle 1"/>
@@ -22987,6 +23177,7 @@
           <a:lstStyle/>
           <a:p>
             <a:pPr algn="ctr"/>
+            <a:endParaRPr/>
           </a:p>
         </p:txBody>
       </p:sp>
@@ -23193,7 +23384,7 @@
 </file>
 
 <file path=ppt/slides/slide55.xml><?xml version="1.0" encoding="utf-8"?>
-<p:sld xmlns:a="http://schemas.openxmlformats.org/drawingml/2006/main" xmlns:p="http://schemas.openxmlformats.org/presentationml/2006/main" xmlns:r="http://schemas.openxmlformats.org/officeDocument/2006/relationships">
+<p:sld xmlns:a="http://schemas.openxmlformats.org/drawingml/2006/main" xmlns:r="http://schemas.openxmlformats.org/officeDocument/2006/relationships" xmlns:p="http://schemas.openxmlformats.org/presentationml/2006/main">
   <p:cSld>
     <p:spTree>
       <p:nvGrpSpPr>
@@ -23201,7 +23392,14 @@
         <p:cNvGrpSpPr/>
         <p:nvPr/>
       </p:nvGrpSpPr>
-      <p:grpSpPr/>
+      <p:grpSpPr>
+        <a:xfrm>
+          <a:off x="0" y="0"/>
+          <a:ext cx="0" cy="0"/>
+          <a:chOff x="0" y="0"/>
+          <a:chExt cx="0" cy="0"/>
+        </a:xfrm>
+      </p:grpSpPr>
       <p:sp>
         <p:nvSpPr>
           <p:cNvPr id="2" name="Rectangle 1"/>
@@ -23243,6 +23441,7 @@
           <a:lstStyle/>
           <a:p>
             <a:pPr algn="ctr"/>
+            <a:endParaRPr/>
           </a:p>
         </p:txBody>
       </p:sp>
@@ -23449,7 +23648,7 @@
 </file>
 
 <file path=ppt/slides/slide6.xml><?xml version="1.0" encoding="utf-8"?>
-<p:sld xmlns:a="http://schemas.openxmlformats.org/drawingml/2006/main" xmlns:p="http://schemas.openxmlformats.org/presentationml/2006/main" xmlns:r="http://schemas.openxmlformats.org/officeDocument/2006/relationships">
+<p:sld xmlns:a="http://schemas.openxmlformats.org/drawingml/2006/main" xmlns:r="http://schemas.openxmlformats.org/officeDocument/2006/relationships" xmlns:p="http://schemas.openxmlformats.org/presentationml/2006/main">
   <p:cSld>
     <p:spTree>
       <p:nvGrpSpPr>
@@ -23457,7 +23656,14 @@
         <p:cNvGrpSpPr/>
         <p:nvPr/>
       </p:nvGrpSpPr>
-      <p:grpSpPr/>
+      <p:grpSpPr>
+        <a:xfrm>
+          <a:off x="0" y="0"/>
+          <a:ext cx="0" cy="0"/>
+          <a:chOff x="0" y="0"/>
+          <a:chExt cx="0" cy="0"/>
+        </a:xfrm>
+      </p:grpSpPr>
       <p:sp>
         <p:nvSpPr>
           <p:cNvPr id="2" name="Rectangle 1"/>
@@ -23499,6 +23705,7 @@
           <a:lstStyle/>
           <a:p>
             <a:pPr algn="ctr"/>
+            <a:endParaRPr/>
           </a:p>
         </p:txBody>
       </p:sp>
@@ -23705,7 +23912,7 @@
 </file>
 
 <file path=ppt/slides/slide7.xml><?xml version="1.0" encoding="utf-8"?>
-<p:sld xmlns:a="http://schemas.openxmlformats.org/drawingml/2006/main" xmlns:p="http://schemas.openxmlformats.org/presentationml/2006/main" xmlns:r="http://schemas.openxmlformats.org/officeDocument/2006/relationships">
+<p:sld xmlns:a="http://schemas.openxmlformats.org/drawingml/2006/main" xmlns:r="http://schemas.openxmlformats.org/officeDocument/2006/relationships" xmlns:p="http://schemas.openxmlformats.org/presentationml/2006/main">
   <p:cSld>
     <p:spTree>
       <p:nvGrpSpPr>
@@ -23713,7 +23920,14 @@
         <p:cNvGrpSpPr/>
         <p:nvPr/>
       </p:nvGrpSpPr>
-      <p:grpSpPr/>
+      <p:grpSpPr>
+        <a:xfrm>
+          <a:off x="0" y="0"/>
+          <a:ext cx="0" cy="0"/>
+          <a:chOff x="0" y="0"/>
+          <a:chExt cx="0" cy="0"/>
+        </a:xfrm>
+      </p:grpSpPr>
       <p:sp>
         <p:nvSpPr>
           <p:cNvPr id="2" name="Rectangle 1"/>
@@ -23755,6 +23969,7 @@
           <a:lstStyle/>
           <a:p>
             <a:pPr algn="ctr"/>
+            <a:endParaRPr/>
           </a:p>
         </p:txBody>
       </p:sp>
@@ -23978,7 +24193,7 @@
 </file>
 
 <file path=ppt/slides/slide8.xml><?xml version="1.0" encoding="utf-8"?>
-<p:sld xmlns:a="http://schemas.openxmlformats.org/drawingml/2006/main" xmlns:p="http://schemas.openxmlformats.org/presentationml/2006/main" xmlns:r="http://schemas.openxmlformats.org/officeDocument/2006/relationships">
+<p:sld xmlns:a="http://schemas.openxmlformats.org/drawingml/2006/main" xmlns:r="http://schemas.openxmlformats.org/officeDocument/2006/relationships" xmlns:p="http://schemas.openxmlformats.org/presentationml/2006/main">
   <p:cSld>
     <p:spTree>
       <p:nvGrpSpPr>
@@ -23986,7 +24201,14 @@
         <p:cNvGrpSpPr/>
         <p:nvPr/>
       </p:nvGrpSpPr>
-      <p:grpSpPr/>
+      <p:grpSpPr>
+        <a:xfrm>
+          <a:off x="0" y="0"/>
+          <a:ext cx="0" cy="0"/>
+          <a:chOff x="0" y="0"/>
+          <a:chExt cx="0" cy="0"/>
+        </a:xfrm>
+      </p:grpSpPr>
       <p:sp>
         <p:nvSpPr>
           <p:cNvPr id="2" name="Rectangle 1"/>
@@ -24028,6 +24250,7 @@
           <a:lstStyle/>
           <a:p>
             <a:pPr algn="ctr"/>
+            <a:endParaRPr/>
           </a:p>
         </p:txBody>
       </p:sp>
@@ -24107,6 +24330,7 @@
           <a:lstStyle/>
           <a:p>
             <a:pPr algn="ctr"/>
+            <a:endParaRPr/>
           </a:p>
         </p:txBody>
       </p:sp>
@@ -24222,16 +24446,13 @@
                 <a:spcPts val="0"/>
               </a:spcAft>
             </a:pPr>
-            <a:r>
-              <a:rPr sz="1250" b="0">
-                <a:solidFill>
-                  <a:srgbClr val="E6E6E6"/>
-                </a:solidFill>
-                <a:latin typeface="Consolas"/>
-                <a:ea typeface="Consolas"/>
-              </a:rPr>
-              <a:t/>
-            </a:r>
+            <a:endParaRPr sz="1250" b="0">
+              <a:solidFill>
+                <a:srgbClr val="E6E6E6"/>
+              </a:solidFill>
+              <a:latin typeface="Consolas"/>
+              <a:ea typeface="Consolas"/>
+            </a:endParaRPr>
           </a:p>
           <a:p>
             <a:pPr>
@@ -24363,7 +24584,7 @@
 </file>
 
 <file path=ppt/slides/slide9.xml><?xml version="1.0" encoding="utf-8"?>
-<p:sld xmlns:a="http://schemas.openxmlformats.org/drawingml/2006/main" xmlns:p="http://schemas.openxmlformats.org/presentationml/2006/main" xmlns:r="http://schemas.openxmlformats.org/officeDocument/2006/relationships">
+<p:sld xmlns:a="http://schemas.openxmlformats.org/drawingml/2006/main" xmlns:r="http://schemas.openxmlformats.org/officeDocument/2006/relationships" xmlns:p="http://schemas.openxmlformats.org/presentationml/2006/main">
   <p:cSld>
     <p:spTree>
       <p:nvGrpSpPr>
@@ -24371,7 +24592,14 @@
         <p:cNvGrpSpPr/>
         <p:nvPr/>
       </p:nvGrpSpPr>
-      <p:grpSpPr/>
+      <p:grpSpPr>
+        <a:xfrm>
+          <a:off x="0" y="0"/>
+          <a:ext cx="0" cy="0"/>
+          <a:chOff x="0" y="0"/>
+          <a:chExt cx="0" cy="0"/>
+        </a:xfrm>
+      </p:grpSpPr>
       <p:sp>
         <p:nvSpPr>
           <p:cNvPr id="2" name="Rectangle 1"/>
@@ -24413,6 +24641,7 @@
           <a:lstStyle/>
           <a:p>
             <a:pPr algn="ctr"/>
+            <a:endParaRPr/>
           </a:p>
         </p:txBody>
       </p:sp>
@@ -24922,7 +25151,7 @@
 </file>
 
 <file path=ppt/theme/theme2.xml><?xml version="1.0" encoding="utf-8"?>
-<a:theme xmlns:a="http://schemas.openxmlformats.org/drawingml/2006/main" name="Office Theme">
+<a:theme xmlns:a="http://schemas.openxmlformats.org/drawingml/2006/main" name="Office 테마">
   <a:themeElements>
     <a:clrScheme name="Office">
       <a:dk1>
@@ -24932,44 +25161,44 @@
         <a:sysClr val="window" lastClr="FFFFFF"/>
       </a:lt1>
       <a:dk2>
-        <a:srgbClr val="1F497D"/>
+        <a:srgbClr val="0E2841"/>
       </a:dk2>
       <a:lt2>
-        <a:srgbClr val="EEECE1"/>
+        <a:srgbClr val="E8E8E8"/>
       </a:lt2>
       <a:accent1>
-        <a:srgbClr val="4F81BD"/>
+        <a:srgbClr val="156082"/>
       </a:accent1>
       <a:accent2>
-        <a:srgbClr val="C0504D"/>
+        <a:srgbClr val="E97132"/>
       </a:accent2>
       <a:accent3>
-        <a:srgbClr val="9BBB59"/>
+        <a:srgbClr val="196B24"/>
       </a:accent3>
       <a:accent4>
-        <a:srgbClr val="8064A2"/>
+        <a:srgbClr val="0F9ED5"/>
       </a:accent4>
       <a:accent5>
-        <a:srgbClr val="4BACC6"/>
+        <a:srgbClr val="A02B93"/>
       </a:accent5>
       <a:accent6>
-        <a:srgbClr val="F79646"/>
+        <a:srgbClr val="4EA72E"/>
       </a:accent6>
       <a:hlink>
-        <a:srgbClr val="0000FF"/>
+        <a:srgbClr val="467886"/>
       </a:hlink>
       <a:folHlink>
-        <a:srgbClr val="800080"/>
+        <a:srgbClr val="96607D"/>
       </a:folHlink>
     </a:clrScheme>
     <a:fontScheme name="Office">
       <a:majorFont>
-        <a:latin typeface="Calibri"/>
+        <a:latin typeface="맑은 고딕" panose="02110004020202020204"/>
         <a:ea typeface=""/>
         <a:cs typeface=""/>
-        <a:font script="Jpan" typeface="ＭＳ Ｐゴシック"/>
+        <a:font script="Jpan" typeface="游ゴシック Light"/>
         <a:font script="Hang" typeface="맑은 고딕"/>
-        <a:font script="Hans" typeface="宋体"/>
+        <a:font script="Hans" typeface="等线 Light"/>
         <a:font script="Hant" typeface="新細明體"/>
         <a:font script="Arab" typeface="Times New Roman"/>
         <a:font script="Hebr" typeface="Times New Roman"/>
@@ -24997,14 +25226,31 @@
         <a:font script="Viet" typeface="Times New Roman"/>
         <a:font script="Uigh" typeface="Microsoft Uighur"/>
         <a:font script="Geor" typeface="Sylfaen"/>
+        <a:font script="Armn" typeface="Arial"/>
+        <a:font script="Bugi" typeface="Leelawadee UI"/>
+        <a:font script="Bopo" typeface="Microsoft JhengHei"/>
+        <a:font script="Java" typeface="Javanese Text"/>
+        <a:font script="Lisu" typeface="Segoe UI"/>
+        <a:font script="Mymr" typeface="Myanmar Text"/>
+        <a:font script="Nkoo" typeface="Ebrima"/>
+        <a:font script="Olck" typeface="Nirmala UI"/>
+        <a:font script="Osma" typeface="Ebrima"/>
+        <a:font script="Phag" typeface="Phagspa"/>
+        <a:font script="Syrn" typeface="Estrangelo Edessa"/>
+        <a:font script="Syrj" typeface="Estrangelo Edessa"/>
+        <a:font script="Syre" typeface="Estrangelo Edessa"/>
+        <a:font script="Sora" typeface="Nirmala UI"/>
+        <a:font script="Tale" typeface="Microsoft Tai Le"/>
+        <a:font script="Talu" typeface="Microsoft New Tai Lue"/>
+        <a:font script="Tfng" typeface="Ebrima"/>
       </a:majorFont>
       <a:minorFont>
-        <a:latin typeface="Calibri"/>
+        <a:latin typeface="맑은 고딕" panose="02110004020202020204"/>
         <a:ea typeface=""/>
         <a:cs typeface=""/>
-        <a:font script="Jpan" typeface="ＭＳ Ｐゴシック"/>
+        <a:font script="Jpan" typeface="游ゴシック"/>
         <a:font script="Hang" typeface="맑은 고딕"/>
-        <a:font script="Hans" typeface="宋体"/>
+        <a:font script="Hans" typeface="等线"/>
         <a:font script="Hant" typeface="新細明體"/>
         <a:font script="Arab" typeface="Arial"/>
         <a:font script="Hebr" typeface="Arial"/>
@@ -25032,6 +25278,23 @@
         <a:font script="Viet" typeface="Arial"/>
         <a:font script="Uigh" typeface="Microsoft Uighur"/>
         <a:font script="Geor" typeface="Sylfaen"/>
+        <a:font script="Armn" typeface="Arial"/>
+        <a:font script="Bugi" typeface="Leelawadee UI"/>
+        <a:font script="Bopo" typeface="Microsoft JhengHei"/>
+        <a:font script="Java" typeface="Javanese Text"/>
+        <a:font script="Lisu" typeface="Segoe UI"/>
+        <a:font script="Mymr" typeface="Myanmar Text"/>
+        <a:font script="Nkoo" typeface="Ebrima"/>
+        <a:font script="Olck" typeface="Nirmala UI"/>
+        <a:font script="Osma" typeface="Ebrima"/>
+        <a:font script="Phag" typeface="Phagspa"/>
+        <a:font script="Syrn" typeface="Estrangelo Edessa"/>
+        <a:font script="Syrj" typeface="Estrangelo Edessa"/>
+        <a:font script="Syre" typeface="Estrangelo Edessa"/>
+        <a:font script="Sora" typeface="Nirmala UI"/>
+        <a:font script="Tale" typeface="Microsoft Tai Le"/>
+        <a:font script="Talu" typeface="Microsoft New Tai Lue"/>
+        <a:font script="Tfng" typeface="Ebrima"/>
       </a:minorFont>
     </a:fontScheme>
     <a:fmtScheme name="Office">
@@ -25043,180 +25306,136 @@
           <a:gsLst>
             <a:gs pos="0">
               <a:schemeClr val="phClr">
-                <a:tint val="50000"/>
-                <a:satMod val="300000"/>
+                <a:lumMod val="110000"/>
+                <a:satMod val="105000"/>
+                <a:tint val="67000"/>
               </a:schemeClr>
             </a:gs>
-            <a:gs pos="35000">
+            <a:gs pos="50000">
               <a:schemeClr val="phClr">
-                <a:tint val="37000"/>
-                <a:satMod val="300000"/>
+                <a:lumMod val="105000"/>
+                <a:satMod val="103000"/>
+                <a:tint val="73000"/>
               </a:schemeClr>
             </a:gs>
             <a:gs pos="100000">
               <a:schemeClr val="phClr">
-                <a:tint val="15000"/>
-                <a:satMod val="350000"/>
+                <a:lumMod val="105000"/>
+                <a:satMod val="109000"/>
+                <a:tint val="81000"/>
               </a:schemeClr>
             </a:gs>
           </a:gsLst>
-          <a:lin ang="16200000" scaled="1"/>
+          <a:lin ang="5400000" scaled="0"/>
         </a:gradFill>
         <a:gradFill rotWithShape="1">
           <a:gsLst>
             <a:gs pos="0">
               <a:schemeClr val="phClr">
-                <a:tint val="100000"/>
+                <a:satMod val="103000"/>
+                <a:lumMod val="102000"/>
+                <a:tint val="94000"/>
+              </a:schemeClr>
+            </a:gs>
+            <a:gs pos="50000">
+              <a:schemeClr val="phClr">
+                <a:satMod val="110000"/>
+                <a:lumMod val="100000"/>
                 <a:shade val="100000"/>
-                <a:satMod val="130000"/>
               </a:schemeClr>
             </a:gs>
             <a:gs pos="100000">
               <a:schemeClr val="phClr">
-                <a:tint val="50000"/>
-                <a:shade val="100000"/>
-                <a:satMod val="350000"/>
+                <a:lumMod val="99000"/>
+                <a:satMod val="120000"/>
+                <a:shade val="78000"/>
               </a:schemeClr>
             </a:gs>
           </a:gsLst>
-          <a:lin ang="16200000" scaled="0"/>
+          <a:lin ang="5400000" scaled="0"/>
         </a:gradFill>
       </a:fillStyleLst>
       <a:lnStyleLst>
-        <a:ln w="9525" cap="flat" cmpd="sng" algn="ctr">
+        <a:ln w="12700" cap="flat" cmpd="sng" algn="ctr">
           <a:solidFill>
-            <a:schemeClr val="phClr">
-              <a:shade val="95000"/>
-              <a:satMod val="105000"/>
-            </a:schemeClr>
+            <a:schemeClr val="phClr"/>
           </a:solidFill>
           <a:prstDash val="solid"/>
+          <a:miter lim="800000"/>
+        </a:ln>
+        <a:ln w="19050" cap="flat" cmpd="sng" algn="ctr">
+          <a:solidFill>
+            <a:schemeClr val="phClr"/>
+          </a:solidFill>
+          <a:prstDash val="solid"/>
+          <a:miter lim="800000"/>
         </a:ln>
         <a:ln w="25400" cap="flat" cmpd="sng" algn="ctr">
           <a:solidFill>
             <a:schemeClr val="phClr"/>
           </a:solidFill>
           <a:prstDash val="solid"/>
-        </a:ln>
-        <a:ln w="38100" cap="flat" cmpd="sng" algn="ctr">
-          <a:solidFill>
-            <a:schemeClr val="phClr"/>
-          </a:solidFill>
-          <a:prstDash val="solid"/>
+          <a:miter lim="800000"/>
         </a:ln>
       </a:lnStyleLst>
       <a:effectStyleLst>
         <a:effectStyle>
+          <a:effectLst/>
+        </a:effectStyle>
+        <a:effectStyle>
+          <a:effectLst/>
+        </a:effectStyle>
+        <a:effectStyle>
           <a:effectLst>
-            <a:outerShdw blurRad="40000" dist="20000" dir="5400000" rotWithShape="0">
+            <a:outerShdw blurRad="57150" dist="19050" dir="5400000" algn="ctr" rotWithShape="0">
               <a:srgbClr val="000000">
-                <a:alpha val="38000"/>
+                <a:alpha val="63000"/>
               </a:srgbClr>
             </a:outerShdw>
           </a:effectLst>
-        </a:effectStyle>
-        <a:effectStyle>
-          <a:effectLst>
-            <a:outerShdw blurRad="40000" dist="23000" dir="5400000" rotWithShape="0">
-              <a:srgbClr val="000000">
-                <a:alpha val="35000"/>
-              </a:srgbClr>
-            </a:outerShdw>
-          </a:effectLst>
-        </a:effectStyle>
-        <a:effectStyle>
-          <a:effectLst>
-            <a:outerShdw blurRad="40000" dist="23000" dir="5400000" rotWithShape="0">
-              <a:srgbClr val="000000">
-                <a:alpha val="35000"/>
-              </a:srgbClr>
-            </a:outerShdw>
-          </a:effectLst>
-          <a:scene3d>
-            <a:camera prst="orthographicFront">
-              <a:rot lat="0" lon="0" rev="0"/>
-            </a:camera>
-            <a:lightRig rig="threePt" dir="t">
-              <a:rot lat="0" lon="0" rev="1200000"/>
-            </a:lightRig>
-          </a:scene3d>
-          <a:sp3d>
-            <a:bevelT w="63500" h="25400"/>
-          </a:sp3d>
         </a:effectStyle>
       </a:effectStyleLst>
       <a:bgFillStyleLst>
         <a:solidFill>
           <a:schemeClr val="phClr"/>
         </a:solidFill>
+        <a:solidFill>
+          <a:schemeClr val="phClr">
+            <a:tint val="95000"/>
+            <a:satMod val="170000"/>
+          </a:schemeClr>
+        </a:solidFill>
         <a:gradFill rotWithShape="1">
           <a:gsLst>
             <a:gs pos="0">
               <a:schemeClr val="phClr">
-                <a:tint val="40000"/>
-                <a:satMod val="350000"/>
+                <a:tint val="93000"/>
+                <a:satMod val="150000"/>
+                <a:shade val="98000"/>
+                <a:lumMod val="102000"/>
               </a:schemeClr>
             </a:gs>
-            <a:gs pos="40000">
+            <a:gs pos="50000">
               <a:schemeClr val="phClr">
-                <a:tint val="45000"/>
-                <a:shade val="99000"/>
-                <a:satMod val="350000"/>
+                <a:tint val="98000"/>
+                <a:satMod val="130000"/>
+                <a:shade val="90000"/>
+                <a:lumMod val="103000"/>
               </a:schemeClr>
             </a:gs>
             <a:gs pos="100000">
               <a:schemeClr val="phClr">
-                <a:shade val="20000"/>
-                <a:satMod val="255000"/>
+                <a:shade val="63000"/>
+                <a:satMod val="120000"/>
               </a:schemeClr>
             </a:gs>
           </a:gsLst>
-          <a:path path="circle">
-            <a:fillToRect l="50000" t="-80000" r="50000" b="180000"/>
-          </a:path>
-        </a:gradFill>
-        <a:gradFill rotWithShape="1">
-          <a:gsLst>
-            <a:gs pos="0">
-              <a:schemeClr val="phClr">
-                <a:tint val="80000"/>
-                <a:satMod val="300000"/>
-              </a:schemeClr>
-            </a:gs>
-            <a:gs pos="100000">
-              <a:schemeClr val="phClr">
-                <a:shade val="30000"/>
-                <a:satMod val="200000"/>
-              </a:schemeClr>
-            </a:gs>
-          </a:gsLst>
-          <a:path path="circle">
-            <a:fillToRect l="50000" t="50000" r="50000" b="50000"/>
-          </a:path>
+          <a:lin ang="5400000" scaled="0"/>
         </a:gradFill>
       </a:bgFillStyleLst>
     </a:fmtScheme>
   </a:themeElements>
   <a:objectDefaults>
-    <a:spDef>
-      <a:spPr/>
-      <a:bodyPr/>
-      <a:lstStyle/>
-      <a:style>
-        <a:lnRef idx="1">
-          <a:schemeClr val="accent1"/>
-        </a:lnRef>
-        <a:fillRef idx="3">
-          <a:schemeClr val="accent1"/>
-        </a:fillRef>
-        <a:effectRef idx="2">
-          <a:schemeClr val="accent1"/>
-        </a:effectRef>
-        <a:fontRef idx="minor">
-          <a:schemeClr val="lt1"/>
-        </a:fontRef>
-      </a:style>
-    </a:spDef>
     <a:lnDef>
       <a:spPr/>
       <a:bodyPr/>
@@ -25238,5 +25457,10 @@
     </a:lnDef>
   </a:objectDefaults>
   <a:extraClrSchemeLst/>
+  <a:extLst>
+    <a:ext uri="{05A4C25C-085E-4340-85A3-A5531E510DB2}">
+      <thm15:themeFamily xmlns:thm15="http://schemas.microsoft.com/office/thememl/2012/main" name="Office Theme" id="{2E142A2C-CD16-42D6-873A-C26D2A0506FA}" vid="{1BDDFF52-6CD6-40A5-AB3C-68EB2F1E4D0A}"/>
+    </a:ext>
+  </a:extLst>
 </a:theme>
 </file>